--- a/hackathon/files/template/AI-in-Action-Final-Presentation-Template.pptx
+++ b/hackathon/files/template/AI-in-Action-Final-Presentation-Template.pptx
@@ -21,6 +21,7 @@
     <p:sldId id="266" r:id="rId18"/>
     <p:sldId id="267" r:id="rId19"/>
     <p:sldId id="268" r:id="rId20"/>
+    <p:sldId id="269" r:id="rId21"/>
   </p:sldIdLst>
   <p:sldSz cx="12192000" cy="6858000"/>
   <p:notesSz cx="6858000" cy="9144000"/>
@@ -589,22 +590,53 @@
           <a:lstStyle/>
           <a:p>
             <a:r>
-              <a:t>TIME: 0:30 (whole talk: about 20 minutes, give or take, including a few questions).</a:t>
-            </a:r>
-          </a:p>
-          <a:p>
-            <a:r>
-              <a:t>FILL IN: team name, vertical (01 Publications Brain / 02 Insights Engine / 03 Congress Monitor / 04 Field Intelligence Engine), one line saying what your AI workforce does and for whom, presenter names.</a:t>
+              <a:t>FOR THE AGENT:</a:t>
+            </a:r>
+          </a:p>
+          <a:p>
+            <a:r>
+              <a:t>- Put here: team name, vertical (01 Publications Brain / 02 Insights Engine / 03 Congress Monitor / 04 Field Intelligence Engine), a one-line promise of what the AI workforce does and for whom, presenter names.</a:t>
+            </a:r>
+          </a:p>
+          <a:p>
+            <a:r>
+              <a:t>- Draw from: capture log §0 Team and setup; §4 Problem statement.</a:t>
+            </a:r>
+          </a:p>
+          <a:p>
+            <a:r>
+              <a:t>- Word limit: about 20 words of your own.</a:t>
+            </a:r>
+          </a:p>
+          <a:p>
+            <a:r>
+              <a:t>- Visual: keep the hero illustration and layout; text stays on the left.</a:t>
+            </a:r>
+          </a:p>
+          <a:p>
+            <a:r>
+              <a:t>- Also: the deck is generic and disclosure-free; do not add a speaker disclosure unless the team asks.</a:t>
+            </a:r>
+          </a:p>
+          <a:p>
+            <a:r>
+              <a:t>- Never invent numbers, names, quotes or sources. If the capture log does not have it, leave the [bracket] and ask the team.</a:t>
+            </a:r>
+          </a:p>
+          <a:p/>
+          <a:p>
+            <a:r>
+              <a:t>FOR THE TEAM:</a:t>
+            </a:r>
+          </a:p>
+          <a:p>
+            <a:r>
+              <a:t>TIME: about ½ minute. The whole talk is about 20 minutes, give or take, including a few questions.</a:t>
             </a:r>
           </a:p>
           <a:p>
             <a:r>
               <a:t>SAY: who you are and the one-sentence promise. Do not explain the agenda.</a:t>
-            </a:r>
-          </a:p>
-          <a:p>
-            <a:r>
-              <a:t>NOTE: this template is generic and disclosure-free; add your own company disclosure only if your organisation requires one. The hidden last slide is a guide for building the deck; delete it before presenting.</a:t>
             </a:r>
           </a:p>
         </p:txBody>
@@ -674,22 +706,48 @@
           <a:lstStyle/>
           <a:p>
             <a:r>
-              <a:t>TIME: 1:00.</a:t>
-            </a:r>
-          </a:p>
-          <a:p>
-            <a:r>
-              <a:t>FILL IN: left = Efficiency AI (today's work, done faster: name the task and the time it no longer takes). Right = Opportunity AI (something your team could not do before at all, e.g. reading every congress session instead of the top ten, a brief before every HCP call instead of the top 20 KOLs, insights every week instead of every quarter). Name who benefits.</a:t>
-            </a:r>
-          </a:p>
-          <a:p>
-            <a:r>
-              <a:t>SAY: spend most of the minute on the right-hand side. That is what leadership remembers.</a:t>
-            </a:r>
-          </a:p>
-          <a:p>
-            <a:r>
-              <a:t>TIP: the Opportunity idea should be specific enough that someone could pilot it next quarter.</a:t>
+              <a:t>FOR THE AGENT:</a:t>
+            </a:r>
+          </a:p>
+          <a:p>
+            <a:r>
+              <a:t>- Put here: green (agent proceeds), yellow (proceed and flag) and red (human decides) examples from the real swarm; the top three risks and the guardrail built for each.</a:t>
+            </a:r>
+          </a:p>
+          <a:p>
+            <a:r>
+              <a:t>- Draw from: capture log §11 Risks and guardrails; §7 (safety flags).</a:t>
+            </a:r>
+          </a:p>
+          <a:p>
+            <a:r>
+              <a:t>- Word limit: about 25 words.</a:t>
+            </a:r>
+          </a:p>
+          <a:p>
+            <a:r>
+              <a:t>- Visual: traffic-light lanes + three risk → guardrail pairs (keep the layout).</a:t>
+            </a:r>
+          </a:p>
+          <a:p>
+            <a:r>
+              <a:t>- Never invent numbers, names, quotes or sources. If the capture log does not have it, leave the [bracket] and ask the team.</a:t>
+            </a:r>
+          </a:p>
+          <a:p/>
+          <a:p>
+            <a:r>
+              <a:t>FOR THE TEAM:</a:t>
+            </a:r>
+          </a:p>
+          <a:p>
+            <a:r>
+              <a:t>TIME: about 1 minute.</a:t>
+            </a:r>
+          </a:p>
+          <a:p>
+            <a:r>
+              <a:t>SAY: one breath per lane, then the risk you worried about most.</a:t>
             </a:r>
           </a:p>
         </p:txBody>
@@ -759,22 +817,48 @@
           <a:lstStyle/>
           <a:p>
             <a:r>
-              <a:t>TIME: 1:00.</a:t>
-            </a:r>
-          </a:p>
-          <a:p>
-            <a:r>
-              <a:t>FILL IN: one concrete action per horizon with an owner (role), and what you need from the room: a sponsor, access to non-confidential data, a compliance conversation, a pilot team.</a:t>
-            </a:r>
-          </a:p>
-          <a:p>
-            <a:r>
-              <a:t>SAY: end with the ask. 'We need one brand team and four weeks of de-identified field notes to pilot this' is a good ask.</a:t>
-            </a:r>
-          </a:p>
-          <a:p>
-            <a:r>
-              <a:t>KEEP: honest about what is not built yet.</a:t>
+              <a:t>FOR THE AGENT:</a:t>
+            </a:r>
+          </a:p>
+          <a:p>
+            <a:r>
+              <a:t>- Put here: left: the Efficiency idea (task, time no longer needed, who gets the time back); right: the Opportunity idea (the new capability and who benefits).</a:t>
+            </a:r>
+          </a:p>
+          <a:p>
+            <a:r>
+              <a:t>- Draw from: capture log §4 Problem and ideas (E and O lists, chosen idea); §10 for the % figure.</a:t>
+            </a:r>
+          </a:p>
+          <a:p>
+            <a:r>
+              <a:t>- Word limit: about 25 words.</a:t>
+            </a:r>
+          </a:p>
+          <a:p>
+            <a:r>
+              <a:t>- Visual: two panels (keep the layout; one big phrase per panel).</a:t>
+            </a:r>
+          </a:p>
+          <a:p>
+            <a:r>
+              <a:t>- Never invent numbers, names, quotes or sources. If the capture log does not have it, leave the [bracket] and ask the team.</a:t>
+            </a:r>
+          </a:p>
+          <a:p/>
+          <a:p>
+            <a:r>
+              <a:t>FOR THE TEAM:</a:t>
+            </a:r>
+          </a:p>
+          <a:p>
+            <a:r>
+              <a:t>TIME: about 1 minute.</a:t>
+            </a:r>
+          </a:p>
+          <a:p>
+            <a:r>
+              <a:t>SAY: spend most of it on the right-hand side; that is what leadership remembers.</a:t>
             </a:r>
           </a:p>
         </p:txBody>
@@ -844,22 +928,48 @@
           <a:lstStyle/>
           <a:p>
             <a:r>
-              <a:t>TIME: 0:30 to thank, then a few minutes of questions (whole talk about 20 minutes, give or take).</a:t>
-            </a:r>
-          </a:p>
-          <a:p>
-            <a:r>
-              <a:t>FILL IN: team name, vertical, every member's name.</a:t>
-            </a:r>
-          </a:p>
-          <a:p>
-            <a:r>
-              <a:t>KEEP: the fictional-data line if you used the practice data. If you used your own non-confidential data, replace it with: 'Our own non-confidential data; outputs are drafts for qualified human review.'</a:t>
-            </a:r>
-          </a:p>
-          <a:p>
-            <a:r>
-              <a:t>QUESTIONS PREP: decide now who answers questions on (1) the human gates, (2) the impact numbers, (3) what it would take to pilot.</a:t>
+              <a:t>FOR THE AGENT:</a:t>
+            </a:r>
+          </a:p>
+          <a:p>
+            <a:r>
+              <a:t>- Put here: one action per horizon (next week / next 90 days / our ask today), each with an owner role and what is needed; the one-sentence decision you want from leadership.</a:t>
+            </a:r>
+          </a:p>
+          <a:p>
+            <a:r>
+              <a:t>- Draw from: capture log §12 Next steps and our ask.</a:t>
+            </a:r>
+          </a:p>
+          <a:p>
+            <a:r>
+              <a:t>- Word limit: about 25 words.</a:t>
+            </a:r>
+          </a:p>
+          <a:p>
+            <a:r>
+              <a:t>- Visual: three-horizon track (keep the layout).</a:t>
+            </a:r>
+          </a:p>
+          <a:p>
+            <a:r>
+              <a:t>- Never invent numbers, names, quotes or sources. If the capture log does not have it, leave the [bracket] and ask the team.</a:t>
+            </a:r>
+          </a:p>
+          <a:p/>
+          <a:p>
+            <a:r>
+              <a:t>FOR THE TEAM:</a:t>
+            </a:r>
+          </a:p>
+          <a:p>
+            <a:r>
+              <a:t>TIME: about 1 minute.</a:t>
+            </a:r>
+          </a:p>
+          <a:p>
+            <a:r>
+              <a:t>SAY: end with the ask.</a:t>
             </a:r>
           </a:p>
         </p:txBody>
@@ -929,12 +1039,123 @@
           <a:lstStyle/>
           <a:p>
             <a:r>
-              <a:t>This slide is hidden and will not show in Slide Show. It is a guide for the team and its agent. Delete it before you share the deck.</a:t>
-            </a:r>
-          </a:p>
-          <a:p>
-            <a:r>
-              <a:t>Agent instructions: see final-presentation-agent-instructions.md in the hackathon pack (https://aiinaction.up.railway.app).</a:t>
+              <a:t>FOR THE AGENT:</a:t>
+            </a:r>
+          </a:p>
+          <a:p>
+            <a:r>
+              <a:t>- Put here: team name, vertical, every member's name. Keep the fictional-data line if practice data were used; otherwise replace it with: 'Our own non-confidential data; outputs are drafts for qualified human review.'</a:t>
+            </a:r>
+          </a:p>
+          <a:p>
+            <a:r>
+              <a:t>- Draw from: capture log §0 Team and setup.</a:t>
+            </a:r>
+          </a:p>
+          <a:p>
+            <a:r>
+              <a:t>- Word limit: about 20 words besides names.</a:t>
+            </a:r>
+          </a:p>
+          <a:p>
+            <a:r>
+              <a:t>- Visual: keep the closing illustration and layout.</a:t>
+            </a:r>
+          </a:p>
+          <a:p>
+            <a:r>
+              <a:t>- Never invent numbers, names, quotes or sources. If the capture log does not have it, leave the [bracket] and ask the team.</a:t>
+            </a:r>
+          </a:p>
+          <a:p/>
+          <a:p>
+            <a:r>
+              <a:t>FOR THE TEAM:</a:t>
+            </a:r>
+          </a:p>
+          <a:p>
+            <a:r>
+              <a:t>TIME: a few seconds to thank, then a few minutes of questions; the whole talk is about 20 minutes, give or take.</a:t>
+            </a:r>
+          </a:p>
+          <a:p>
+            <a:r>
+              <a:t>QUESTIONS: decide now who answers on (1) the human gates, (2) the impact numbers, (3) what a pilot would need.</a:t>
+            </a:r>
+          </a:p>
+        </p:txBody>
+      </p:sp>
+      <p:sp>
+        <p:nvSpPr>
+          <p:cNvPr id="4" name="Slide Number Placeholder 3"/>
+          <p:cNvSpPr>
+            <a:spLocks noGrp="1"/>
+          </p:cNvSpPr>
+          <p:nvPr>
+            <p:ph type="sldNum" idx="5" sz="quarter"/>
+          </p:nvPr>
+        </p:nvSpPr>
+        <p:spPr/>
+      </p:sp>
+    </p:spTree>
+  </p:cSld>
+  <p:clrMapOvr>
+    <a:masterClrMapping/>
+  </p:clrMapOvr>
+</p:notes>
+</file>
+
+<file path=ppt/notesSlides/notesSlide14.xml><?xml version="1.0" encoding="utf-8"?>
+<p:notes xmlns:a="http://schemas.openxmlformats.org/drawingml/2006/main" xmlns:p="http://schemas.openxmlformats.org/presentationml/2006/main" xmlns:r="http://schemas.openxmlformats.org/officeDocument/2006/relationships">
+  <p:cSld>
+    <p:spTree>
+      <p:nvGrpSpPr>
+        <p:cNvPr id="1" name=""/>
+        <p:cNvGrpSpPr/>
+        <p:nvPr/>
+      </p:nvGrpSpPr>
+      <p:grpSpPr>
+        <a:xfrm>
+          <a:off x="0" y="0"/>
+          <a:ext cx="0" cy="0"/>
+          <a:chOff x="0" y="0"/>
+          <a:chExt cx="0" cy="0"/>
+        </a:xfrm>
+      </p:grpSpPr>
+      <p:sp>
+        <p:nvSpPr>
+          <p:cNvPr id="2" name="Slide Image Placeholder 1"/>
+          <p:cNvSpPr>
+            <a:spLocks noGrp="1"/>
+          </p:cNvSpPr>
+          <p:nvPr>
+            <p:ph type="sldImg" idx="2"/>
+          </p:nvPr>
+        </p:nvSpPr>
+        <p:spPr/>
+      </p:sp>
+      <p:sp>
+        <p:nvSpPr>
+          <p:cNvPr id="3" name="Notes Placeholder 2"/>
+          <p:cNvSpPr>
+            <a:spLocks noGrp="1"/>
+          </p:cNvSpPr>
+          <p:nvPr>
+            <p:ph type="body" idx="3" sz="quarter"/>
+          </p:nvPr>
+        </p:nvSpPr>
+        <p:spPr/>
+        <p:txBody>
+          <a:bodyPr/>
+          <a:lstStyle/>
+          <a:p>
+            <a:r>
+              <a:t>FOR THE AGENT AND TEAM: delete this slide before presenting. It is hidden and does not show in Slide Show.</a:t>
+            </a:r>
+          </a:p>
+          <a:p>
+            <a:r>
+              <a:t>It summarises the house rules and the approximate minutes per slide. Agent instructions: final-presentation-agent-instructions.md in the hackathon pack (https://aiinaction.up.railway.app).</a:t>
             </a:r>
           </a:p>
         </p:txBody>
@@ -1004,22 +1225,53 @@
           <a:lstStyle/>
           <a:p>
             <a:r>
-              <a:t>TIME: 1:30.</a:t>
-            </a:r>
-          </a:p>
-          <a:p>
-            <a:r>
-              <a:t>FILL IN: the problem statement in the panel (use the pattern: When [role] needs [outcome], today it takes [time] because [cause]). Then the three numbers on the right: hours per cycle, cycles per year, roles involved. Use your own team estimates; label them as estimates.</a:t>
-            </a:r>
-          </a:p>
-          <a:p>
-            <a:r>
-              <a:t>SAY: make the room feel the pain with one concrete moment (e.g. the night before a leadership meeting). Keep the slide under 25 words of your own.</a:t>
-            </a:r>
-          </a:p>
-          <a:p>
-            <a:r>
-              <a:t>TIP: the title should be a claim, not a label. 'Leadership hears about field signals six weeks late' beats 'The problem'.</a:t>
+              <a:t>FOR THE AGENT:</a:t>
+            </a:r>
+          </a:p>
+          <a:p>
+            <a:r>
+              <a:t>- Put here: a claim-style title, the problem statement in the panel (When [role] needs [outcome], today it takes [time] because [cause]), three numbers (hours per cycle, cycles per year, roles and hand-offs), one 'why it matters' line, and the data source line.</a:t>
+            </a:r>
+          </a:p>
+          <a:p>
+            <a:r>
+              <a:t>- Draw from: capture log §4 Problem and ideas; §3 Before workflow (hours); §10 Impact estimates; §0 (data used).</a:t>
+            </a:r>
+          </a:p>
+          <a:p>
+            <a:r>
+              <a:t>- Word limit: about 25 words.</a:t>
+            </a:r>
+          </a:p>
+          <a:p>
+            <a:r>
+              <a:t>- Visual: statement panel + three big-number tiles (keep the layout).</a:t>
+            </a:r>
+          </a:p>
+          <a:p>
+            <a:r>
+              <a:t>- Also: label numbers as team estimates; if practice data were used, keep 'Nordvant Biopharma practice data (fictional)'.</a:t>
+            </a:r>
+          </a:p>
+          <a:p>
+            <a:r>
+              <a:t>- Never invent numbers, names, quotes or sources. If the capture log does not have it, leave the [bracket] and ask the team.</a:t>
+            </a:r>
+          </a:p>
+          <a:p/>
+          <a:p>
+            <a:r>
+              <a:t>FOR THE TEAM:</a:t>
+            </a:r>
+          </a:p>
+          <a:p>
+            <a:r>
+              <a:t>TIME: about 1½ minutes.</a:t>
+            </a:r>
+          </a:p>
+          <a:p>
+            <a:r>
+              <a:t>SAY: make the room feel the pain with one concrete moment (e.g. the night before a leadership meeting).</a:t>
             </a:r>
           </a:p>
         </p:txBody>
@@ -1089,22 +1341,48 @@
           <a:lstStyle/>
           <a:p>
             <a:r>
-              <a:t>TIME: 1:30.</a:t>
-            </a:r>
-          </a:p>
-          <a:p>
-            <a:r>
-              <a:t>FILL IN: rename the four lanes with the real roles (e.g. MSL, insights lead, agency, medical director). Rename the seven step boxes with what really happens today, left to right in time order; move or delete boxes so each sits in the lane of the person who does it. Put your three biggest pain points in the orange boxes (where time is lost, where errors creep in, where people wait).</a:t>
-            </a:r>
-          </a:p>
-          <a:p>
-            <a:r>
-              <a:t>SAY: walk the flow once, slowly, and point at the hand-offs (every vertical line is somebody waiting). Keep the step labels to 2-4 words.</a:t>
-            </a:r>
-          </a:p>
-          <a:p>
-            <a:r>
-              <a:t>SOURCE: your ideation block on Day 1 (today's-workflow map in the capture log).</a:t>
+              <a:t>FOR THE AGENT:</a:t>
+            </a:r>
+          </a:p>
+          <a:p>
+            <a:r>
+              <a:t>- Put here: today's workflow: rename the four lanes with real roles, rename the step boxes in time order (2–4 words each), move or delete boxes so each sits in the lane of the person who does it; three pain points in the orange boxes; title with real counts.</a:t>
+            </a:r>
+          </a:p>
+          <a:p>
+            <a:r>
+              <a:t>- Draw from: capture log §3 Before: today's workflow (steps, roles, hand-offs, hours, pain points).</a:t>
+            </a:r>
+          </a:p>
+          <a:p>
+            <a:r>
+              <a:t>- Word limit: 2–4 words per box; about 25 words in total besides box labels.</a:t>
+            </a:r>
+          </a:p>
+          <a:p>
+            <a:r>
+              <a:t>- Visual: swimlane diagram (edit the existing shapes and connectors; no bullets).</a:t>
+            </a:r>
+          </a:p>
+          <a:p>
+            <a:r>
+              <a:t>- Never invent numbers, names, quotes or sources. If the capture log does not have it, leave the [bracket] and ask the team.</a:t>
+            </a:r>
+          </a:p>
+          <a:p/>
+          <a:p>
+            <a:r>
+              <a:t>FOR THE TEAM:</a:t>
+            </a:r>
+          </a:p>
+          <a:p>
+            <a:r>
+              <a:t>TIME: about 1½ minutes.</a:t>
+            </a:r>
+          </a:p>
+          <a:p>
+            <a:r>
+              <a:t>SAY: walk the flow once, slowly; every vertical line is somebody waiting.</a:t>
             </a:r>
           </a:p>
         </p:txBody>
@@ -1174,22 +1452,48 @@
           <a:lstStyle/>
           <a:p>
             <a:r>
-              <a:t>TIME: 2:00.</a:t>
-            </a:r>
-          </a:p>
-          <a:p>
-            <a:r>
-              <a:t>FILL IN: the same work, redesigned. Lane 1 is the human owner, lane 2 the lead agent, lane 3 the sub-agents working in parallel, lane 4 the reviewer. Rename each box; keep the two orange diamonds where your human gates sit (they must match slide 5). Fill the before/after strip at the bottom with your own estimates.</a:t>
-            </a:r>
-          </a:p>
-          <a:p>
-            <a:r>
-              <a:t>SAY: show what moved from people to agents and what stayed with people. Point out the parallel work in lane 3 and the two gates.</a:t>
-            </a:r>
-          </a:p>
-          <a:p>
-            <a:r>
-              <a:t>TIP: if a box still needs a person, keep it in a human lane. Honesty here earns trust.</a:t>
+              <a:t>FOR THE AGENT:</a:t>
+            </a:r>
+          </a:p>
+          <a:p>
+            <a:r>
+              <a:t>- Put here: the redesigned workflow: same lanes idea (you / lead agent / sub-agents / reviewer); rename every box; keep the two orange gate diamonds where G1 and G2 really sit (must match the Human gates slide); fill the before/after strip.</a:t>
+            </a:r>
+          </a:p>
+          <a:p>
+            <a:r>
+              <a:t>- Draw from: capture log §5 After: redesigned workflow; §6 Swarm structure; §7 Human gates; §9 Timing notes and §10 Impact for the before/after strip.</a:t>
+            </a:r>
+          </a:p>
+          <a:p>
+            <a:r>
+              <a:t>- Word limit: 2–4 words per box; about 25 words in total besides box labels.</a:t>
+            </a:r>
+          </a:p>
+          <a:p>
+            <a:r>
+              <a:t>- Visual: swimlane with agents and gate diamonds (edit the shapes; add or delete agent boxes as needed).</a:t>
+            </a:r>
+          </a:p>
+          <a:p>
+            <a:r>
+              <a:t>- Never invent numbers, names, quotes or sources. If the capture log does not have it, leave the [bracket] and ask the team.</a:t>
+            </a:r>
+          </a:p>
+          <a:p/>
+          <a:p>
+            <a:r>
+              <a:t>FOR THE TEAM:</a:t>
+            </a:r>
+          </a:p>
+          <a:p>
+            <a:r>
+              <a:t>TIME: about 2 minutes.</a:t>
+            </a:r>
+          </a:p>
+          <a:p>
+            <a:r>
+              <a:t>SAY: what moved from people to agents and what stayed with people; point at the parallel work and the two gates.</a:t>
             </a:r>
           </a:p>
         </p:txBody>
@@ -1259,22 +1563,48 @@
           <a:lstStyle/>
           <a:p>
             <a:r>
-              <a:t>TIME: 1:30.</a:t>
-            </a:r>
-          </a:p>
-          <a:p>
-            <a:r>
-              <a:t>FILL IN: for each gate say where it sits (after which step), who decides (a role, not a name), what they see (the evidence pack the agent prepares), why it must be a human (judgment, compliance, safety, accountability) and what happens if they reject it.</a:t>
-            </a:r>
-          </a:p>
-          <a:p>
-            <a:r>
-              <a:t>SAY: this is the slide that earns trust with Medical Affairs leaders. Be specific: 'the medical director approves the three insights and their confidence before the brief is written'.</a:t>
-            </a:r>
-          </a:p>
-          <a:p>
-            <a:r>
-              <a:t>KEEP: the always-on safety stop at the bottom; it applies to every vertical.</a:t>
+              <a:t>FOR THE AGENT:</a:t>
+            </a:r>
+          </a:p>
+          <a:p>
+            <a:r>
+              <a:t>- Put here: for Gate 1 and Gate 2: a short name, where it sits, who decides (a role), what they see, why it must be a human, what happens if rejected. Keep the always-on safety strip as is.</a:t>
+            </a:r>
+          </a:p>
+          <a:p>
+            <a:r>
+              <a:t>- Draw from: capture log §7 Human gates (and the safety flags line).</a:t>
+            </a:r>
+          </a:p>
+          <a:p>
+            <a:r>
+              <a:t>- Word limit: about 25 words of new text beyond the field labels.</a:t>
+            </a:r>
+          </a:p>
+          <a:p>
+            <a:r>
+              <a:t>- Visual: two gate cards with diamonds + the existing illustration (keep the layout).</a:t>
+            </a:r>
+          </a:p>
+          <a:p>
+            <a:r>
+              <a:t>- Never invent numbers, names, quotes or sources. If the capture log does not have it, leave the [bracket] and ask the team.</a:t>
+            </a:r>
+          </a:p>
+          <a:p/>
+          <a:p>
+            <a:r>
+              <a:t>FOR THE TEAM:</a:t>
+            </a:r>
+          </a:p>
+          <a:p>
+            <a:r>
+              <a:t>TIME: about 1½ minutes.</a:t>
+            </a:r>
+          </a:p>
+          <a:p>
+            <a:r>
+              <a:t>SAY: be specific; this is the slide that earns trust with Medical Affairs leaders.</a:t>
             </a:r>
           </a:p>
         </p:txBody>
@@ -1344,22 +1674,53 @@
           <a:lstStyle/>
           <a:p>
             <a:r>
-              <a:t>TIME: 1:00.</a:t>
-            </a:r>
-          </a:p>
-          <a:p>
-            <a:r>
-              <a:t>FILL IN: the human owner (top, orange), the lead agent and its lead skill (navy), and 3-5 sub-agents. For each sub-agent give a name, the skill(s) it loads from the Medical-Affairs-Skills library (or a skill you made with the Skill creator) and the hand-off it passes on. Delete a column if you have three sub-agents; copy one if you have five. Keep the independent checker reporting to the human, not the lead.</a:t>
-            </a:r>
-          </a:p>
-          <a:p>
-            <a:r>
-              <a:t>SAY: one sentence per worker: 'The Safety Sentinel reads every record first and stops the run if it finds an adverse event.'</a:t>
-            </a:r>
-          </a:p>
-          <a:p>
-            <a:r>
-              <a:t>LINKS: skills list https://aiinaction.up.railway.app/skills ; mission org charts https://aiinaction.up.railway.app/missions</a:t>
+              <a:t>FOR THE AGENT:</a:t>
+            </a:r>
+          </a:p>
+          <a:p>
+            <a:r>
+              <a:t>- Put here: the swarm org chart: human owner (orange), lead agent and its lead skill (navy), 3–5 sub-agents each with skill, what it does (6 words) and its hand-off; the independent checker; the G1/G2 lines; the count line at the bottom.</a:t>
+            </a:r>
+          </a:p>
+          <a:p>
+            <a:r>
+              <a:t>- Draw from: capture log §6 Swarm structure; §7 Human gates.</a:t>
+            </a:r>
+          </a:p>
+          <a:p>
+            <a:r>
+              <a:t>- Word limit: skill names and 6-word task lines only; about 25 words besides names.</a:t>
+            </a:r>
+          </a:p>
+          <a:p>
+            <a:r>
+              <a:t>- Visual: org chart (copy or delete a sub-agent column to match the real count; keep the connectors aligned).</a:t>
+            </a:r>
+          </a:p>
+          <a:p>
+            <a:r>
+              <a:t>- Also: use the real skill names from the Medical-Affairs-Skills library or the team's approved Skill-creator skills.</a:t>
+            </a:r>
+          </a:p>
+          <a:p>
+            <a:r>
+              <a:t>- Never invent numbers, names, quotes or sources. If the capture log does not have it, leave the [bracket] and ask the team.</a:t>
+            </a:r>
+          </a:p>
+          <a:p/>
+          <a:p>
+            <a:r>
+              <a:t>FOR THE TEAM:</a:t>
+            </a:r>
+          </a:p>
+          <a:p>
+            <a:r>
+              <a:t>TIME: about 1 minute.</a:t>
+            </a:r>
+          </a:p>
+          <a:p>
+            <a:r>
+              <a:t>SAY: one sentence per worker.</a:t>
             </a:r>
           </a:p>
         </p:txBody>
@@ -1429,27 +1790,53 @@
           <a:lstStyle/>
           <a:p>
             <a:r>
-              <a:t>TIME: 4:00 (the centrepiece; rehearse it twice).</a:t>
-            </a:r>
-          </a:p>
-          <a:p>
-            <a:r>
-              <a:t>FILL IN: paste two screenshots into the dashed frames (1: the assignment and the agent's plan; 2: the sub-agents' outputs or the final deliverable). Fill the run-of-show with what you will show at each minute.</a:t>
-            </a:r>
-          </a:p>
-          <a:p>
-            <a:r>
-              <a:t>DO: run live only if it is fast and reliable; otherwise show the screenshots or a 60-90 second screen recording made on Day 1. Zoom the browser to 150% so the room can read it.</a:t>
-            </a:r>
-          </a:p>
-          <a:p>
-            <a:r>
-              <a:t>SAY: narrate the hand-offs and stop at the human gate: 'Here the agent stops and asks us to approve...'.</a:t>
-            </a:r>
-          </a:p>
-          <a:p>
-            <a:r>
-              <a:t>BACKUP: always have the screenshots ready; Wi-Fi fails at the worst moment.</a:t>
+              <a:t>FOR THE AGENT:</a:t>
+            </a:r>
+          </a:p>
+          <a:p>
+            <a:r>
+              <a:t>LIVE DEMO — leave empty.</a:t>
+            </a:r>
+          </a:p>
+          <a:p>
+            <a:r>
+              <a:t>- Do NOT add any content, screenshot, chart or text to this slide.</a:t>
+            </a:r>
+          </a:p>
+          <a:p>
+            <a:r>
+              <a:t>- The only field is the small '[Team name] · [Vertical]' line at the bottom right: fill that and nothing else.</a:t>
+            </a:r>
+          </a:p>
+          <a:p>
+            <a:r>
+              <a:t>- Do not delete or move this slide. Screenshots go on the next slide (Backup) only.</a:t>
+            </a:r>
+          </a:p>
+          <a:p/>
+          <a:p>
+            <a:r>
+              <a:t>FOR THE TEAM:</a:t>
+            </a:r>
+          </a:p>
+          <a:p>
+            <a:r>
+              <a:t>Switch to the live swarm run here; this slide stays empty on purpose.</a:t>
+            </a:r>
+          </a:p>
+          <a:p>
+            <a:r>
+              <a:t>TIME: about 4–5 minutes, the centrepiece. Rehearse it twice.</a:t>
+            </a:r>
+          </a:p>
+          <a:p>
+            <a:r>
+              <a:t>RUN OF SHOW (suggested): 1) show the assignment you gave; 2) the lead agent plans and splits the work; 3) sub-agents work and hand off; 4) the gate: the agent stops and you decide, out loud; 5) the output, and what it replaced.</a:t>
+            </a:r>
+          </a:p>
+          <a:p>
+            <a:r>
+              <a:t>TIPS: zoom the browser to about 150% so the room can read it; have the conversation open in a tab before you start; if it is slow, narrate while it runs, and if it fails, go to the next slide.</a:t>
             </a:r>
           </a:p>
         </p:txBody>
@@ -1519,27 +1906,53 @@
           <a:lstStyle/>
           <a:p>
             <a:r>
-              <a:t>TIME: 1:30.</a:t>
-            </a:r>
-          </a:p>
-          <a:p>
-            <a:r>
-              <a:t>FILL IN: your own estimates from the impact worksheet. Baseline hours per cycle (today), AI-assisted hours per cycle INCLUDING human review time, cycles per year, and a loaded hourly rate your team agrees on. Annual hours saved = (baseline - AI-assisted) x cycles per year. Annual value = hours saved x loaded rate.</a:t>
-            </a:r>
-          </a:p>
-          <a:p>
-            <a:r>
-              <a:t>CHART: right-click the chart &gt; Edit Data and replace the two ILLUSTRATIVE values (10 and 3) with your numbers. Then delete the word ILLUSTRATIVE from the chart title.</a:t>
-            </a:r>
-          </a:p>
-          <a:p>
-            <a:r>
-              <a:t>SAY: say clearly that these are estimates from the team, not measured results, and that the practice data are fictional. Mention one benefit that is not hours (speed, coverage, consistency).</a:t>
-            </a:r>
-          </a:p>
-          <a:p>
-            <a:r>
-              <a:t>FORMULA: (baseline h - AI-assisted h) x cycles/yr x loaded rate = annual value.</a:t>
+              <a:t>FOR THE AGENT:</a:t>
+            </a:r>
+          </a:p>
+          <a:p>
+            <a:r>
+              <a:t>- Put here: two screenshots in the dashed frames (1: the assignment and the agent's plan; 2: sub-agent outputs or the final deliverable) and five short run-of-show labels.</a:t>
+            </a:r>
+          </a:p>
+          <a:p>
+            <a:r>
+              <a:t>- Draw from: capture log §9 Runs, screenshots and timing notes (use the screenshots captioned for the demo); §8 Prompts used.</a:t>
+            </a:r>
+          </a:p>
+          <a:p>
+            <a:r>
+              <a:t>- Word limit: about 25 words in total.</a:t>
+            </a:r>
+          </a:p>
+          <a:p>
+            <a:r>
+              <a:t>- Visual: two cropped screenshots + numbered steps (keep the layout).</a:t>
+            </a:r>
+          </a:p>
+          <a:p>
+            <a:r>
+              <a:t>- Also: if the team gave you no screenshots, leave the frames empty and say so.</a:t>
+            </a:r>
+          </a:p>
+          <a:p>
+            <a:r>
+              <a:t>- Never invent numbers, names, quotes or sources. If the capture log does not have it, leave the [bracket] and ask the team.</a:t>
+            </a:r>
+          </a:p>
+          <a:p/>
+          <a:p>
+            <a:r>
+              <a:t>FOR THE TEAM:</a:t>
+            </a:r>
+          </a:p>
+          <a:p>
+            <a:r>
+              <a:t>Backup: use this slide only if the live demo fails; otherwise skip it (or hide it).</a:t>
+            </a:r>
+          </a:p>
+          <a:p>
+            <a:r>
+              <a:t>TIME: replaces the demo, about 2–3 minutes.</a:t>
             </a:r>
           </a:p>
         </p:txBody>
@@ -1609,22 +2022,53 @@
           <a:lstStyle/>
           <a:p>
             <a:r>
-              <a:t>TIME: 1:00.</a:t>
-            </a:r>
-          </a:p>
-          <a:p>
-            <a:r>
-              <a:t>FILL IN: what your swarm may do on its own (green), what it may do but must flag (yellow), and what only a human may do (red). Then your top three risks and the guardrail you built for each (e.g. 'Invented citation' -&gt; 'citation-integrity check + source IDs on every claim').</a:t>
-            </a:r>
-          </a:p>
-          <a:p>
-            <a:r>
-              <a:t>THINK ABOUT: safety findings in the data, off-label questions, invented sources, confidential data, anything leaving the building, bias in which HCPs or insights get attention.</a:t>
-            </a:r>
-          </a:p>
-          <a:p>
-            <a:r>
-              <a:t>SAY: one breath per lane, then the risk you worried about most.</a:t>
+              <a:t>FOR THE AGENT:</a:t>
+            </a:r>
+          </a:p>
+          <a:p>
+            <a:r>
+              <a:t>- Put here: the impact numbers: baseline hours per cycle (B), AI-assisted hours per cycle including human review (A), cycles per year (N), loaded hourly rate (R), annual value (V); the two big numbers; the title with the real hours.</a:t>
+            </a:r>
+          </a:p>
+          <a:p>
+            <a:r>
+              <a:t>- Draw from: capture log §10 Impact estimates; §9 Timing notes for the AI-assisted minutes.</a:t>
+            </a:r>
+          </a:p>
+          <a:p>
+            <a:r>
+              <a:t>- Word limit: about 25 words.</a:t>
+            </a:r>
+          </a:p>
+          <a:p>
+            <a:r>
+              <a:t>- Visual: formula tiles + a REAL bar chart: edit the chart data so 'Today' = B and 'AI-assisted' = A (hours per cycle), then remove 'ILLUSTRATIVE, replace' from the chart title.</a:t>
+            </a:r>
+          </a:p>
+          <a:p>
+            <a:r>
+              <a:t>- Also: annual hours saved = (B − A) × N; annual value = hours saved × R. Show your arithmetic to the team. Keep the 'Team estimates, not measured results' line.</a:t>
+            </a:r>
+          </a:p>
+          <a:p>
+            <a:r>
+              <a:t>- Never invent numbers, names, quotes or sources. If the capture log does not have it, leave the [bracket] and ask the team.</a:t>
+            </a:r>
+          </a:p>
+          <a:p/>
+          <a:p>
+            <a:r>
+              <a:t>FOR THE TEAM:</a:t>
+            </a:r>
+          </a:p>
+          <a:p>
+            <a:r>
+              <a:t>TIME: about 1½ minutes.</a:t>
+            </a:r>
+          </a:p>
+          <a:p>
+            <a:r>
+              <a:t>SAY: these are our estimates, not measured results; mention one benefit that is not hours (speed, coverage, consistency).</a:t>
             </a:r>
           </a:p>
         </p:txBody>
@@ -4066,7 +4510,7 @@
                 </a:solidFill>
                 <a:latin typeface="Bahnschrift"/>
               </a:rPr>
-              <a:t>Faster is good. New is better.</a:t>
+              <a:t>Risks we designed out</a:t>
             </a:r>
           </a:p>
         </p:txBody>
@@ -4149,12 +4593,658 @@
         </p:nvSpPr>
         <p:spPr>
           <a:xfrm>
-            <a:off x="612648" y="1371600"/>
-            <a:ext cx="5257800" cy="4434840"/>
+            <a:off x="612648" y="1325880"/>
+            <a:ext cx="10972800" cy="822960"/>
           </a:xfrm>
           <a:prstGeom prst="roundRect">
             <a:avLst>
-              <a:gd name="adj" fmla="val 5000"/>
+              <a:gd name="adj" fmla="val 12000"/>
+            </a:avLst>
+          </a:prstGeom>
+          <a:solidFill>
+            <a:srgbClr val="FFFFFF"/>
+          </a:solidFill>
+          <a:ln w="15875">
+            <a:solidFill>
+              <a:srgbClr val="E2E8F0"/>
+            </a:solidFill>
+          </a:ln>
+          <a:effectLst/>
+        </p:spPr>
+        <p:style>
+          <a:lnRef idx="1">
+            <a:schemeClr val="accent1"/>
+          </a:lnRef>
+          <a:fillRef idx="3">
+            <a:schemeClr val="accent1"/>
+          </a:fillRef>
+          <a:effectRef idx="2">
+            <a:schemeClr val="accent1"/>
+          </a:effectRef>
+          <a:fontRef idx="minor">
+            <a:schemeClr val="lt1"/>
+          </a:fontRef>
+        </p:style>
+        <p:txBody>
+          <a:bodyPr rtlCol="0" anchor="ctr" wrap="square" lIns="73152" rIns="73152" tIns="36576" bIns="36576"/>
+          <a:lstStyle/>
+          <a:p>
+            <a:pPr algn="ctr"/>
+          </a:p>
+        </p:txBody>
+      </p:sp>
+      <p:sp>
+        <p:nvSpPr>
+          <p:cNvPr id="6" name="Rounded Rectangle 5"/>
+          <p:cNvSpPr/>
+          <p:nvPr/>
+        </p:nvSpPr>
+        <p:spPr>
+          <a:xfrm>
+            <a:off x="612648" y="1325880"/>
+            <a:ext cx="2377440" cy="822960"/>
+          </a:xfrm>
+          <a:prstGeom prst="roundRect">
+            <a:avLst>
+              <a:gd name="adj" fmla="val 12000"/>
+            </a:avLst>
+          </a:prstGeom>
+          <a:solidFill>
+            <a:srgbClr val="2E9D6B"/>
+          </a:solidFill>
+          <a:ln>
+            <a:noFill/>
+          </a:ln>
+          <a:effectLst/>
+        </p:spPr>
+        <p:style>
+          <a:lnRef idx="1">
+            <a:schemeClr val="accent1"/>
+          </a:lnRef>
+          <a:fillRef idx="3">
+            <a:schemeClr val="accent1"/>
+          </a:fillRef>
+          <a:effectRef idx="2">
+            <a:schemeClr val="accent1"/>
+          </a:effectRef>
+          <a:fontRef idx="minor">
+            <a:schemeClr val="lt1"/>
+          </a:fontRef>
+        </p:style>
+        <p:txBody>
+          <a:bodyPr rtlCol="0" anchor="ctr" wrap="square" lIns="73152" rIns="73152" tIns="36576" bIns="36576"/>
+          <a:lstStyle/>
+          <a:p>
+            <a:pPr algn="ctr"/>
+            <a:r>
+              <a:rPr sz="1700" b="1" i="0">
+                <a:solidFill>
+                  <a:srgbClr val="FFFFFF"/>
+                </a:solidFill>
+                <a:latin typeface="Bahnschrift"/>
+              </a:rPr>
+              <a:t>GREEN</a:t>
+            </a:r>
+          </a:p>
+          <a:p>
+            <a:pPr algn="ctr"/>
+            <a:r>
+              <a:rPr sz="1200" b="0" i="0">
+                <a:solidFill>
+                  <a:srgbClr val="FFFFFF"/>
+                </a:solidFill>
+                <a:latin typeface="Arial"/>
+              </a:rPr>
+              <a:t>Agent proceeds</a:t>
+            </a:r>
+          </a:p>
+        </p:txBody>
+      </p:sp>
+      <p:sp>
+        <p:nvSpPr>
+          <p:cNvPr id="7" name="TextBox 6"/>
+          <p:cNvSpPr txBox="1"/>
+          <p:nvPr/>
+        </p:nvSpPr>
+        <p:spPr>
+          <a:xfrm>
+            <a:off x="3200400" y="1325880"/>
+            <a:ext cx="6400800" cy="822960"/>
+          </a:xfrm>
+          <a:prstGeom prst="rect">
+            <a:avLst/>
+          </a:prstGeom>
+          <a:noFill/>
+        </p:spPr>
+        <p:txBody>
+          <a:bodyPr wrap="square" lIns="36576" rIns="36576" tIns="18288" bIns="18288" anchor="ctr">
+            <a:spAutoFit/>
+          </a:bodyPr>
+          <a:lstStyle/>
+          <a:p>
+            <a:pPr algn="l"/>
+            <a:r>
+              <a:rPr sz="1500" b="0" i="0">
+                <a:solidFill>
+                  <a:srgbClr val="002B55"/>
+                </a:solidFill>
+                <a:latin typeface="Arial"/>
+              </a:rPr>
+              <a:t>[e.g. read files, build tables, draft]</a:t>
+            </a:r>
+          </a:p>
+        </p:txBody>
+      </p:sp>
+      <p:sp>
+        <p:nvSpPr>
+          <p:cNvPr id="8" name="TextBox 7"/>
+          <p:cNvSpPr txBox="1"/>
+          <p:nvPr/>
+        </p:nvSpPr>
+        <p:spPr>
+          <a:xfrm>
+            <a:off x="9601200" y="1325880"/>
+            <a:ext cx="1874519" cy="822960"/>
+          </a:xfrm>
+          <a:prstGeom prst="rect">
+            <a:avLst/>
+          </a:prstGeom>
+          <a:noFill/>
+        </p:spPr>
+        <p:txBody>
+          <a:bodyPr wrap="square" lIns="36576" rIns="36576" tIns="18288" bIns="18288" anchor="ctr">
+            <a:spAutoFit/>
+          </a:bodyPr>
+          <a:lstStyle/>
+          <a:p>
+            <a:pPr algn="r"/>
+            <a:r>
+              <a:rPr sz="1400" b="1" i="0">
+                <a:solidFill>
+                  <a:srgbClr val="2E9D6B"/>
+                </a:solidFill>
+                <a:latin typeface="Bahnschrift"/>
+              </a:rPr>
+              <a:t>Agent</a:t>
+            </a:r>
+          </a:p>
+        </p:txBody>
+      </p:sp>
+      <p:sp>
+        <p:nvSpPr>
+          <p:cNvPr id="9" name="Rounded Rectangle 8"/>
+          <p:cNvSpPr/>
+          <p:nvPr/>
+        </p:nvSpPr>
+        <p:spPr>
+          <a:xfrm>
+            <a:off x="612648" y="2286000"/>
+            <a:ext cx="10972800" cy="822960"/>
+          </a:xfrm>
+          <a:prstGeom prst="roundRect">
+            <a:avLst>
+              <a:gd name="adj" fmla="val 12000"/>
+            </a:avLst>
+          </a:prstGeom>
+          <a:solidFill>
+            <a:srgbClr val="FFFFFF"/>
+          </a:solidFill>
+          <a:ln w="15875">
+            <a:solidFill>
+              <a:srgbClr val="E2E8F0"/>
+            </a:solidFill>
+          </a:ln>
+          <a:effectLst/>
+        </p:spPr>
+        <p:style>
+          <a:lnRef idx="1">
+            <a:schemeClr val="accent1"/>
+          </a:lnRef>
+          <a:fillRef idx="3">
+            <a:schemeClr val="accent1"/>
+          </a:fillRef>
+          <a:effectRef idx="2">
+            <a:schemeClr val="accent1"/>
+          </a:effectRef>
+          <a:fontRef idx="minor">
+            <a:schemeClr val="lt1"/>
+          </a:fontRef>
+        </p:style>
+        <p:txBody>
+          <a:bodyPr rtlCol="0" anchor="ctr" wrap="square" lIns="73152" rIns="73152" tIns="36576" bIns="36576"/>
+          <a:lstStyle/>
+          <a:p>
+            <a:pPr algn="ctr"/>
+          </a:p>
+        </p:txBody>
+      </p:sp>
+      <p:sp>
+        <p:nvSpPr>
+          <p:cNvPr id="10" name="Rounded Rectangle 9"/>
+          <p:cNvSpPr/>
+          <p:nvPr/>
+        </p:nvSpPr>
+        <p:spPr>
+          <a:xfrm>
+            <a:off x="612648" y="2286000"/>
+            <a:ext cx="2377440" cy="822960"/>
+          </a:xfrm>
+          <a:prstGeom prst="roundRect">
+            <a:avLst>
+              <a:gd name="adj" fmla="val 12000"/>
+            </a:avLst>
+          </a:prstGeom>
+          <a:solidFill>
+            <a:srgbClr val="B7791F"/>
+          </a:solidFill>
+          <a:ln>
+            <a:noFill/>
+          </a:ln>
+          <a:effectLst/>
+        </p:spPr>
+        <p:style>
+          <a:lnRef idx="1">
+            <a:schemeClr val="accent1"/>
+          </a:lnRef>
+          <a:fillRef idx="3">
+            <a:schemeClr val="accent1"/>
+          </a:fillRef>
+          <a:effectRef idx="2">
+            <a:schemeClr val="accent1"/>
+          </a:effectRef>
+          <a:fontRef idx="minor">
+            <a:schemeClr val="lt1"/>
+          </a:fontRef>
+        </p:style>
+        <p:txBody>
+          <a:bodyPr rtlCol="0" anchor="ctr" wrap="square" lIns="73152" rIns="73152" tIns="36576" bIns="36576"/>
+          <a:lstStyle/>
+          <a:p>
+            <a:pPr algn="ctr"/>
+            <a:r>
+              <a:rPr sz="1700" b="1" i="0">
+                <a:solidFill>
+                  <a:srgbClr val="FFFFFF"/>
+                </a:solidFill>
+                <a:latin typeface="Bahnschrift"/>
+              </a:rPr>
+              <a:t>YELLOW</a:t>
+            </a:r>
+          </a:p>
+          <a:p>
+            <a:pPr algn="ctr"/>
+            <a:r>
+              <a:rPr sz="1200" b="0" i="0">
+                <a:solidFill>
+                  <a:srgbClr val="FFFFFF"/>
+                </a:solidFill>
+                <a:latin typeface="Arial"/>
+              </a:rPr>
+              <a:t>Proceed and flag</a:t>
+            </a:r>
+          </a:p>
+        </p:txBody>
+      </p:sp>
+      <p:sp>
+        <p:nvSpPr>
+          <p:cNvPr id="11" name="TextBox 10"/>
+          <p:cNvSpPr txBox="1"/>
+          <p:nvPr/>
+        </p:nvSpPr>
+        <p:spPr>
+          <a:xfrm>
+            <a:off x="3200400" y="2286000"/>
+            <a:ext cx="6400800" cy="822960"/>
+          </a:xfrm>
+          <a:prstGeom prst="rect">
+            <a:avLst/>
+          </a:prstGeom>
+          <a:noFill/>
+        </p:spPr>
+        <p:txBody>
+          <a:bodyPr wrap="square" lIns="36576" rIns="36576" tIns="18288" bIns="18288" anchor="ctr">
+            <a:spAutoFit/>
+          </a:bodyPr>
+          <a:lstStyle/>
+          <a:p>
+            <a:pPr algn="l"/>
+            <a:r>
+              <a:rPr sz="1500" b="0" i="0">
+                <a:solidFill>
+                  <a:srgbClr val="002B55"/>
+                </a:solidFill>
+                <a:latin typeface="Arial"/>
+              </a:rPr>
+              <a:t>[e.g. conflicting or missing sources]</a:t>
+            </a:r>
+          </a:p>
+        </p:txBody>
+      </p:sp>
+      <p:sp>
+        <p:nvSpPr>
+          <p:cNvPr id="12" name="TextBox 11"/>
+          <p:cNvSpPr txBox="1"/>
+          <p:nvPr/>
+        </p:nvSpPr>
+        <p:spPr>
+          <a:xfrm>
+            <a:off x="9601200" y="2286000"/>
+            <a:ext cx="1874519" cy="822960"/>
+          </a:xfrm>
+          <a:prstGeom prst="rect">
+            <a:avLst/>
+          </a:prstGeom>
+          <a:noFill/>
+        </p:spPr>
+        <p:txBody>
+          <a:bodyPr wrap="square" lIns="36576" rIns="36576" tIns="18288" bIns="18288" anchor="ctr">
+            <a:spAutoFit/>
+          </a:bodyPr>
+          <a:lstStyle/>
+          <a:p>
+            <a:pPr algn="r"/>
+            <a:r>
+              <a:rPr sz="1400" b="1" i="0">
+                <a:solidFill>
+                  <a:srgbClr val="B7791F"/>
+                </a:solidFill>
+                <a:latin typeface="Bahnschrift"/>
+              </a:rPr>
+              <a:t>Agent + flag</a:t>
+            </a:r>
+          </a:p>
+        </p:txBody>
+      </p:sp>
+      <p:sp>
+        <p:nvSpPr>
+          <p:cNvPr id="13" name="Rounded Rectangle 12"/>
+          <p:cNvSpPr/>
+          <p:nvPr/>
+        </p:nvSpPr>
+        <p:spPr>
+          <a:xfrm>
+            <a:off x="612648" y="3246120"/>
+            <a:ext cx="10972800" cy="822960"/>
+          </a:xfrm>
+          <a:prstGeom prst="roundRect">
+            <a:avLst>
+              <a:gd name="adj" fmla="val 12000"/>
+            </a:avLst>
+          </a:prstGeom>
+          <a:solidFill>
+            <a:srgbClr val="FFFFFF"/>
+          </a:solidFill>
+          <a:ln w="15875">
+            <a:solidFill>
+              <a:srgbClr val="E2E8F0"/>
+            </a:solidFill>
+          </a:ln>
+          <a:effectLst/>
+        </p:spPr>
+        <p:style>
+          <a:lnRef idx="1">
+            <a:schemeClr val="accent1"/>
+          </a:lnRef>
+          <a:fillRef idx="3">
+            <a:schemeClr val="accent1"/>
+          </a:fillRef>
+          <a:effectRef idx="2">
+            <a:schemeClr val="accent1"/>
+          </a:effectRef>
+          <a:fontRef idx="minor">
+            <a:schemeClr val="lt1"/>
+          </a:fontRef>
+        </p:style>
+        <p:txBody>
+          <a:bodyPr rtlCol="0" anchor="ctr" wrap="square" lIns="73152" rIns="73152" tIns="36576" bIns="36576"/>
+          <a:lstStyle/>
+          <a:p>
+            <a:pPr algn="ctr"/>
+          </a:p>
+        </p:txBody>
+      </p:sp>
+      <p:sp>
+        <p:nvSpPr>
+          <p:cNvPr id="14" name="Rounded Rectangle 13"/>
+          <p:cNvSpPr/>
+          <p:nvPr/>
+        </p:nvSpPr>
+        <p:spPr>
+          <a:xfrm>
+            <a:off x="612648" y="3246120"/>
+            <a:ext cx="2377440" cy="822960"/>
+          </a:xfrm>
+          <a:prstGeom prst="roundRect">
+            <a:avLst>
+              <a:gd name="adj" fmla="val 12000"/>
+            </a:avLst>
+          </a:prstGeom>
+          <a:solidFill>
+            <a:srgbClr val="D64545"/>
+          </a:solidFill>
+          <a:ln>
+            <a:noFill/>
+          </a:ln>
+          <a:effectLst/>
+        </p:spPr>
+        <p:style>
+          <a:lnRef idx="1">
+            <a:schemeClr val="accent1"/>
+          </a:lnRef>
+          <a:fillRef idx="3">
+            <a:schemeClr val="accent1"/>
+          </a:fillRef>
+          <a:effectRef idx="2">
+            <a:schemeClr val="accent1"/>
+          </a:effectRef>
+          <a:fontRef idx="minor">
+            <a:schemeClr val="lt1"/>
+          </a:fontRef>
+        </p:style>
+        <p:txBody>
+          <a:bodyPr rtlCol="0" anchor="ctr" wrap="square" lIns="73152" rIns="73152" tIns="36576" bIns="36576"/>
+          <a:lstStyle/>
+          <a:p>
+            <a:pPr algn="ctr"/>
+            <a:r>
+              <a:rPr sz="1700" b="1" i="0">
+                <a:solidFill>
+                  <a:srgbClr val="FFFFFF"/>
+                </a:solidFill>
+                <a:latin typeface="Bahnschrift"/>
+              </a:rPr>
+              <a:t>RED</a:t>
+            </a:r>
+          </a:p>
+          <a:p>
+            <a:pPr algn="ctr"/>
+            <a:r>
+              <a:rPr sz="1200" b="0" i="0">
+                <a:solidFill>
+                  <a:srgbClr val="FFFFFF"/>
+                </a:solidFill>
+                <a:latin typeface="Arial"/>
+              </a:rPr>
+              <a:t>Human decides</a:t>
+            </a:r>
+          </a:p>
+        </p:txBody>
+      </p:sp>
+      <p:sp>
+        <p:nvSpPr>
+          <p:cNvPr id="15" name="TextBox 14"/>
+          <p:cNvSpPr txBox="1"/>
+          <p:nvPr/>
+        </p:nvSpPr>
+        <p:spPr>
+          <a:xfrm>
+            <a:off x="3200400" y="3246120"/>
+            <a:ext cx="6400800" cy="822960"/>
+          </a:xfrm>
+          <a:prstGeom prst="rect">
+            <a:avLst/>
+          </a:prstGeom>
+          <a:noFill/>
+        </p:spPr>
+        <p:txBody>
+          <a:bodyPr wrap="square" lIns="36576" rIns="36576" tIns="18288" bIns="18288" anchor="ctr">
+            <a:spAutoFit/>
+          </a:bodyPr>
+          <a:lstStyle/>
+          <a:p>
+            <a:pPr algn="l"/>
+            <a:r>
+              <a:rPr sz="1500" b="0" i="0">
+                <a:solidFill>
+                  <a:srgbClr val="002B55"/>
+                </a:solidFill>
+                <a:latin typeface="Arial"/>
+              </a:rPr>
+              <a:t>[e.g. anything external, safety, approvals]</a:t>
+            </a:r>
+          </a:p>
+        </p:txBody>
+      </p:sp>
+      <p:sp>
+        <p:nvSpPr>
+          <p:cNvPr id="16" name="TextBox 15"/>
+          <p:cNvSpPr txBox="1"/>
+          <p:nvPr/>
+        </p:nvSpPr>
+        <p:spPr>
+          <a:xfrm>
+            <a:off x="9601200" y="3246120"/>
+            <a:ext cx="1874519" cy="822960"/>
+          </a:xfrm>
+          <a:prstGeom prst="rect">
+            <a:avLst/>
+          </a:prstGeom>
+          <a:noFill/>
+        </p:spPr>
+        <p:txBody>
+          <a:bodyPr wrap="square" lIns="36576" rIns="36576" tIns="18288" bIns="18288" anchor="ctr">
+            <a:spAutoFit/>
+          </a:bodyPr>
+          <a:lstStyle/>
+          <a:p>
+            <a:pPr algn="r"/>
+            <a:r>
+              <a:rPr sz="1400" b="1" i="0">
+                <a:solidFill>
+                  <a:srgbClr val="D64545"/>
+                </a:solidFill>
+                <a:latin typeface="Bahnschrift"/>
+              </a:rPr>
+              <a:t>You decide</a:t>
+            </a:r>
+          </a:p>
+        </p:txBody>
+      </p:sp>
+      <p:sp>
+        <p:nvSpPr>
+          <p:cNvPr id="17" name="Rounded Rectangle 16"/>
+          <p:cNvSpPr/>
+          <p:nvPr/>
+        </p:nvSpPr>
+        <p:spPr>
+          <a:xfrm>
+            <a:off x="612648" y="4343400"/>
+            <a:ext cx="3520440" cy="685800"/>
+          </a:xfrm>
+          <a:prstGeom prst="roundRect">
+            <a:avLst>
+              <a:gd name="adj" fmla="val 10000"/>
+            </a:avLst>
+          </a:prstGeom>
+          <a:solidFill>
+            <a:srgbClr val="FDEBE1"/>
+          </a:solidFill>
+          <a:ln>
+            <a:noFill/>
+          </a:ln>
+          <a:effectLst/>
+        </p:spPr>
+        <p:style>
+          <a:lnRef idx="1">
+            <a:schemeClr val="accent1"/>
+          </a:lnRef>
+          <a:fillRef idx="3">
+            <a:schemeClr val="accent1"/>
+          </a:fillRef>
+          <a:effectRef idx="2">
+            <a:schemeClr val="accent1"/>
+          </a:effectRef>
+          <a:fontRef idx="minor">
+            <a:schemeClr val="lt1"/>
+          </a:fontRef>
+        </p:style>
+        <p:txBody>
+          <a:bodyPr rtlCol="0" anchor="ctr" wrap="square" lIns="73152" rIns="73152" tIns="36576" bIns="36576"/>
+          <a:lstStyle/>
+          <a:p>
+            <a:pPr algn="ctr"/>
+            <a:r>
+              <a:rPr sz="1400" b="1" i="0">
+                <a:solidFill>
+                  <a:srgbClr val="B4501F"/>
+                </a:solidFill>
+                <a:latin typeface="Arial"/>
+              </a:rPr>
+              <a:t>[Risk 1]</a:t>
+            </a:r>
+          </a:p>
+        </p:txBody>
+      </p:sp>
+      <p:cxnSp>
+        <p:nvCxnSpPr>
+          <p:cNvPr id="18" name="Connector 17"/>
+          <p:cNvCxnSpPr/>
+          <p:nvPr/>
+        </p:nvCxnSpPr>
+        <p:spPr>
+          <a:xfrm>
+            <a:off x="2368296" y="5029200"/>
+            <a:ext cx="0" cy="228600"/>
+          </a:xfrm>
+          <a:prstGeom prst="line">
+            <a:avLst/>
+          </a:prstGeom>
+          <a:ln w="15875">
+            <a:solidFill>
+              <a:srgbClr val="8A9BAA"/>
+            </a:solidFill>
+            <a:tailEnd type="triangle" w="med" len="med"/>
+          </a:ln>
+        </p:spPr>
+        <p:style>
+          <a:lnRef idx="2">
+            <a:schemeClr val="accent1"/>
+          </a:lnRef>
+          <a:fillRef idx="0">
+            <a:schemeClr val="accent1"/>
+          </a:fillRef>
+          <a:effectRef idx="1">
+            <a:schemeClr val="accent1"/>
+          </a:effectRef>
+          <a:fontRef idx="minor">
+            <a:schemeClr val="tx1"/>
+          </a:fontRef>
+        </p:style>
+      </p:cxnSp>
+      <p:sp>
+        <p:nvSpPr>
+          <p:cNvPr id="19" name="Rounded Rectangle 18"/>
+          <p:cNvSpPr/>
+          <p:nvPr/>
+        </p:nvSpPr>
+        <p:spPr>
+          <a:xfrm>
+            <a:off x="612648" y="5257800"/>
+            <a:ext cx="3520440" cy="868680"/>
+          </a:xfrm>
+          <a:prstGeom prst="roundRect">
+            <a:avLst>
+              <a:gd name="adj" fmla="val 10000"/>
             </a:avLst>
           </a:prstGeom>
           <a:solidFill>
@@ -4184,277 +5274,32 @@
           <a:lstStyle/>
           <a:p>
             <a:pPr algn="ctr"/>
-          </a:p>
-        </p:txBody>
-      </p:sp>
-      <p:sp>
-        <p:nvSpPr>
-          <p:cNvPr id="6" name="Rectangle 5"/>
+            <a:r>
+              <a:rPr sz="1400" b="1" i="0">
+                <a:solidFill>
+                  <a:srgbClr val="007879"/>
+                </a:solidFill>
+                <a:latin typeface="Arial"/>
+              </a:rPr>
+              <a:t>[Guardrail we built]</a:t>
+            </a:r>
+          </a:p>
+        </p:txBody>
+      </p:sp>
+      <p:sp>
+        <p:nvSpPr>
+          <p:cNvPr id="20" name="Rounded Rectangle 19"/>
           <p:cNvSpPr/>
           <p:nvPr/>
         </p:nvSpPr>
         <p:spPr>
           <a:xfrm>
-            <a:off x="612648" y="1371600"/>
-            <a:ext cx="5257800" cy="109728"/>
-          </a:xfrm>
-          <a:prstGeom prst="rect">
-            <a:avLst/>
-          </a:prstGeom>
-          <a:solidFill>
-            <a:srgbClr val="007879"/>
-          </a:solidFill>
-          <a:ln>
-            <a:noFill/>
-          </a:ln>
-          <a:effectLst/>
-        </p:spPr>
-        <p:style>
-          <a:lnRef idx="1">
-            <a:schemeClr val="accent1"/>
-          </a:lnRef>
-          <a:fillRef idx="3">
-            <a:schemeClr val="accent1"/>
-          </a:fillRef>
-          <a:effectRef idx="2">
-            <a:schemeClr val="accent1"/>
-          </a:effectRef>
-          <a:fontRef idx="minor">
-            <a:schemeClr val="lt1"/>
-          </a:fontRef>
-        </p:style>
-        <p:txBody>
-          <a:bodyPr rtlCol="0" anchor="ctr" wrap="square" lIns="73152" rIns="73152" tIns="36576" bIns="36576"/>
-          <a:lstStyle/>
-          <a:p>
-            <a:pPr algn="ctr"/>
-          </a:p>
-        </p:txBody>
-      </p:sp>
-      <p:sp>
-        <p:nvSpPr>
-          <p:cNvPr id="7" name="TextBox 6"/>
-          <p:cNvSpPr txBox="1"/>
-          <p:nvPr/>
-        </p:nvSpPr>
-        <p:spPr>
-          <a:xfrm>
-            <a:off x="932688" y="1645920"/>
-            <a:ext cx="4663440" cy="365760"/>
-          </a:xfrm>
-          <a:prstGeom prst="rect">
-            <a:avLst/>
-          </a:prstGeom>
-          <a:noFill/>
-        </p:spPr>
-        <p:txBody>
-          <a:bodyPr wrap="square" lIns="36576" rIns="36576" tIns="18288" bIns="18288" anchor="t">
-            <a:spAutoFit/>
-          </a:bodyPr>
-          <a:lstStyle/>
-          <a:p>
-            <a:pPr algn="l"/>
-            <a:r>
-              <a:rPr sz="1400" b="1" i="0">
-                <a:solidFill>
-                  <a:srgbClr val="007879"/>
-                </a:solidFill>
-                <a:latin typeface="Bahnschrift"/>
-              </a:rPr>
-              <a:t>EFFICIENCY AI</a:t>
-            </a:r>
-          </a:p>
-        </p:txBody>
-      </p:sp>
-      <p:sp>
-        <p:nvSpPr>
-          <p:cNvPr id="8" name="TextBox 7"/>
-          <p:cNvSpPr txBox="1"/>
-          <p:nvPr/>
-        </p:nvSpPr>
-        <p:spPr>
-          <a:xfrm>
-            <a:off x="932688" y="2011680"/>
-            <a:ext cx="4663440" cy="548640"/>
-          </a:xfrm>
-          <a:prstGeom prst="rect">
-            <a:avLst/>
-          </a:prstGeom>
-          <a:noFill/>
-        </p:spPr>
-        <p:txBody>
-          <a:bodyPr wrap="square" lIns="36576" rIns="36576" tIns="18288" bIns="18288" anchor="t">
-            <a:spAutoFit/>
-          </a:bodyPr>
-          <a:lstStyle/>
-          <a:p>
-            <a:pPr algn="l"/>
-            <a:r>
-              <a:rPr sz="2400" b="1" i="0">
-                <a:solidFill>
-                  <a:srgbClr val="002B55"/>
-                </a:solidFill>
-                <a:latin typeface="Bahnschrift"/>
-              </a:rPr>
-              <a:t>Do today's work faster</a:t>
-            </a:r>
-          </a:p>
-        </p:txBody>
-      </p:sp>
-      <p:sp>
-        <p:nvSpPr>
-          <p:cNvPr id="9" name="TextBox 8"/>
-          <p:cNvSpPr txBox="1"/>
-          <p:nvPr/>
-        </p:nvSpPr>
-        <p:spPr>
-          <a:xfrm>
-            <a:off x="932688" y="2788920"/>
-            <a:ext cx="4663440" cy="1005840"/>
-          </a:xfrm>
-          <a:prstGeom prst="rect">
-            <a:avLst/>
-          </a:prstGeom>
-          <a:noFill/>
-        </p:spPr>
-        <p:txBody>
-          <a:bodyPr wrap="square" lIns="36576" rIns="36576" tIns="18288" bIns="18288" anchor="ctr">
-            <a:spAutoFit/>
-          </a:bodyPr>
-          <a:lstStyle/>
-          <a:p>
-            <a:pPr algn="l"/>
-            <a:r>
-              <a:rPr sz="4000" b="1" i="0">
-                <a:solidFill>
-                  <a:srgbClr val="007879"/>
-                </a:solidFill>
-                <a:latin typeface="Bahnschrift"/>
-              </a:rPr>
-              <a:t>[X]% less time</a:t>
-            </a:r>
-          </a:p>
-        </p:txBody>
-      </p:sp>
-      <p:cxnSp>
-        <p:nvCxnSpPr>
-          <p:cNvPr id="10" name="Connector 9"/>
-          <p:cNvCxnSpPr/>
-          <p:nvPr/>
-        </p:nvCxnSpPr>
-        <p:spPr>
-          <a:xfrm>
-            <a:off x="932688" y="3977639"/>
-            <a:ext cx="4617720" cy="0"/>
-          </a:xfrm>
-          <a:prstGeom prst="line">
-            <a:avLst/>
-          </a:prstGeom>
-          <a:ln w="25400">
-            <a:solidFill>
-              <a:srgbClr val="FFFFFF"/>
-            </a:solidFill>
-          </a:ln>
-        </p:spPr>
-        <p:style>
-          <a:lnRef idx="2">
-            <a:schemeClr val="accent1"/>
-          </a:lnRef>
-          <a:fillRef idx="0">
-            <a:schemeClr val="accent1"/>
-          </a:fillRef>
-          <a:effectRef idx="1">
-            <a:schemeClr val="accent1"/>
-          </a:effectRef>
-          <a:fontRef idx="minor">
-            <a:schemeClr val="tx1"/>
-          </a:fontRef>
-        </p:style>
-      </p:cxnSp>
-      <p:sp>
-        <p:nvSpPr>
-          <p:cNvPr id="11" name="TextBox 10"/>
-          <p:cNvSpPr txBox="1"/>
-          <p:nvPr/>
-        </p:nvSpPr>
-        <p:spPr>
-          <a:xfrm>
-            <a:off x="932688" y="4114800"/>
-            <a:ext cx="4663440" cy="731520"/>
-          </a:xfrm>
-          <a:prstGeom prst="rect">
-            <a:avLst/>
-          </a:prstGeom>
-          <a:noFill/>
-        </p:spPr>
-        <p:txBody>
-          <a:bodyPr wrap="square" lIns="36576" rIns="36576" tIns="18288" bIns="18288" anchor="t">
-            <a:spAutoFit/>
-          </a:bodyPr>
-          <a:lstStyle/>
-          <a:p>
-            <a:pPr algn="l"/>
-            <a:r>
-              <a:rPr sz="1700" b="1" i="0">
-                <a:solidFill>
-                  <a:srgbClr val="002B55"/>
-                </a:solidFill>
-                <a:latin typeface="Arial"/>
-              </a:rPr>
-              <a:t>[Task] takes [Y] h, not [Z] h</a:t>
-            </a:r>
-          </a:p>
-        </p:txBody>
-      </p:sp>
-      <p:sp>
-        <p:nvSpPr>
-          <p:cNvPr id="12" name="TextBox 11"/>
-          <p:cNvSpPr txBox="1"/>
-          <p:nvPr/>
-        </p:nvSpPr>
-        <p:spPr>
-          <a:xfrm>
-            <a:off x="932688" y="4892040"/>
-            <a:ext cx="4663440" cy="731520"/>
-          </a:xfrm>
-          <a:prstGeom prst="rect">
-            <a:avLst/>
-          </a:prstGeom>
-          <a:noFill/>
-        </p:spPr>
-        <p:txBody>
-          <a:bodyPr wrap="square" lIns="36576" rIns="36576" tIns="18288" bIns="18288" anchor="t">
-            <a:spAutoFit/>
-          </a:bodyPr>
-          <a:lstStyle/>
-          <a:p>
-            <a:pPr algn="l"/>
-            <a:r>
-              <a:rPr sz="1500" b="0" i="0">
-                <a:solidFill>
-                  <a:srgbClr val="28455F"/>
-                </a:solidFill>
-                <a:latin typeface="Arial"/>
-              </a:rPr>
-              <a:t>[Who gets the time back]</a:t>
-            </a:r>
-          </a:p>
-        </p:txBody>
-      </p:sp>
-      <p:sp>
-        <p:nvSpPr>
-          <p:cNvPr id="13" name="Rounded Rectangle 12"/>
-          <p:cNvSpPr/>
-          <p:nvPr/>
-        </p:nvSpPr>
-        <p:spPr>
-          <a:xfrm>
-            <a:off x="6327648" y="1371600"/>
-            <a:ext cx="5257800" cy="4434840"/>
+            <a:off x="4334256" y="4343400"/>
+            <a:ext cx="3520440" cy="685800"/>
           </a:xfrm>
           <a:prstGeom prst="roundRect">
             <a:avLst>
-              <a:gd name="adj" fmla="val 5000"/>
+              <a:gd name="adj" fmla="val 10000"/>
             </a:avLst>
           </a:prstGeom>
           <a:solidFill>
@@ -4484,176 +5329,37 @@
           <a:lstStyle/>
           <a:p>
             <a:pPr algn="ctr"/>
-          </a:p>
-        </p:txBody>
-      </p:sp>
-      <p:sp>
-        <p:nvSpPr>
-          <p:cNvPr id="14" name="Rectangle 13"/>
-          <p:cNvSpPr/>
-          <p:nvPr/>
-        </p:nvSpPr>
-        <p:spPr>
-          <a:xfrm>
-            <a:off x="6327648" y="1371600"/>
-            <a:ext cx="5257800" cy="109728"/>
-          </a:xfrm>
-          <a:prstGeom prst="rect">
-            <a:avLst/>
-          </a:prstGeom>
-          <a:solidFill>
-            <a:srgbClr val="F47735"/>
-          </a:solidFill>
-          <a:ln>
-            <a:noFill/>
-          </a:ln>
-          <a:effectLst/>
-        </p:spPr>
-        <p:style>
-          <a:lnRef idx="1">
-            <a:schemeClr val="accent1"/>
-          </a:lnRef>
-          <a:fillRef idx="3">
-            <a:schemeClr val="accent1"/>
-          </a:fillRef>
-          <a:effectRef idx="2">
-            <a:schemeClr val="accent1"/>
-          </a:effectRef>
-          <a:fontRef idx="minor">
-            <a:schemeClr val="lt1"/>
-          </a:fontRef>
-        </p:style>
-        <p:txBody>
-          <a:bodyPr rtlCol="0" anchor="ctr" wrap="square" lIns="73152" rIns="73152" tIns="36576" bIns="36576"/>
-          <a:lstStyle/>
-          <a:p>
-            <a:pPr algn="ctr"/>
-          </a:p>
-        </p:txBody>
-      </p:sp>
-      <p:sp>
-        <p:nvSpPr>
-          <p:cNvPr id="15" name="TextBox 14"/>
-          <p:cNvSpPr txBox="1"/>
-          <p:nvPr/>
-        </p:nvSpPr>
-        <p:spPr>
-          <a:xfrm>
-            <a:off x="6647688" y="1645920"/>
-            <a:ext cx="4663440" cy="365760"/>
-          </a:xfrm>
-          <a:prstGeom prst="rect">
-            <a:avLst/>
-          </a:prstGeom>
-          <a:noFill/>
-        </p:spPr>
-        <p:txBody>
-          <a:bodyPr wrap="square" lIns="36576" rIns="36576" tIns="18288" bIns="18288" anchor="t">
-            <a:spAutoFit/>
-          </a:bodyPr>
-          <a:lstStyle/>
-          <a:p>
-            <a:pPr algn="l"/>
             <a:r>
               <a:rPr sz="1400" b="1" i="0">
                 <a:solidFill>
-                  <a:srgbClr val="F47735"/>
-                </a:solidFill>
-                <a:latin typeface="Bahnschrift"/>
-              </a:rPr>
-              <a:t>OPPORTUNITY AI</a:t>
-            </a:r>
-          </a:p>
-        </p:txBody>
-      </p:sp>
-      <p:sp>
-        <p:nvSpPr>
-          <p:cNvPr id="16" name="TextBox 15"/>
-          <p:cNvSpPr txBox="1"/>
-          <p:nvPr/>
-        </p:nvSpPr>
-        <p:spPr>
-          <a:xfrm>
-            <a:off x="6647688" y="2011680"/>
-            <a:ext cx="4663440" cy="548640"/>
-          </a:xfrm>
-          <a:prstGeom prst="rect">
-            <a:avLst/>
-          </a:prstGeom>
-          <a:noFill/>
-        </p:spPr>
-        <p:txBody>
-          <a:bodyPr wrap="square" lIns="36576" rIns="36576" tIns="18288" bIns="18288" anchor="t">
-            <a:spAutoFit/>
-          </a:bodyPr>
-          <a:lstStyle/>
-          <a:p>
-            <a:pPr algn="l"/>
-            <a:r>
-              <a:rPr sz="2400" b="1" i="0">
-                <a:solidFill>
-                  <a:srgbClr val="002B55"/>
-                </a:solidFill>
-                <a:latin typeface="Bahnschrift"/>
-              </a:rPr>
-              <a:t>Do what was not possible</a:t>
-            </a:r>
-          </a:p>
-        </p:txBody>
-      </p:sp>
-      <p:sp>
-        <p:nvSpPr>
-          <p:cNvPr id="17" name="TextBox 16"/>
-          <p:cNvSpPr txBox="1"/>
-          <p:nvPr/>
-        </p:nvSpPr>
-        <p:spPr>
-          <a:xfrm>
-            <a:off x="6647688" y="2788920"/>
-            <a:ext cx="4663440" cy="1005840"/>
-          </a:xfrm>
-          <a:prstGeom prst="rect">
-            <a:avLst/>
-          </a:prstGeom>
-          <a:noFill/>
-        </p:spPr>
-        <p:txBody>
-          <a:bodyPr wrap="square" lIns="36576" rIns="36576" tIns="18288" bIns="18288" anchor="ctr">
-            <a:spAutoFit/>
-          </a:bodyPr>
-          <a:lstStyle/>
-          <a:p>
-            <a:pPr algn="l"/>
-            <a:r>
-              <a:rPr sz="4000" b="1" i="0">
-                <a:solidFill>
-                  <a:srgbClr val="F47735"/>
-                </a:solidFill>
-                <a:latin typeface="Bahnschrift"/>
-              </a:rPr>
-              <a:t>[New capability]</a:t>
+                  <a:srgbClr val="B4501F"/>
+                </a:solidFill>
+                <a:latin typeface="Arial"/>
+              </a:rPr>
+              <a:t>[Risk 2]</a:t>
             </a:r>
           </a:p>
         </p:txBody>
       </p:sp>
       <p:cxnSp>
         <p:nvCxnSpPr>
-          <p:cNvPr id="18" name="Connector 17"/>
+          <p:cNvPr id="21" name="Connector 20"/>
           <p:cNvCxnSpPr/>
           <p:nvPr/>
         </p:nvCxnSpPr>
         <p:spPr>
           <a:xfrm>
-            <a:off x="6647688" y="3977639"/>
-            <a:ext cx="4617720" cy="0"/>
+            <a:off x="6089904" y="5029200"/>
+            <a:ext cx="0" cy="228600"/>
           </a:xfrm>
           <a:prstGeom prst="line">
             <a:avLst/>
           </a:prstGeom>
-          <a:ln w="25400">
+          <a:ln w="15875">
             <a:solidFill>
-              <a:srgbClr val="FFFFFF"/>
+              <a:srgbClr val="8A9BAA"/>
             </a:solidFill>
+            <a:tailEnd type="triangle" w="med" len="med"/>
           </a:ln>
         </p:spPr>
         <p:style>
@@ -4673,90 +5379,22 @@
       </p:cxnSp>
       <p:sp>
         <p:nvSpPr>
-          <p:cNvPr id="19" name="TextBox 18"/>
-          <p:cNvSpPr txBox="1"/>
-          <p:nvPr/>
-        </p:nvSpPr>
-        <p:spPr>
-          <a:xfrm>
-            <a:off x="6647688" y="4114800"/>
-            <a:ext cx="4663440" cy="731520"/>
-          </a:xfrm>
-          <a:prstGeom prst="rect">
-            <a:avLst/>
-          </a:prstGeom>
-          <a:noFill/>
-        </p:spPr>
-        <p:txBody>
-          <a:bodyPr wrap="square" lIns="36576" rIns="36576" tIns="18288" bIns="18288" anchor="t">
-            <a:spAutoFit/>
-          </a:bodyPr>
-          <a:lstStyle/>
-          <a:p>
-            <a:pPr algn="l"/>
-            <a:r>
-              <a:rPr sz="1700" b="1" i="0">
-                <a:solidFill>
-                  <a:srgbClr val="002B55"/>
-                </a:solidFill>
-                <a:latin typeface="Arial"/>
-              </a:rPr>
-              <a:t>[e.g. every session, every HCP, every week]</a:t>
-            </a:r>
-          </a:p>
-        </p:txBody>
-      </p:sp>
-      <p:sp>
-        <p:nvSpPr>
-          <p:cNvPr id="20" name="TextBox 19"/>
-          <p:cNvSpPr txBox="1"/>
-          <p:nvPr/>
-        </p:nvSpPr>
-        <p:spPr>
-          <a:xfrm>
-            <a:off x="6647688" y="4892040"/>
-            <a:ext cx="4663440" cy="731520"/>
-          </a:xfrm>
-          <a:prstGeom prst="rect">
-            <a:avLst/>
-          </a:prstGeom>
-          <a:noFill/>
-        </p:spPr>
-        <p:txBody>
-          <a:bodyPr wrap="square" lIns="36576" rIns="36576" tIns="18288" bIns="18288" anchor="t">
-            <a:spAutoFit/>
-          </a:bodyPr>
-          <a:lstStyle/>
-          <a:p>
-            <a:pPr algn="l"/>
-            <a:r>
-              <a:rPr sz="1500" b="0" i="0">
-                <a:solidFill>
-                  <a:srgbClr val="28455F"/>
-                </a:solidFill>
-                <a:latin typeface="Arial"/>
-              </a:rPr>
-              <a:t>[Who benefits, and how]</a:t>
-            </a:r>
-          </a:p>
-        </p:txBody>
-      </p:sp>
-      <p:sp>
-        <p:nvSpPr>
-          <p:cNvPr id="21" name="Oval 20"/>
+          <p:cNvPr id="22" name="Rounded Rectangle 21"/>
           <p:cNvSpPr/>
           <p:nvPr/>
         </p:nvSpPr>
         <p:spPr>
           <a:xfrm>
-            <a:off x="5733288" y="3017520"/>
-            <a:ext cx="548640" cy="548640"/>
-          </a:xfrm>
-          <a:prstGeom prst="ellipse">
-            <a:avLst/>
+            <a:off x="4334256" y="5257800"/>
+            <a:ext cx="3520440" cy="868680"/>
+          </a:xfrm>
+          <a:prstGeom prst="roundRect">
+            <a:avLst>
+              <a:gd name="adj" fmla="val 10000"/>
+            </a:avLst>
           </a:prstGeom>
           <a:solidFill>
-            <a:srgbClr val="002B55"/>
+            <a:srgbClr val="E3F1F0"/>
           </a:solidFill>
           <a:ln>
             <a:noFill/>
@@ -4778,18 +5416,164 @@
           </a:fontRef>
         </p:style>
         <p:txBody>
-          <a:bodyPr rtlCol="0" anchor="ctr" wrap="square" lIns="0" rIns="0" tIns="36576" bIns="36576"/>
+          <a:bodyPr rtlCol="0" anchor="ctr" wrap="square" lIns="73152" rIns="73152" tIns="36576" bIns="36576"/>
           <a:lstStyle/>
           <a:p>
             <a:pPr algn="ctr"/>
             <a:r>
-              <a:rPr sz="2000" b="1" i="0">
-                <a:solidFill>
-                  <a:srgbClr val="FFFFFF"/>
+              <a:rPr sz="1400" b="1" i="0">
+                <a:solidFill>
+                  <a:srgbClr val="007879"/>
                 </a:solidFill>
                 <a:latin typeface="Arial"/>
               </a:rPr>
-              <a:t>→</a:t>
+              <a:t>[Guardrail we built]</a:t>
+            </a:r>
+          </a:p>
+        </p:txBody>
+      </p:sp>
+      <p:sp>
+        <p:nvSpPr>
+          <p:cNvPr id="23" name="Rounded Rectangle 22"/>
+          <p:cNvSpPr/>
+          <p:nvPr/>
+        </p:nvSpPr>
+        <p:spPr>
+          <a:xfrm>
+            <a:off x="8055864" y="4343400"/>
+            <a:ext cx="3520440" cy="685800"/>
+          </a:xfrm>
+          <a:prstGeom prst="roundRect">
+            <a:avLst>
+              <a:gd name="adj" fmla="val 10000"/>
+            </a:avLst>
+          </a:prstGeom>
+          <a:solidFill>
+            <a:srgbClr val="FDEBE1"/>
+          </a:solidFill>
+          <a:ln>
+            <a:noFill/>
+          </a:ln>
+          <a:effectLst/>
+        </p:spPr>
+        <p:style>
+          <a:lnRef idx="1">
+            <a:schemeClr val="accent1"/>
+          </a:lnRef>
+          <a:fillRef idx="3">
+            <a:schemeClr val="accent1"/>
+          </a:fillRef>
+          <a:effectRef idx="2">
+            <a:schemeClr val="accent1"/>
+          </a:effectRef>
+          <a:fontRef idx="minor">
+            <a:schemeClr val="lt1"/>
+          </a:fontRef>
+        </p:style>
+        <p:txBody>
+          <a:bodyPr rtlCol="0" anchor="ctr" wrap="square" lIns="73152" rIns="73152" tIns="36576" bIns="36576"/>
+          <a:lstStyle/>
+          <a:p>
+            <a:pPr algn="ctr"/>
+            <a:r>
+              <a:rPr sz="1400" b="1" i="0">
+                <a:solidFill>
+                  <a:srgbClr val="B4501F"/>
+                </a:solidFill>
+                <a:latin typeface="Arial"/>
+              </a:rPr>
+              <a:t>[Risk 3]</a:t>
+            </a:r>
+          </a:p>
+        </p:txBody>
+      </p:sp>
+      <p:cxnSp>
+        <p:nvCxnSpPr>
+          <p:cNvPr id="24" name="Connector 23"/>
+          <p:cNvCxnSpPr/>
+          <p:nvPr/>
+        </p:nvCxnSpPr>
+        <p:spPr>
+          <a:xfrm>
+            <a:off x="9811512" y="5029200"/>
+            <a:ext cx="0" cy="228600"/>
+          </a:xfrm>
+          <a:prstGeom prst="line">
+            <a:avLst/>
+          </a:prstGeom>
+          <a:ln w="15875">
+            <a:solidFill>
+              <a:srgbClr val="8A9BAA"/>
+            </a:solidFill>
+            <a:tailEnd type="triangle" w="med" len="med"/>
+          </a:ln>
+        </p:spPr>
+        <p:style>
+          <a:lnRef idx="2">
+            <a:schemeClr val="accent1"/>
+          </a:lnRef>
+          <a:fillRef idx="0">
+            <a:schemeClr val="accent1"/>
+          </a:fillRef>
+          <a:effectRef idx="1">
+            <a:schemeClr val="accent1"/>
+          </a:effectRef>
+          <a:fontRef idx="minor">
+            <a:schemeClr val="tx1"/>
+          </a:fontRef>
+        </p:style>
+      </p:cxnSp>
+      <p:sp>
+        <p:nvSpPr>
+          <p:cNvPr id="25" name="Rounded Rectangle 24"/>
+          <p:cNvSpPr/>
+          <p:nvPr/>
+        </p:nvSpPr>
+        <p:spPr>
+          <a:xfrm>
+            <a:off x="8055864" y="5257800"/>
+            <a:ext cx="3520440" cy="868680"/>
+          </a:xfrm>
+          <a:prstGeom prst="roundRect">
+            <a:avLst>
+              <a:gd name="adj" fmla="val 10000"/>
+            </a:avLst>
+          </a:prstGeom>
+          <a:solidFill>
+            <a:srgbClr val="E3F1F0"/>
+          </a:solidFill>
+          <a:ln>
+            <a:noFill/>
+          </a:ln>
+          <a:effectLst/>
+        </p:spPr>
+        <p:style>
+          <a:lnRef idx="1">
+            <a:schemeClr val="accent1"/>
+          </a:lnRef>
+          <a:fillRef idx="3">
+            <a:schemeClr val="accent1"/>
+          </a:fillRef>
+          <a:effectRef idx="2">
+            <a:schemeClr val="accent1"/>
+          </a:effectRef>
+          <a:fontRef idx="minor">
+            <a:schemeClr val="lt1"/>
+          </a:fontRef>
+        </p:style>
+        <p:txBody>
+          <a:bodyPr rtlCol="0" anchor="ctr" wrap="square" lIns="73152" rIns="73152" tIns="36576" bIns="36576"/>
+          <a:lstStyle/>
+          <a:p>
+            <a:pPr algn="ctr"/>
+            <a:r>
+              <a:rPr sz="1400" b="1" i="0">
+                <a:solidFill>
+                  <a:srgbClr val="007879"/>
+                </a:solidFill>
+                <a:latin typeface="Arial"/>
+              </a:rPr>
+              <a:t>[Guardrail we built]</a:t>
             </a:r>
           </a:p>
         </p:txBody>
@@ -4850,7 +5634,7 @@
                 </a:solidFill>
                 <a:latin typeface="Bahnschrift"/>
               </a:rPr>
-              <a:t>From hackathon to pilot</a:t>
+              <a:t>Faster is good. New is better.</a:t>
             </a:r>
           </a:p>
         </p:txBody>
@@ -4921,6 +5705,790 @@
                 <a:latin typeface="Bahnschrift"/>
               </a:rPr>
               <a:t>11</a:t>
+            </a:r>
+          </a:p>
+        </p:txBody>
+      </p:sp>
+      <p:sp>
+        <p:nvSpPr>
+          <p:cNvPr id="5" name="Rounded Rectangle 4"/>
+          <p:cNvSpPr/>
+          <p:nvPr/>
+        </p:nvSpPr>
+        <p:spPr>
+          <a:xfrm>
+            <a:off x="612648" y="1371600"/>
+            <a:ext cx="5257800" cy="4434840"/>
+          </a:xfrm>
+          <a:prstGeom prst="roundRect">
+            <a:avLst>
+              <a:gd name="adj" fmla="val 5000"/>
+            </a:avLst>
+          </a:prstGeom>
+          <a:solidFill>
+            <a:srgbClr val="E3F1F0"/>
+          </a:solidFill>
+          <a:ln>
+            <a:noFill/>
+          </a:ln>
+          <a:effectLst/>
+        </p:spPr>
+        <p:style>
+          <a:lnRef idx="1">
+            <a:schemeClr val="accent1"/>
+          </a:lnRef>
+          <a:fillRef idx="3">
+            <a:schemeClr val="accent1"/>
+          </a:fillRef>
+          <a:effectRef idx="2">
+            <a:schemeClr val="accent1"/>
+          </a:effectRef>
+          <a:fontRef idx="minor">
+            <a:schemeClr val="lt1"/>
+          </a:fontRef>
+        </p:style>
+        <p:txBody>
+          <a:bodyPr rtlCol="0" anchor="ctr" wrap="square" lIns="73152" rIns="73152" tIns="36576" bIns="36576"/>
+          <a:lstStyle/>
+          <a:p>
+            <a:pPr algn="ctr"/>
+          </a:p>
+        </p:txBody>
+      </p:sp>
+      <p:sp>
+        <p:nvSpPr>
+          <p:cNvPr id="6" name="Rectangle 5"/>
+          <p:cNvSpPr/>
+          <p:nvPr/>
+        </p:nvSpPr>
+        <p:spPr>
+          <a:xfrm>
+            <a:off x="612648" y="1371600"/>
+            <a:ext cx="5257800" cy="109728"/>
+          </a:xfrm>
+          <a:prstGeom prst="rect">
+            <a:avLst/>
+          </a:prstGeom>
+          <a:solidFill>
+            <a:srgbClr val="007879"/>
+          </a:solidFill>
+          <a:ln>
+            <a:noFill/>
+          </a:ln>
+          <a:effectLst/>
+        </p:spPr>
+        <p:style>
+          <a:lnRef idx="1">
+            <a:schemeClr val="accent1"/>
+          </a:lnRef>
+          <a:fillRef idx="3">
+            <a:schemeClr val="accent1"/>
+          </a:fillRef>
+          <a:effectRef idx="2">
+            <a:schemeClr val="accent1"/>
+          </a:effectRef>
+          <a:fontRef idx="minor">
+            <a:schemeClr val="lt1"/>
+          </a:fontRef>
+        </p:style>
+        <p:txBody>
+          <a:bodyPr rtlCol="0" anchor="ctr" wrap="square" lIns="73152" rIns="73152" tIns="36576" bIns="36576"/>
+          <a:lstStyle/>
+          <a:p>
+            <a:pPr algn="ctr"/>
+          </a:p>
+        </p:txBody>
+      </p:sp>
+      <p:sp>
+        <p:nvSpPr>
+          <p:cNvPr id="7" name="TextBox 6"/>
+          <p:cNvSpPr txBox="1"/>
+          <p:nvPr/>
+        </p:nvSpPr>
+        <p:spPr>
+          <a:xfrm>
+            <a:off x="932688" y="1645920"/>
+            <a:ext cx="4663440" cy="365760"/>
+          </a:xfrm>
+          <a:prstGeom prst="rect">
+            <a:avLst/>
+          </a:prstGeom>
+          <a:noFill/>
+        </p:spPr>
+        <p:txBody>
+          <a:bodyPr wrap="square" lIns="36576" rIns="36576" tIns="18288" bIns="18288" anchor="t">
+            <a:spAutoFit/>
+          </a:bodyPr>
+          <a:lstStyle/>
+          <a:p>
+            <a:pPr algn="l"/>
+            <a:r>
+              <a:rPr sz="1400" b="1" i="0">
+                <a:solidFill>
+                  <a:srgbClr val="007879"/>
+                </a:solidFill>
+                <a:latin typeface="Bahnschrift"/>
+              </a:rPr>
+              <a:t>EFFICIENCY AI</a:t>
+            </a:r>
+          </a:p>
+        </p:txBody>
+      </p:sp>
+      <p:sp>
+        <p:nvSpPr>
+          <p:cNvPr id="8" name="TextBox 7"/>
+          <p:cNvSpPr txBox="1"/>
+          <p:nvPr/>
+        </p:nvSpPr>
+        <p:spPr>
+          <a:xfrm>
+            <a:off x="932688" y="2011680"/>
+            <a:ext cx="4663440" cy="548640"/>
+          </a:xfrm>
+          <a:prstGeom prst="rect">
+            <a:avLst/>
+          </a:prstGeom>
+          <a:noFill/>
+        </p:spPr>
+        <p:txBody>
+          <a:bodyPr wrap="square" lIns="36576" rIns="36576" tIns="18288" bIns="18288" anchor="t">
+            <a:spAutoFit/>
+          </a:bodyPr>
+          <a:lstStyle/>
+          <a:p>
+            <a:pPr algn="l"/>
+            <a:r>
+              <a:rPr sz="2400" b="1" i="0">
+                <a:solidFill>
+                  <a:srgbClr val="002B55"/>
+                </a:solidFill>
+                <a:latin typeface="Bahnschrift"/>
+              </a:rPr>
+              <a:t>Do today's work faster</a:t>
+            </a:r>
+          </a:p>
+        </p:txBody>
+      </p:sp>
+      <p:sp>
+        <p:nvSpPr>
+          <p:cNvPr id="9" name="TextBox 8"/>
+          <p:cNvSpPr txBox="1"/>
+          <p:nvPr/>
+        </p:nvSpPr>
+        <p:spPr>
+          <a:xfrm>
+            <a:off x="932688" y="2788920"/>
+            <a:ext cx="4663440" cy="1005840"/>
+          </a:xfrm>
+          <a:prstGeom prst="rect">
+            <a:avLst/>
+          </a:prstGeom>
+          <a:noFill/>
+        </p:spPr>
+        <p:txBody>
+          <a:bodyPr wrap="square" lIns="36576" rIns="36576" tIns="18288" bIns="18288" anchor="ctr">
+            <a:spAutoFit/>
+          </a:bodyPr>
+          <a:lstStyle/>
+          <a:p>
+            <a:pPr algn="l"/>
+            <a:r>
+              <a:rPr sz="4000" b="1" i="0">
+                <a:solidFill>
+                  <a:srgbClr val="007879"/>
+                </a:solidFill>
+                <a:latin typeface="Bahnschrift"/>
+              </a:rPr>
+              <a:t>[X]% less time</a:t>
+            </a:r>
+          </a:p>
+        </p:txBody>
+      </p:sp>
+      <p:cxnSp>
+        <p:nvCxnSpPr>
+          <p:cNvPr id="10" name="Connector 9"/>
+          <p:cNvCxnSpPr/>
+          <p:nvPr/>
+        </p:nvCxnSpPr>
+        <p:spPr>
+          <a:xfrm>
+            <a:off x="932688" y="3977639"/>
+            <a:ext cx="4617720" cy="0"/>
+          </a:xfrm>
+          <a:prstGeom prst="line">
+            <a:avLst/>
+          </a:prstGeom>
+          <a:ln w="25400">
+            <a:solidFill>
+              <a:srgbClr val="FFFFFF"/>
+            </a:solidFill>
+          </a:ln>
+        </p:spPr>
+        <p:style>
+          <a:lnRef idx="2">
+            <a:schemeClr val="accent1"/>
+          </a:lnRef>
+          <a:fillRef idx="0">
+            <a:schemeClr val="accent1"/>
+          </a:fillRef>
+          <a:effectRef idx="1">
+            <a:schemeClr val="accent1"/>
+          </a:effectRef>
+          <a:fontRef idx="minor">
+            <a:schemeClr val="tx1"/>
+          </a:fontRef>
+        </p:style>
+      </p:cxnSp>
+      <p:sp>
+        <p:nvSpPr>
+          <p:cNvPr id="11" name="TextBox 10"/>
+          <p:cNvSpPr txBox="1"/>
+          <p:nvPr/>
+        </p:nvSpPr>
+        <p:spPr>
+          <a:xfrm>
+            <a:off x="932688" y="4114800"/>
+            <a:ext cx="4663440" cy="731520"/>
+          </a:xfrm>
+          <a:prstGeom prst="rect">
+            <a:avLst/>
+          </a:prstGeom>
+          <a:noFill/>
+        </p:spPr>
+        <p:txBody>
+          <a:bodyPr wrap="square" lIns="36576" rIns="36576" tIns="18288" bIns="18288" anchor="t">
+            <a:spAutoFit/>
+          </a:bodyPr>
+          <a:lstStyle/>
+          <a:p>
+            <a:pPr algn="l"/>
+            <a:r>
+              <a:rPr sz="1700" b="1" i="0">
+                <a:solidFill>
+                  <a:srgbClr val="002B55"/>
+                </a:solidFill>
+                <a:latin typeface="Arial"/>
+              </a:rPr>
+              <a:t>[Task] takes [Y] h, not [Z] h</a:t>
+            </a:r>
+          </a:p>
+        </p:txBody>
+      </p:sp>
+      <p:sp>
+        <p:nvSpPr>
+          <p:cNvPr id="12" name="TextBox 11"/>
+          <p:cNvSpPr txBox="1"/>
+          <p:nvPr/>
+        </p:nvSpPr>
+        <p:spPr>
+          <a:xfrm>
+            <a:off x="932688" y="4892040"/>
+            <a:ext cx="4663440" cy="731520"/>
+          </a:xfrm>
+          <a:prstGeom prst="rect">
+            <a:avLst/>
+          </a:prstGeom>
+          <a:noFill/>
+        </p:spPr>
+        <p:txBody>
+          <a:bodyPr wrap="square" lIns="36576" rIns="36576" tIns="18288" bIns="18288" anchor="t">
+            <a:spAutoFit/>
+          </a:bodyPr>
+          <a:lstStyle/>
+          <a:p>
+            <a:pPr algn="l"/>
+            <a:r>
+              <a:rPr sz="1500" b="0" i="0">
+                <a:solidFill>
+                  <a:srgbClr val="28455F"/>
+                </a:solidFill>
+                <a:latin typeface="Arial"/>
+              </a:rPr>
+              <a:t>[Who gets the time back]</a:t>
+            </a:r>
+          </a:p>
+        </p:txBody>
+      </p:sp>
+      <p:sp>
+        <p:nvSpPr>
+          <p:cNvPr id="13" name="Rounded Rectangle 12"/>
+          <p:cNvSpPr/>
+          <p:nvPr/>
+        </p:nvSpPr>
+        <p:spPr>
+          <a:xfrm>
+            <a:off x="6327648" y="1371600"/>
+            <a:ext cx="5257800" cy="4434840"/>
+          </a:xfrm>
+          <a:prstGeom prst="roundRect">
+            <a:avLst>
+              <a:gd name="adj" fmla="val 5000"/>
+            </a:avLst>
+          </a:prstGeom>
+          <a:solidFill>
+            <a:srgbClr val="FDEBE1"/>
+          </a:solidFill>
+          <a:ln>
+            <a:noFill/>
+          </a:ln>
+          <a:effectLst/>
+        </p:spPr>
+        <p:style>
+          <a:lnRef idx="1">
+            <a:schemeClr val="accent1"/>
+          </a:lnRef>
+          <a:fillRef idx="3">
+            <a:schemeClr val="accent1"/>
+          </a:fillRef>
+          <a:effectRef idx="2">
+            <a:schemeClr val="accent1"/>
+          </a:effectRef>
+          <a:fontRef idx="minor">
+            <a:schemeClr val="lt1"/>
+          </a:fontRef>
+        </p:style>
+        <p:txBody>
+          <a:bodyPr rtlCol="0" anchor="ctr" wrap="square" lIns="73152" rIns="73152" tIns="36576" bIns="36576"/>
+          <a:lstStyle/>
+          <a:p>
+            <a:pPr algn="ctr"/>
+          </a:p>
+        </p:txBody>
+      </p:sp>
+      <p:sp>
+        <p:nvSpPr>
+          <p:cNvPr id="14" name="Rectangle 13"/>
+          <p:cNvSpPr/>
+          <p:nvPr/>
+        </p:nvSpPr>
+        <p:spPr>
+          <a:xfrm>
+            <a:off x="6327648" y="1371600"/>
+            <a:ext cx="5257800" cy="109728"/>
+          </a:xfrm>
+          <a:prstGeom prst="rect">
+            <a:avLst/>
+          </a:prstGeom>
+          <a:solidFill>
+            <a:srgbClr val="F47735"/>
+          </a:solidFill>
+          <a:ln>
+            <a:noFill/>
+          </a:ln>
+          <a:effectLst/>
+        </p:spPr>
+        <p:style>
+          <a:lnRef idx="1">
+            <a:schemeClr val="accent1"/>
+          </a:lnRef>
+          <a:fillRef idx="3">
+            <a:schemeClr val="accent1"/>
+          </a:fillRef>
+          <a:effectRef idx="2">
+            <a:schemeClr val="accent1"/>
+          </a:effectRef>
+          <a:fontRef idx="minor">
+            <a:schemeClr val="lt1"/>
+          </a:fontRef>
+        </p:style>
+        <p:txBody>
+          <a:bodyPr rtlCol="0" anchor="ctr" wrap="square" lIns="73152" rIns="73152" tIns="36576" bIns="36576"/>
+          <a:lstStyle/>
+          <a:p>
+            <a:pPr algn="ctr"/>
+          </a:p>
+        </p:txBody>
+      </p:sp>
+      <p:sp>
+        <p:nvSpPr>
+          <p:cNvPr id="15" name="TextBox 14"/>
+          <p:cNvSpPr txBox="1"/>
+          <p:nvPr/>
+        </p:nvSpPr>
+        <p:spPr>
+          <a:xfrm>
+            <a:off x="6647688" y="1645920"/>
+            <a:ext cx="4663440" cy="365760"/>
+          </a:xfrm>
+          <a:prstGeom prst="rect">
+            <a:avLst/>
+          </a:prstGeom>
+          <a:noFill/>
+        </p:spPr>
+        <p:txBody>
+          <a:bodyPr wrap="square" lIns="36576" rIns="36576" tIns="18288" bIns="18288" anchor="t">
+            <a:spAutoFit/>
+          </a:bodyPr>
+          <a:lstStyle/>
+          <a:p>
+            <a:pPr algn="l"/>
+            <a:r>
+              <a:rPr sz="1400" b="1" i="0">
+                <a:solidFill>
+                  <a:srgbClr val="F47735"/>
+                </a:solidFill>
+                <a:latin typeface="Bahnschrift"/>
+              </a:rPr>
+              <a:t>OPPORTUNITY AI</a:t>
+            </a:r>
+          </a:p>
+        </p:txBody>
+      </p:sp>
+      <p:sp>
+        <p:nvSpPr>
+          <p:cNvPr id="16" name="TextBox 15"/>
+          <p:cNvSpPr txBox="1"/>
+          <p:nvPr/>
+        </p:nvSpPr>
+        <p:spPr>
+          <a:xfrm>
+            <a:off x="6647688" y="2011680"/>
+            <a:ext cx="4663440" cy="548640"/>
+          </a:xfrm>
+          <a:prstGeom prst="rect">
+            <a:avLst/>
+          </a:prstGeom>
+          <a:noFill/>
+        </p:spPr>
+        <p:txBody>
+          <a:bodyPr wrap="square" lIns="36576" rIns="36576" tIns="18288" bIns="18288" anchor="t">
+            <a:spAutoFit/>
+          </a:bodyPr>
+          <a:lstStyle/>
+          <a:p>
+            <a:pPr algn="l"/>
+            <a:r>
+              <a:rPr sz="2400" b="1" i="0">
+                <a:solidFill>
+                  <a:srgbClr val="002B55"/>
+                </a:solidFill>
+                <a:latin typeface="Bahnschrift"/>
+              </a:rPr>
+              <a:t>Do what was not possible</a:t>
+            </a:r>
+          </a:p>
+        </p:txBody>
+      </p:sp>
+      <p:sp>
+        <p:nvSpPr>
+          <p:cNvPr id="17" name="TextBox 16"/>
+          <p:cNvSpPr txBox="1"/>
+          <p:nvPr/>
+        </p:nvSpPr>
+        <p:spPr>
+          <a:xfrm>
+            <a:off x="6647688" y="2788920"/>
+            <a:ext cx="4663440" cy="1005840"/>
+          </a:xfrm>
+          <a:prstGeom prst="rect">
+            <a:avLst/>
+          </a:prstGeom>
+          <a:noFill/>
+        </p:spPr>
+        <p:txBody>
+          <a:bodyPr wrap="square" lIns="36576" rIns="36576" tIns="18288" bIns="18288" anchor="ctr">
+            <a:spAutoFit/>
+          </a:bodyPr>
+          <a:lstStyle/>
+          <a:p>
+            <a:pPr algn="l"/>
+            <a:r>
+              <a:rPr sz="4000" b="1" i="0">
+                <a:solidFill>
+                  <a:srgbClr val="F47735"/>
+                </a:solidFill>
+                <a:latin typeface="Bahnschrift"/>
+              </a:rPr>
+              <a:t>[New capability]</a:t>
+            </a:r>
+          </a:p>
+        </p:txBody>
+      </p:sp>
+      <p:cxnSp>
+        <p:nvCxnSpPr>
+          <p:cNvPr id="18" name="Connector 17"/>
+          <p:cNvCxnSpPr/>
+          <p:nvPr/>
+        </p:nvCxnSpPr>
+        <p:spPr>
+          <a:xfrm>
+            <a:off x="6647688" y="3977639"/>
+            <a:ext cx="4617720" cy="0"/>
+          </a:xfrm>
+          <a:prstGeom prst="line">
+            <a:avLst/>
+          </a:prstGeom>
+          <a:ln w="25400">
+            <a:solidFill>
+              <a:srgbClr val="FFFFFF"/>
+            </a:solidFill>
+          </a:ln>
+        </p:spPr>
+        <p:style>
+          <a:lnRef idx="2">
+            <a:schemeClr val="accent1"/>
+          </a:lnRef>
+          <a:fillRef idx="0">
+            <a:schemeClr val="accent1"/>
+          </a:fillRef>
+          <a:effectRef idx="1">
+            <a:schemeClr val="accent1"/>
+          </a:effectRef>
+          <a:fontRef idx="minor">
+            <a:schemeClr val="tx1"/>
+          </a:fontRef>
+        </p:style>
+      </p:cxnSp>
+      <p:sp>
+        <p:nvSpPr>
+          <p:cNvPr id="19" name="TextBox 18"/>
+          <p:cNvSpPr txBox="1"/>
+          <p:nvPr/>
+        </p:nvSpPr>
+        <p:spPr>
+          <a:xfrm>
+            <a:off x="6647688" y="4114800"/>
+            <a:ext cx="4663440" cy="731520"/>
+          </a:xfrm>
+          <a:prstGeom prst="rect">
+            <a:avLst/>
+          </a:prstGeom>
+          <a:noFill/>
+        </p:spPr>
+        <p:txBody>
+          <a:bodyPr wrap="square" lIns="36576" rIns="36576" tIns="18288" bIns="18288" anchor="t">
+            <a:spAutoFit/>
+          </a:bodyPr>
+          <a:lstStyle/>
+          <a:p>
+            <a:pPr algn="l"/>
+            <a:r>
+              <a:rPr sz="1700" b="1" i="0">
+                <a:solidFill>
+                  <a:srgbClr val="002B55"/>
+                </a:solidFill>
+                <a:latin typeface="Arial"/>
+              </a:rPr>
+              <a:t>[e.g. every session, every HCP, every week]</a:t>
+            </a:r>
+          </a:p>
+        </p:txBody>
+      </p:sp>
+      <p:sp>
+        <p:nvSpPr>
+          <p:cNvPr id="20" name="TextBox 19"/>
+          <p:cNvSpPr txBox="1"/>
+          <p:nvPr/>
+        </p:nvSpPr>
+        <p:spPr>
+          <a:xfrm>
+            <a:off x="6647688" y="4892040"/>
+            <a:ext cx="4663440" cy="731520"/>
+          </a:xfrm>
+          <a:prstGeom prst="rect">
+            <a:avLst/>
+          </a:prstGeom>
+          <a:noFill/>
+        </p:spPr>
+        <p:txBody>
+          <a:bodyPr wrap="square" lIns="36576" rIns="36576" tIns="18288" bIns="18288" anchor="t">
+            <a:spAutoFit/>
+          </a:bodyPr>
+          <a:lstStyle/>
+          <a:p>
+            <a:pPr algn="l"/>
+            <a:r>
+              <a:rPr sz="1500" b="0" i="0">
+                <a:solidFill>
+                  <a:srgbClr val="28455F"/>
+                </a:solidFill>
+                <a:latin typeface="Arial"/>
+              </a:rPr>
+              <a:t>[Who benefits, and how]</a:t>
+            </a:r>
+          </a:p>
+        </p:txBody>
+      </p:sp>
+      <p:sp>
+        <p:nvSpPr>
+          <p:cNvPr id="21" name="Oval 20"/>
+          <p:cNvSpPr/>
+          <p:nvPr/>
+        </p:nvSpPr>
+        <p:spPr>
+          <a:xfrm>
+            <a:off x="5733288" y="3017520"/>
+            <a:ext cx="548640" cy="548640"/>
+          </a:xfrm>
+          <a:prstGeom prst="ellipse">
+            <a:avLst/>
+          </a:prstGeom>
+          <a:solidFill>
+            <a:srgbClr val="002B55"/>
+          </a:solidFill>
+          <a:ln>
+            <a:noFill/>
+          </a:ln>
+          <a:effectLst/>
+        </p:spPr>
+        <p:style>
+          <a:lnRef idx="1">
+            <a:schemeClr val="accent1"/>
+          </a:lnRef>
+          <a:fillRef idx="3">
+            <a:schemeClr val="accent1"/>
+          </a:fillRef>
+          <a:effectRef idx="2">
+            <a:schemeClr val="accent1"/>
+          </a:effectRef>
+          <a:fontRef idx="minor">
+            <a:schemeClr val="lt1"/>
+          </a:fontRef>
+        </p:style>
+        <p:txBody>
+          <a:bodyPr rtlCol="0" anchor="ctr" wrap="square" lIns="0" rIns="0" tIns="36576" bIns="36576"/>
+          <a:lstStyle/>
+          <a:p>
+            <a:pPr algn="ctr"/>
+            <a:r>
+              <a:rPr sz="2000" b="1" i="0">
+                <a:solidFill>
+                  <a:srgbClr val="FFFFFF"/>
+                </a:solidFill>
+                <a:latin typeface="Arial"/>
+              </a:rPr>
+              <a:t>→</a:t>
+            </a:r>
+          </a:p>
+        </p:txBody>
+      </p:sp>
+    </p:spTree>
+  </p:cSld>
+  <p:clrMapOvr>
+    <a:masterClrMapping/>
+  </p:clrMapOvr>
+</p:sld>
+</file>
+
+<file path=ppt/slides/slide12.xml><?xml version="1.0" encoding="utf-8"?>
+<p:sld xmlns:a="http://schemas.openxmlformats.org/drawingml/2006/main" xmlns:p="http://schemas.openxmlformats.org/presentationml/2006/main" xmlns:r="http://schemas.openxmlformats.org/officeDocument/2006/relationships">
+  <p:cSld>
+    <p:bg>
+      <p:bgPr>
+        <a:solidFill>
+          <a:srgbClr val="FFFEFB"/>
+        </a:solidFill>
+        <a:effectLst/>
+      </p:bgPr>
+    </p:bg>
+    <p:spTree>
+      <p:nvGrpSpPr>
+        <p:cNvPr id="1" name=""/>
+        <p:cNvGrpSpPr/>
+        <p:nvPr/>
+      </p:nvGrpSpPr>
+      <p:grpSpPr/>
+      <p:sp>
+        <p:nvSpPr>
+          <p:cNvPr id="2" name="TextBox 1"/>
+          <p:cNvSpPr txBox="1"/>
+          <p:nvPr/>
+        </p:nvSpPr>
+        <p:spPr>
+          <a:xfrm>
+            <a:off x="612648" y="365760"/>
+            <a:ext cx="10972800" cy="777240"/>
+          </a:xfrm>
+          <a:prstGeom prst="rect">
+            <a:avLst/>
+          </a:prstGeom>
+          <a:noFill/>
+        </p:spPr>
+        <p:txBody>
+          <a:bodyPr wrap="square" lIns="36576" rIns="36576" tIns="18288" bIns="18288" anchor="ctr">
+            <a:spAutoFit/>
+          </a:bodyPr>
+          <a:lstStyle/>
+          <a:p>
+            <a:pPr algn="l"/>
+            <a:r>
+              <a:rPr sz="3000" b="1" i="0">
+                <a:solidFill>
+                  <a:srgbClr val="002B55"/>
+                </a:solidFill>
+                <a:latin typeface="Bahnschrift"/>
+              </a:rPr>
+              <a:t>From hackathon to pilot</a:t>
+            </a:r>
+          </a:p>
+        </p:txBody>
+      </p:sp>
+      <p:sp>
+        <p:nvSpPr>
+          <p:cNvPr id="3" name="TextBox 2"/>
+          <p:cNvSpPr txBox="1"/>
+          <p:nvPr/>
+        </p:nvSpPr>
+        <p:spPr>
+          <a:xfrm>
+            <a:off x="612648" y="6437376"/>
+            <a:ext cx="5715000" cy="219456"/>
+          </a:xfrm>
+          <a:prstGeom prst="rect">
+            <a:avLst/>
+          </a:prstGeom>
+          <a:noFill/>
+        </p:spPr>
+        <p:txBody>
+          <a:bodyPr wrap="square" lIns="36576" rIns="36576" tIns="18288" bIns="18288" anchor="t">
+            <a:spAutoFit/>
+          </a:bodyPr>
+          <a:lstStyle/>
+          <a:p>
+            <a:pPr algn="l"/>
+            <a:r>
+              <a:rPr sz="1050" b="0" i="0">
+                <a:solidFill>
+                  <a:srgbClr val="28455F"/>
+                </a:solidFill>
+                <a:latin typeface="Arial"/>
+              </a:rPr>
+              <a:t>AI IN ACTION / MEDICAL AFFAIRS</a:t>
+            </a:r>
+          </a:p>
+        </p:txBody>
+      </p:sp>
+      <p:sp>
+        <p:nvSpPr>
+          <p:cNvPr id="4" name="TextBox 3"/>
+          <p:cNvSpPr txBox="1"/>
+          <p:nvPr/>
+        </p:nvSpPr>
+        <p:spPr>
+          <a:xfrm>
+            <a:off x="11064240" y="6400800"/>
+            <a:ext cx="548640" cy="256032"/>
+          </a:xfrm>
+          <a:prstGeom prst="rect">
+            <a:avLst/>
+          </a:prstGeom>
+          <a:noFill/>
+        </p:spPr>
+        <p:txBody>
+          <a:bodyPr wrap="square" lIns="36576" rIns="36576" tIns="18288" bIns="18288" anchor="t">
+            <a:spAutoFit/>
+          </a:bodyPr>
+          <a:lstStyle/>
+          <a:p>
+            <a:pPr algn="r"/>
+            <a:r>
+              <a:rPr sz="1275" b="1" i="0">
+                <a:solidFill>
+                  <a:srgbClr val="28455F"/>
+                </a:solidFill>
+                <a:latin typeface="Bahnschrift"/>
+              </a:rPr>
+              <a:t>12</a:t>
             </a:r>
           </a:p>
         </p:txBody>
@@ -5781,7 +7349,7 @@
 </p:sld>
 </file>
 
-<file path=ppt/slides/slide12.xml><?xml version="1.0" encoding="utf-8"?>
+<file path=ppt/slides/slide13.xml><?xml version="1.0" encoding="utf-8"?>
 <p:sld xmlns:a="http://schemas.openxmlformats.org/drawingml/2006/main" xmlns:p="http://schemas.openxmlformats.org/presentationml/2006/main" xmlns:r="http://schemas.openxmlformats.org/officeDocument/2006/relationships">
   <p:cSld>
     <p:spTree>
@@ -6062,7 +7630,7 @@
                 </a:solidFill>
                 <a:latin typeface="Bahnschrift"/>
               </a:rPr>
-              <a:t>12</a:t>
+              <a:t>13</a:t>
             </a:r>
           </a:p>
         </p:txBody>
@@ -6075,7 +7643,7 @@
 </p:sld>
 </file>
 
-<file path=ppt/slides/slide13.xml><?xml version="1.0" encoding="utf-8"?>
+<file path=ppt/slides/slide14.xml><?xml version="1.0" encoding="utf-8"?>
 <p:sld xmlns:a="http://schemas.openxmlformats.org/drawingml/2006/main" xmlns:p="http://schemas.openxmlformats.org/presentationml/2006/main" xmlns:r="http://schemas.openxmlformats.org/officeDocument/2006/relationships" show="0">
   <p:cSld>
     <p:bg>
@@ -6123,7 +7691,7 @@
                 </a:solidFill>
                 <a:latin typeface="Bahnschrift"/>
               </a:rPr>
-              <a:t>Template guide · hidden · delete before presenting</a:t>
+              <a:t>For the agent and team: delete before presenting</a:t>
             </a:r>
           </a:p>
         </p:txBody>
@@ -6193,7 +7761,7 @@
                 </a:solidFill>
                 <a:latin typeface="Bahnschrift"/>
               </a:rPr>
-              <a:t>13</a:t>
+              <a:t>14</a:t>
             </a:r>
           </a:p>
         </p:txBody>
@@ -6220,14 +7788,14 @@
                 <a:gridCol w="3566160"/>
                 <a:gridCol w="1554480"/>
               </a:tblGrid>
-              <a:tr h="372793">
+              <a:tr h="346165">
                 <a:tc>
                   <a:txBody>
                     <a:bodyPr/>
                     <a:lstStyle/>
                     <a:p>
                       <a:r>
-                        <a:rPr sz="1250" b="1">
+                        <a:rPr sz="1150" b="1">
                           <a:solidFill>
                             <a:srgbClr val="FFFFFF"/>
                           </a:solidFill>
@@ -6249,13 +7817,13 @@
                     <a:lstStyle/>
                     <a:p>
                       <a:r>
-                        <a:rPr sz="1250" b="1">
+                        <a:rPr sz="1150" b="1">
                           <a:solidFill>
                             <a:srgbClr val="FFFFFF"/>
                           </a:solidFill>
                           <a:latin typeface="Arial"/>
                         </a:rPr>
-                        <a:t>Time</a:t>
+                        <a:t>Minutes (about)</a:t>
                       </a:r>
                     </a:p>
                   </a:txBody>
@@ -6266,14 +7834,14 @@
                   </a:tcPr>
                 </a:tc>
               </a:tr>
-              <a:tr h="372793">
+              <a:tr h="346165">
                 <a:tc>
                   <a:txBody>
                     <a:bodyPr/>
                     <a:lstStyle/>
                     <a:p>
                       <a:r>
-                        <a:rPr sz="1250" b="0">
+                        <a:rPr sz="1150" b="0">
                           <a:solidFill>
                             <a:srgbClr val="002B55"/>
                           </a:solidFill>
@@ -6295,13 +7863,13 @@
                     <a:lstStyle/>
                     <a:p>
                       <a:r>
-                        <a:rPr sz="1250" b="0">
+                        <a:rPr sz="1150" b="0">
                           <a:solidFill>
                             <a:srgbClr val="002B55"/>
                           </a:solidFill>
                           <a:latin typeface="Arial"/>
                         </a:rPr>
-                        <a:t>0:30</a:t>
+                        <a:t>~½</a:t>
                       </a:r>
                     </a:p>
                   </a:txBody>
@@ -6312,14 +7880,14 @@
                   </a:tcPr>
                 </a:tc>
               </a:tr>
-              <a:tr h="372793">
+              <a:tr h="346165">
                 <a:tc>
                   <a:txBody>
                     <a:bodyPr/>
                     <a:lstStyle/>
                     <a:p>
                       <a:r>
-                        <a:rPr sz="1250" b="0">
+                        <a:rPr sz="1150" b="0">
                           <a:solidFill>
                             <a:srgbClr val="002B55"/>
                           </a:solidFill>
@@ -6341,13 +7909,13 @@
                     <a:lstStyle/>
                     <a:p>
                       <a:r>
-                        <a:rPr sz="1250" b="0">
+                        <a:rPr sz="1150" b="0">
                           <a:solidFill>
                             <a:srgbClr val="002B55"/>
                           </a:solidFill>
                           <a:latin typeface="Arial"/>
                         </a:rPr>
-                        <a:t>1:30</a:t>
+                        <a:t>~1½</a:t>
                       </a:r>
                     </a:p>
                   </a:txBody>
@@ -6358,14 +7926,14 @@
                   </a:tcPr>
                 </a:tc>
               </a:tr>
-              <a:tr h="372793">
+              <a:tr h="346165">
                 <a:tc>
                   <a:txBody>
                     <a:bodyPr/>
                     <a:lstStyle/>
                     <a:p>
                       <a:r>
-                        <a:rPr sz="1250" b="0">
+                        <a:rPr sz="1150" b="0">
                           <a:solidFill>
                             <a:srgbClr val="002B55"/>
                           </a:solidFill>
@@ -6387,13 +7955,13 @@
                     <a:lstStyle/>
                     <a:p>
                       <a:r>
-                        <a:rPr sz="1250" b="0">
+                        <a:rPr sz="1150" b="0">
                           <a:solidFill>
                             <a:srgbClr val="002B55"/>
                           </a:solidFill>
                           <a:latin typeface="Arial"/>
                         </a:rPr>
-                        <a:t>1:30</a:t>
+                        <a:t>~1½</a:t>
                       </a:r>
                     </a:p>
                   </a:txBody>
@@ -6404,14 +7972,14 @@
                   </a:tcPr>
                 </a:tc>
               </a:tr>
-              <a:tr h="372793">
+              <a:tr h="346165">
                 <a:tc>
                   <a:txBody>
                     <a:bodyPr/>
                     <a:lstStyle/>
                     <a:p>
                       <a:r>
-                        <a:rPr sz="1250" b="0">
+                        <a:rPr sz="1150" b="0">
                           <a:solidFill>
                             <a:srgbClr val="002B55"/>
                           </a:solidFill>
@@ -6433,13 +8001,13 @@
                     <a:lstStyle/>
                     <a:p>
                       <a:r>
-                        <a:rPr sz="1250" b="0">
+                        <a:rPr sz="1150" b="0">
                           <a:solidFill>
                             <a:srgbClr val="002B55"/>
                           </a:solidFill>
                           <a:latin typeface="Arial"/>
                         </a:rPr>
-                        <a:t>2:00</a:t>
+                        <a:t>~2</a:t>
                       </a:r>
                     </a:p>
                   </a:txBody>
@@ -6450,14 +8018,14 @@
                   </a:tcPr>
                 </a:tc>
               </a:tr>
-              <a:tr h="372793">
+              <a:tr h="346165">
                 <a:tc>
                   <a:txBody>
                     <a:bodyPr/>
                     <a:lstStyle/>
                     <a:p>
                       <a:r>
-                        <a:rPr sz="1250" b="0">
+                        <a:rPr sz="1150" b="0">
                           <a:solidFill>
                             <a:srgbClr val="002B55"/>
                           </a:solidFill>
@@ -6479,13 +8047,13 @@
                     <a:lstStyle/>
                     <a:p>
                       <a:r>
-                        <a:rPr sz="1250" b="0">
+                        <a:rPr sz="1150" b="0">
                           <a:solidFill>
                             <a:srgbClr val="002B55"/>
                           </a:solidFill>
                           <a:latin typeface="Arial"/>
                         </a:rPr>
-                        <a:t>1:30</a:t>
+                        <a:t>~1½</a:t>
                       </a:r>
                     </a:p>
                   </a:txBody>
@@ -6496,14 +8064,14 @@
                   </a:tcPr>
                 </a:tc>
               </a:tr>
-              <a:tr h="372793">
+              <a:tr h="346165">
                 <a:tc>
                   <a:txBody>
                     <a:bodyPr/>
                     <a:lstStyle/>
                     <a:p>
                       <a:r>
-                        <a:rPr sz="1250" b="0">
+                        <a:rPr sz="1150" b="0">
                           <a:solidFill>
                             <a:srgbClr val="002B55"/>
                           </a:solidFill>
@@ -6525,13 +8093,13 @@
                     <a:lstStyle/>
                     <a:p>
                       <a:r>
-                        <a:rPr sz="1250" b="0">
+                        <a:rPr sz="1150" b="0">
                           <a:solidFill>
                             <a:srgbClr val="002B55"/>
                           </a:solidFill>
                           <a:latin typeface="Arial"/>
                         </a:rPr>
-                        <a:t>1:00</a:t>
+                        <a:t>~1</a:t>
                       </a:r>
                     </a:p>
                   </a:txBody>
@@ -6542,20 +8110,20 @@
                   </a:tcPr>
                 </a:tc>
               </a:tr>
-              <a:tr h="372793">
+              <a:tr h="346165">
                 <a:tc>
                   <a:txBody>
                     <a:bodyPr/>
                     <a:lstStyle/>
                     <a:p>
                       <a:r>
-                        <a:rPr sz="1250" b="0">
+                        <a:rPr sz="1150" b="0">
                           <a:solidFill>
                             <a:srgbClr val="002B55"/>
                           </a:solidFill>
                           <a:latin typeface="Arial"/>
                         </a:rPr>
-                        <a:t>7 Live demo</a:t>
+                        <a:t>7 LIVE DEMO (leave empty)</a:t>
                       </a:r>
                     </a:p>
                   </a:txBody>
@@ -6571,13 +8139,13 @@
                     <a:lstStyle/>
                     <a:p>
                       <a:r>
-                        <a:rPr sz="1250" b="0">
+                        <a:rPr sz="1150" b="0">
                           <a:solidFill>
                             <a:srgbClr val="002B55"/>
                           </a:solidFill>
                           <a:latin typeface="Arial"/>
                         </a:rPr>
-                        <a:t>4:00</a:t>
+                        <a:t>~4–5</a:t>
                       </a:r>
                     </a:p>
                   </a:txBody>
@@ -6588,20 +8156,20 @@
                   </a:tcPr>
                 </a:tc>
               </a:tr>
-              <a:tr h="372793">
+              <a:tr h="346165">
                 <a:tc>
                   <a:txBody>
                     <a:bodyPr/>
                     <a:lstStyle/>
                     <a:p>
                       <a:r>
-                        <a:rPr sz="1250" b="0">
+                        <a:rPr sz="1150" b="0">
                           <a:solidFill>
                             <a:srgbClr val="002B55"/>
                           </a:solidFill>
                           <a:latin typeface="Arial"/>
                         </a:rPr>
-                        <a:t>8 Impact</a:t>
+                        <a:t>8 Backup (only if demo fails)</a:t>
                       </a:r>
                     </a:p>
                   </a:txBody>
@@ -6617,13 +8185,13 @@
                     <a:lstStyle/>
                     <a:p>
                       <a:r>
-                        <a:rPr sz="1250" b="0">
+                        <a:rPr sz="1150" b="0">
                           <a:solidFill>
                             <a:srgbClr val="002B55"/>
                           </a:solidFill>
                           <a:latin typeface="Arial"/>
                         </a:rPr>
-                        <a:t>1:30</a:t>
+                        <a:t>0</a:t>
                       </a:r>
                     </a:p>
                   </a:txBody>
@@ -6634,20 +8202,20 @@
                   </a:tcPr>
                 </a:tc>
               </a:tr>
-              <a:tr h="372793">
+              <a:tr h="346165">
                 <a:tc>
                   <a:txBody>
                     <a:bodyPr/>
                     <a:lstStyle/>
                     <a:p>
                       <a:r>
-                        <a:rPr sz="1250" b="0">
+                        <a:rPr sz="1150" b="0">
                           <a:solidFill>
                             <a:srgbClr val="002B55"/>
                           </a:solidFill>
                           <a:latin typeface="Arial"/>
                         </a:rPr>
-                        <a:t>9 Risks &amp; guardrails</a:t>
+                        <a:t>9 Impact</a:t>
                       </a:r>
                     </a:p>
                   </a:txBody>
@@ -6663,13 +8231,13 @@
                     <a:lstStyle/>
                     <a:p>
                       <a:r>
-                        <a:rPr sz="1250" b="0">
+                        <a:rPr sz="1150" b="0">
                           <a:solidFill>
                             <a:srgbClr val="002B55"/>
                           </a:solidFill>
                           <a:latin typeface="Arial"/>
                         </a:rPr>
-                        <a:t>1:00</a:t>
+                        <a:t>~1½</a:t>
                       </a:r>
                     </a:p>
                   </a:txBody>
@@ -6680,20 +8248,20 @@
                   </a:tcPr>
                 </a:tc>
               </a:tr>
-              <a:tr h="372793">
+              <a:tr h="346165">
                 <a:tc>
                   <a:txBody>
                     <a:bodyPr/>
                     <a:lstStyle/>
                     <a:p>
                       <a:r>
-                        <a:rPr sz="1250" b="0">
+                        <a:rPr sz="1150" b="0">
                           <a:solidFill>
                             <a:srgbClr val="002B55"/>
                           </a:solidFill>
                           <a:latin typeface="Arial"/>
                         </a:rPr>
-                        <a:t>10 Efficiency vs Opportunity</a:t>
+                        <a:t>10 Risks &amp; guardrails</a:t>
                       </a:r>
                     </a:p>
                   </a:txBody>
@@ -6709,13 +8277,13 @@
                     <a:lstStyle/>
                     <a:p>
                       <a:r>
-                        <a:rPr sz="1250" b="0">
+                        <a:rPr sz="1150" b="0">
                           <a:solidFill>
                             <a:srgbClr val="002B55"/>
                           </a:solidFill>
                           <a:latin typeface="Arial"/>
                         </a:rPr>
-                        <a:t>1:00</a:t>
+                        <a:t>~1</a:t>
                       </a:r>
                     </a:p>
                   </a:txBody>
@@ -6726,20 +8294,20 @@
                   </a:tcPr>
                 </a:tc>
               </a:tr>
-              <a:tr h="372793">
+              <a:tr h="346165">
                 <a:tc>
                   <a:txBody>
                     <a:bodyPr/>
                     <a:lstStyle/>
                     <a:p>
                       <a:r>
-                        <a:rPr sz="1250" b="0">
+                        <a:rPr sz="1150" b="0">
                           <a:solidFill>
                             <a:srgbClr val="002B55"/>
                           </a:solidFill>
                           <a:latin typeface="Arial"/>
                         </a:rPr>
-                        <a:t>11 Next steps</a:t>
+                        <a:t>11 Efficiency vs Opportunity</a:t>
                       </a:r>
                     </a:p>
                   </a:txBody>
@@ -6755,13 +8323,13 @@
                     <a:lstStyle/>
                     <a:p>
                       <a:r>
-                        <a:rPr sz="1250" b="0">
+                        <a:rPr sz="1150" b="0">
                           <a:solidFill>
                             <a:srgbClr val="002B55"/>
                           </a:solidFill>
                           <a:latin typeface="Arial"/>
                         </a:rPr>
-                        <a:t>1:00</a:t>
+                        <a:t>~1</a:t>
                       </a:r>
                     </a:p>
                   </a:txBody>
@@ -6772,20 +8340,20 @@
                   </a:tcPr>
                 </a:tc>
               </a:tr>
-              <a:tr h="372804">
+              <a:tr h="346165">
                 <a:tc>
                   <a:txBody>
                     <a:bodyPr/>
                     <a:lstStyle/>
                     <a:p>
                       <a:r>
-                        <a:rPr sz="1250" b="0">
+                        <a:rPr sz="1150" b="0">
                           <a:solidFill>
                             <a:srgbClr val="002B55"/>
                           </a:solidFill>
                           <a:latin typeface="Arial"/>
                         </a:rPr>
-                        <a:t>12 Thank you + questions</a:t>
+                        <a:t>12 Next steps</a:t>
                       </a:r>
                     </a:p>
                   </a:txBody>
@@ -6801,13 +8369,13 @@
                     <a:lstStyle/>
                     <a:p>
                       <a:r>
-                        <a:rPr sz="1250" b="0">
+                        <a:rPr sz="1150" b="0">
                           <a:solidFill>
                             <a:srgbClr val="002B55"/>
                           </a:solidFill>
                           <a:latin typeface="Arial"/>
                         </a:rPr>
-                        <a:t>0:30 + a few min</a:t>
+                        <a:t>~1</a:t>
                       </a:r>
                     </a:p>
                   </a:txBody>
@@ -6818,6 +8386,52 @@
                   </a:tcPr>
                 </a:tc>
               </a:tr>
+              <a:tr h="346175">
+                <a:tc>
+                  <a:txBody>
+                    <a:bodyPr/>
+                    <a:lstStyle/>
+                    <a:p>
+                      <a:r>
+                        <a:rPr sz="1150" b="0">
+                          <a:solidFill>
+                            <a:srgbClr val="002B55"/>
+                          </a:solidFill>
+                          <a:latin typeface="Arial"/>
+                        </a:rPr>
+                        <a:t>13 Thank you + questions</a:t>
+                      </a:r>
+                    </a:p>
+                  </a:txBody>
+                  <a:tcPr marT="27432" marB="27432">
+                    <a:solidFill>
+                      <a:srgbClr val="FFFFFF"/>
+                    </a:solidFill>
+                  </a:tcPr>
+                </a:tc>
+                <a:tc>
+                  <a:txBody>
+                    <a:bodyPr/>
+                    <a:lstStyle/>
+                    <a:p>
+                      <a:r>
+                        <a:rPr sz="1150" b="0">
+                          <a:solidFill>
+                            <a:srgbClr val="002B55"/>
+                          </a:solidFill>
+                          <a:latin typeface="Arial"/>
+                        </a:rPr>
+                        <a:t>~2–3</a:t>
+                      </a:r>
+                    </a:p>
+                  </a:txBody>
+                  <a:tcPr marT="27432" marB="27432">
+                    <a:solidFill>
+                      <a:srgbClr val="FFFFFF"/>
+                    </a:solidFill>
+                  </a:tcPr>
+                </a:tc>
+              </a:tr>
             </a:tbl>
           </a:graphicData>
         </a:graphic>
@@ -7116,7 +8730,7 @@
                 </a:solidFill>
                 <a:latin typeface="Arial"/>
               </a:rPr>
-              <a:t>Numbers are team estimates. Say so out loud.</a:t>
+              <a:t>Numbers are the team's own estimates. Never invent them.</a:t>
             </a:r>
           </a:p>
         </p:txBody>
@@ -7130,6 +8744,94 @@
         <p:spPr>
           <a:xfrm>
             <a:off x="6217920" y="3675887"/>
+            <a:ext cx="329184" cy="329184"/>
+          </a:xfrm>
+          <a:prstGeom prst="ellipse">
+            <a:avLst/>
+          </a:prstGeom>
+          <a:solidFill>
+            <a:srgbClr val="007879"/>
+          </a:solidFill>
+          <a:ln>
+            <a:noFill/>
+          </a:ln>
+          <a:effectLst/>
+        </p:spPr>
+        <p:style>
+          <a:lnRef idx="1">
+            <a:schemeClr val="accent1"/>
+          </a:lnRef>
+          <a:fillRef idx="3">
+            <a:schemeClr val="accent1"/>
+          </a:fillRef>
+          <a:effectRef idx="2">
+            <a:schemeClr val="accent1"/>
+          </a:effectRef>
+          <a:fontRef idx="minor">
+            <a:schemeClr val="lt1"/>
+          </a:fontRef>
+        </p:style>
+        <p:txBody>
+          <a:bodyPr rtlCol="0" anchor="ctr" wrap="square" lIns="0" rIns="0" tIns="36576" bIns="36576"/>
+          <a:lstStyle/>
+          <a:p>
+            <a:pPr algn="ctr"/>
+            <a:r>
+              <a:rPr sz="1100" b="1" i="0">
+                <a:solidFill>
+                  <a:srgbClr val="FFFFFF"/>
+                </a:solidFill>
+                <a:latin typeface="Bahnschrift"/>
+              </a:rPr>
+              <a:t>4</a:t>
+            </a:r>
+          </a:p>
+        </p:txBody>
+      </p:sp>
+      <p:sp>
+        <p:nvSpPr>
+          <p:cNvPr id="14" name="TextBox 13"/>
+          <p:cNvSpPr txBox="1"/>
+          <p:nvPr/>
+        </p:nvSpPr>
+        <p:spPr>
+          <a:xfrm>
+            <a:off x="6675120" y="3602736"/>
+            <a:ext cx="4937760" cy="548640"/>
+          </a:xfrm>
+          <a:prstGeom prst="rect">
+            <a:avLst/>
+          </a:prstGeom>
+          <a:noFill/>
+        </p:spPr>
+        <p:txBody>
+          <a:bodyPr wrap="square" lIns="36576" rIns="36576" tIns="18288" bIns="18288" anchor="ctr">
+            <a:spAutoFit/>
+          </a:bodyPr>
+          <a:lstStyle/>
+          <a:p>
+            <a:pPr algn="l"/>
+            <a:r>
+              <a:rPr sz="1400" b="0" i="0">
+                <a:solidFill>
+                  <a:srgbClr val="002B55"/>
+                </a:solidFill>
+                <a:latin typeface="Arial"/>
+              </a:rPr>
+              <a:t>Mark practice data as fictional (Nordvant Biopharma).</a:t>
+            </a:r>
+          </a:p>
+        </p:txBody>
+      </p:sp>
+      <p:sp>
+        <p:nvSpPr>
+          <p:cNvPr id="15" name="Oval 14"/>
+          <p:cNvSpPr/>
+          <p:nvPr/>
+        </p:nvSpPr>
+        <p:spPr>
+          <a:xfrm>
+            <a:off x="6217920" y="4297680"/>
             <a:ext cx="329184" cy="329184"/>
           </a:xfrm>
           <a:prstGeom prst="ellipse">
@@ -7169,20 +8871,20 @@
                 </a:solidFill>
                 <a:latin typeface="Bahnschrift"/>
               </a:rPr>
-              <a:t>4</a:t>
-            </a:r>
-          </a:p>
-        </p:txBody>
-      </p:sp>
-      <p:sp>
-        <p:nvSpPr>
-          <p:cNvPr id="14" name="TextBox 13"/>
+              <a:t>5</a:t>
+            </a:r>
+          </a:p>
+        </p:txBody>
+      </p:sp>
+      <p:sp>
+        <p:nvSpPr>
+          <p:cNvPr id="16" name="TextBox 15"/>
           <p:cNvSpPr txBox="1"/>
           <p:nvPr/>
         </p:nvSpPr>
         <p:spPr>
           <a:xfrm>
-            <a:off x="6675120" y="3602736"/>
+            <a:off x="6675120" y="4224528"/>
             <a:ext cx="4937760" cy="548640"/>
           </a:xfrm>
           <a:prstGeom prst="rect">
@@ -7204,20 +8906,20 @@
                 </a:solidFill>
                 <a:latin typeface="Arial"/>
               </a:rPr>
-              <a:t>Mark practice data as fictional (Nordvant Biopharma).</a:t>
-            </a:r>
-          </a:p>
-        </p:txBody>
-      </p:sp>
-      <p:sp>
-        <p:nvSpPr>
-          <p:cNvPr id="15" name="Oval 14"/>
+              <a:t>Slide 7 LIVE DEMO stays empty: run the demo there.</a:t>
+            </a:r>
+          </a:p>
+        </p:txBody>
+      </p:sp>
+      <p:sp>
+        <p:nvSpPr>
+          <p:cNvPr id="17" name="Oval 16"/>
           <p:cNvSpPr/>
           <p:nvPr/>
         </p:nvSpPr>
         <p:spPr>
           <a:xfrm>
-            <a:off x="6217920" y="4297680"/>
+            <a:off x="6217920" y="4919472"/>
             <a:ext cx="329184" cy="329184"/>
           </a:xfrm>
           <a:prstGeom prst="ellipse">
@@ -7257,20 +8959,20 @@
                 </a:solidFill>
                 <a:latin typeface="Bahnschrift"/>
               </a:rPr>
-              <a:t>5</a:t>
-            </a:r>
-          </a:p>
-        </p:txBody>
-      </p:sp>
-      <p:sp>
-        <p:nvSpPr>
-          <p:cNvPr id="16" name="TextBox 15"/>
+              <a:t>6</a:t>
+            </a:r>
+          </a:p>
+        </p:txBody>
+      </p:sp>
+      <p:sp>
+        <p:nvSpPr>
+          <p:cNvPr id="18" name="TextBox 17"/>
           <p:cNvSpPr txBox="1"/>
           <p:nvPr/>
         </p:nvSpPr>
         <p:spPr>
           <a:xfrm>
-            <a:off x="6675120" y="4224528"/>
+            <a:off x="6675120" y="4846320"/>
             <a:ext cx="4937760" cy="548640"/>
           </a:xfrm>
           <a:prstGeom prst="rect">
@@ -7299,13 +9001,13 @@
       </p:sp>
       <p:sp>
         <p:nvSpPr>
-          <p:cNvPr id="17" name="Oval 16"/>
+          <p:cNvPr id="19" name="Oval 18"/>
           <p:cNvSpPr/>
           <p:nvPr/>
         </p:nvSpPr>
         <p:spPr>
           <a:xfrm>
-            <a:off x="6217920" y="4919472"/>
+            <a:off x="6217920" y="5541264"/>
             <a:ext cx="329184" cy="329184"/>
           </a:xfrm>
           <a:prstGeom prst="ellipse">
@@ -7345,20 +9047,20 @@
                 </a:solidFill>
                 <a:latin typeface="Bahnschrift"/>
               </a:rPr>
-              <a:t>6</a:t>
-            </a:r>
-          </a:p>
-        </p:txBody>
-      </p:sp>
-      <p:sp>
-        <p:nvSpPr>
-          <p:cNvPr id="18" name="TextBox 17"/>
+              <a:t>7</a:t>
+            </a:r>
+          </a:p>
+        </p:txBody>
+      </p:sp>
+      <p:sp>
+        <p:nvSpPr>
+          <p:cNvPr id="20" name="TextBox 19"/>
           <p:cNvSpPr txBox="1"/>
           <p:nvPr/>
         </p:nvSpPr>
         <p:spPr>
           <a:xfrm>
-            <a:off x="6675120" y="4846320"/>
+            <a:off x="6675120" y="5468112"/>
             <a:ext cx="4937760" cy="548640"/>
           </a:xfrm>
           <a:prstGeom prst="rect">
@@ -7380,95 +9082,7 @@
                 </a:solidFill>
                 <a:latin typeface="Arial"/>
               </a:rPr>
-              <a:t>Rehearse once: about 20 minutes, including a few questions.</a:t>
-            </a:r>
-          </a:p>
-        </p:txBody>
-      </p:sp>
-      <p:sp>
-        <p:nvSpPr>
-          <p:cNvPr id="19" name="Oval 18"/>
-          <p:cNvSpPr/>
-          <p:nvPr/>
-        </p:nvSpPr>
-        <p:spPr>
-          <a:xfrm>
-            <a:off x="6217920" y="5541264"/>
-            <a:ext cx="329184" cy="329184"/>
-          </a:xfrm>
-          <a:prstGeom prst="ellipse">
-            <a:avLst/>
-          </a:prstGeom>
-          <a:solidFill>
-            <a:srgbClr val="007879"/>
-          </a:solidFill>
-          <a:ln>
-            <a:noFill/>
-          </a:ln>
-          <a:effectLst/>
-        </p:spPr>
-        <p:style>
-          <a:lnRef idx="1">
-            <a:schemeClr val="accent1"/>
-          </a:lnRef>
-          <a:fillRef idx="3">
-            <a:schemeClr val="accent1"/>
-          </a:fillRef>
-          <a:effectRef idx="2">
-            <a:schemeClr val="accent1"/>
-          </a:effectRef>
-          <a:fontRef idx="minor">
-            <a:schemeClr val="lt1"/>
-          </a:fontRef>
-        </p:style>
-        <p:txBody>
-          <a:bodyPr rtlCol="0" anchor="ctr" wrap="square" lIns="0" rIns="0" tIns="36576" bIns="36576"/>
-          <a:lstStyle/>
-          <a:p>
-            <a:pPr algn="ctr"/>
-            <a:r>
-              <a:rPr sz="1100" b="1" i="0">
-                <a:solidFill>
-                  <a:srgbClr val="FFFFFF"/>
-                </a:solidFill>
-                <a:latin typeface="Bahnschrift"/>
-              </a:rPr>
-              <a:t>7</a:t>
-            </a:r>
-          </a:p>
-        </p:txBody>
-      </p:sp>
-      <p:sp>
-        <p:nvSpPr>
-          <p:cNvPr id="20" name="TextBox 19"/>
-          <p:cNvSpPr txBox="1"/>
-          <p:nvPr/>
-        </p:nvSpPr>
-        <p:spPr>
-          <a:xfrm>
-            <a:off x="6675120" y="5468112"/>
-            <a:ext cx="4937760" cy="548640"/>
-          </a:xfrm>
-          <a:prstGeom prst="rect">
-            <a:avLst/>
-          </a:prstGeom>
-          <a:noFill/>
-        </p:spPr>
-        <p:txBody>
-          <a:bodyPr wrap="square" lIns="36576" rIns="36576" tIns="18288" bIns="18288" anchor="ctr">
-            <a:spAutoFit/>
-          </a:bodyPr>
-          <a:lstStyle/>
-          <a:p>
-            <a:pPr algn="l"/>
-            <a:r>
-              <a:rPr sz="1400" b="0" i="0">
-                <a:solidFill>
-                  <a:srgbClr val="002B55"/>
-                </a:solidFill>
-                <a:latin typeface="Arial"/>
-              </a:rPr>
-              <a:t>Speaker notes on every slide say what to fill in.</a:t>
+              <a:t>About 20 minutes, give or take. Rehearse once.</a:t>
             </a:r>
           </a:p>
         </p:txBody>
@@ -13967,7 +15581,7 @@
 
 <file path=ppt/slides/slide7.xml><?xml version="1.0" encoding="utf-8"?>
 <p:sld xmlns:a="http://schemas.openxmlformats.org/drawingml/2006/main" xmlns:p="http://schemas.openxmlformats.org/presentationml/2006/main" xmlns:r="http://schemas.openxmlformats.org/officeDocument/2006/relationships">
-  <p:cSld>
+  <p:cSld name="LIVE DEMO — leave empty">
     <p:bg>
       <p:bgPr>
         <a:solidFill>
@@ -13991,41 +15605,6 @@
         </p:nvSpPr>
         <p:spPr>
           <a:xfrm>
-            <a:off x="612648" y="365760"/>
-            <a:ext cx="10972800" cy="777240"/>
-          </a:xfrm>
-          <a:prstGeom prst="rect">
-            <a:avLst/>
-          </a:prstGeom>
-          <a:noFill/>
-        </p:spPr>
-        <p:txBody>
-          <a:bodyPr wrap="square" lIns="36576" rIns="36576" tIns="18288" bIns="18288" anchor="ctr">
-            <a:spAutoFit/>
-          </a:bodyPr>
-          <a:lstStyle/>
-          <a:p>
-            <a:pPr algn="l"/>
-            <a:r>
-              <a:rPr sz="3000" b="1" i="0">
-                <a:solidFill>
-                  <a:srgbClr val="002B55"/>
-                </a:solidFill>
-                <a:latin typeface="Bahnschrift"/>
-              </a:rPr>
-              <a:t>Live: watch the swarm run</a:t>
-            </a:r>
-          </a:p>
-        </p:txBody>
-      </p:sp>
-      <p:sp>
-        <p:nvSpPr>
-          <p:cNvPr id="3" name="TextBox 2"/>
-          <p:cNvSpPr txBox="1"/>
-          <p:nvPr/>
-        </p:nvSpPr>
-        <p:spPr>
-          <a:xfrm>
             <a:off x="612648" y="6437376"/>
             <a:ext cx="5715000" cy="219456"/>
           </a:xfrm>
@@ -14055,7 +15634,7 @@
       </p:sp>
       <p:sp>
         <p:nvSpPr>
-          <p:cNvPr id="4" name="TextBox 3"/>
+          <p:cNvPr id="3" name="TextBox 2"/>
           <p:cNvSpPr txBox="1"/>
           <p:nvPr/>
         </p:nvSpPr>
@@ -14090,28 +15669,27 @@
       </p:sp>
       <p:sp>
         <p:nvSpPr>
-          <p:cNvPr id="5" name="Rounded Rectangle 4"/>
+          <p:cNvPr id="4" name="LIVE DEMO — leave empty" descr="LIVE DEMO — leave empty. Empty stage for the live swarm run. Agents: do not add content here."/>
           <p:cNvSpPr/>
           <p:nvPr/>
         </p:nvSpPr>
         <p:spPr>
           <a:xfrm>
-            <a:off x="612648" y="1325880"/>
-            <a:ext cx="3383280" cy="4069080"/>
+            <a:off x="612648" y="502920"/>
+            <a:ext cx="10972800" cy="5715000"/>
           </a:xfrm>
           <a:prstGeom prst="roundRect">
             <a:avLst>
-              <a:gd name="adj" fmla="val 4000"/>
+              <a:gd name="adj" fmla="val 3000"/>
             </a:avLst>
           </a:prstGeom>
           <a:solidFill>
             <a:srgbClr val="FFFFFF"/>
           </a:solidFill>
-          <a:ln w="15875">
+          <a:ln w="19050">
             <a:solidFill>
-              <a:srgbClr val="8A9BAA"/>
+              <a:srgbClr val="B9D9D6"/>
             </a:solidFill>
-            <a:prstDash val="dash"/>
           </a:ln>
           <a:effectLst/>
         </p:spPr>
@@ -14134,490 +15712,19 @@
           <a:lstStyle/>
           <a:p>
             <a:pPr algn="ctr"/>
-            <a:r>
-              <a:rPr sz="1400" b="0" i="0">
-                <a:solidFill>
-                  <a:srgbClr val="8A9BAA"/>
-                </a:solidFill>
-                <a:latin typeface="Arial"/>
-              </a:rPr>
-              <a:t>[Screenshot 1: the assignment + the agent's plan]</a:t>
-            </a:r>
-          </a:p>
-        </p:txBody>
-      </p:sp>
-      <p:sp>
-        <p:nvSpPr>
-          <p:cNvPr id="6" name="Rounded Rectangle 5"/>
+          </a:p>
+        </p:txBody>
+      </p:sp>
+      <p:sp>
+        <p:nvSpPr>
+          <p:cNvPr id="5" name="Oval 4" descr="LIVE DEMO — leave empty"/>
           <p:cNvSpPr/>
           <p:nvPr/>
         </p:nvSpPr>
         <p:spPr>
           <a:xfrm>
-            <a:off x="4178808" y="1325880"/>
-            <a:ext cx="3383280" cy="4069080"/>
-          </a:xfrm>
-          <a:prstGeom prst="roundRect">
-            <a:avLst>
-              <a:gd name="adj" fmla="val 4000"/>
-            </a:avLst>
-          </a:prstGeom>
-          <a:solidFill>
-            <a:srgbClr val="FFFFFF"/>
-          </a:solidFill>
-          <a:ln w="15875">
-            <a:solidFill>
-              <a:srgbClr val="8A9BAA"/>
-            </a:solidFill>
-            <a:prstDash val="dash"/>
-          </a:ln>
-          <a:effectLst/>
-        </p:spPr>
-        <p:style>
-          <a:lnRef idx="1">
-            <a:schemeClr val="accent1"/>
-          </a:lnRef>
-          <a:fillRef idx="3">
-            <a:schemeClr val="accent1"/>
-          </a:fillRef>
-          <a:effectRef idx="2">
-            <a:schemeClr val="accent1"/>
-          </a:effectRef>
-          <a:fontRef idx="minor">
-            <a:schemeClr val="lt1"/>
-          </a:fontRef>
-        </p:style>
-        <p:txBody>
-          <a:bodyPr rtlCol="0" anchor="ctr" wrap="square" lIns="73152" rIns="73152" tIns="36576" bIns="36576"/>
-          <a:lstStyle/>
-          <a:p>
-            <a:pPr algn="ctr"/>
-            <a:r>
-              <a:rPr sz="1400" b="0" i="0">
-                <a:solidFill>
-                  <a:srgbClr val="8A9BAA"/>
-                </a:solidFill>
-                <a:latin typeface="Arial"/>
-              </a:rPr>
-              <a:t>[Screenshot 2: sub-agent outputs / final deliverable]</a:t>
-            </a:r>
-          </a:p>
-        </p:txBody>
-      </p:sp>
-      <p:sp>
-        <p:nvSpPr>
-          <p:cNvPr id="7" name="TextBox 6"/>
-          <p:cNvSpPr txBox="1"/>
-          <p:nvPr/>
-        </p:nvSpPr>
-        <p:spPr>
-          <a:xfrm>
-            <a:off x="7863840" y="1280160"/>
-            <a:ext cx="3657600" cy="365760"/>
-          </a:xfrm>
-          <a:prstGeom prst="rect">
-            <a:avLst/>
-          </a:prstGeom>
-          <a:noFill/>
-        </p:spPr>
-        <p:txBody>
-          <a:bodyPr wrap="square" lIns="36576" rIns="36576" tIns="18288" bIns="18288" anchor="t">
-            <a:spAutoFit/>
-          </a:bodyPr>
-          <a:lstStyle/>
-          <a:p>
-            <a:pPr algn="l"/>
-            <a:r>
-              <a:rPr sz="1300" b="1" i="0">
-                <a:solidFill>
-                  <a:srgbClr val="007879"/>
-                </a:solidFill>
-                <a:latin typeface="Bahnschrift"/>
-              </a:rPr>
-              <a:t>RUN OF SHOW · 4 MIN</a:t>
-            </a:r>
-          </a:p>
-        </p:txBody>
-      </p:sp>
-      <p:sp>
-        <p:nvSpPr>
-          <p:cNvPr id="8" name="Oval 7"/>
-          <p:cNvSpPr/>
-          <p:nvPr/>
-        </p:nvSpPr>
-        <p:spPr>
-          <a:xfrm>
-            <a:off x="7863840" y="1737360"/>
-            <a:ext cx="566928" cy="566928"/>
-          </a:xfrm>
-          <a:prstGeom prst="ellipse">
-            <a:avLst/>
-          </a:prstGeom>
-          <a:solidFill>
-            <a:srgbClr val="007879"/>
-          </a:solidFill>
-          <a:ln>
-            <a:noFill/>
-          </a:ln>
-          <a:effectLst/>
-        </p:spPr>
-        <p:style>
-          <a:lnRef idx="1">
-            <a:schemeClr val="accent1"/>
-          </a:lnRef>
-          <a:fillRef idx="3">
-            <a:schemeClr val="accent1"/>
-          </a:fillRef>
-          <a:effectRef idx="2">
-            <a:schemeClr val="accent1"/>
-          </a:effectRef>
-          <a:fontRef idx="minor">
-            <a:schemeClr val="lt1"/>
-          </a:fontRef>
-        </p:style>
-        <p:txBody>
-          <a:bodyPr rtlCol="0" anchor="ctr" wrap="square" lIns="0" rIns="0" tIns="36576" bIns="36576"/>
-          <a:lstStyle/>
-          <a:p>
-            <a:pPr algn="ctr"/>
-            <a:r>
-              <a:rPr sz="1600" b="1" i="0">
-                <a:solidFill>
-                  <a:srgbClr val="FFFFFF"/>
-                </a:solidFill>
-                <a:latin typeface="Bahnschrift"/>
-              </a:rPr>
-              <a:t>1</a:t>
-            </a:r>
-          </a:p>
-        </p:txBody>
-      </p:sp>
-      <p:sp>
-        <p:nvSpPr>
-          <p:cNvPr id="9" name="TextBox 8"/>
-          <p:cNvSpPr txBox="1"/>
-          <p:nvPr/>
-        </p:nvSpPr>
-        <p:spPr>
-          <a:xfrm>
-            <a:off x="8549640" y="1719072"/>
-            <a:ext cx="3063240" cy="237744"/>
-          </a:xfrm>
-          <a:prstGeom prst="rect">
-            <a:avLst/>
-          </a:prstGeom>
-          <a:noFill/>
-        </p:spPr>
-        <p:txBody>
-          <a:bodyPr wrap="square" lIns="36576" rIns="36576" tIns="18288" bIns="18288" anchor="t">
-            <a:spAutoFit/>
-          </a:bodyPr>
-          <a:lstStyle/>
-          <a:p>
-            <a:pPr algn="l"/>
-            <a:r>
-              <a:rPr sz="1100" b="1" i="0">
-                <a:solidFill>
-                  <a:srgbClr val="8A9BAA"/>
-                </a:solidFill>
-                <a:latin typeface="Arial"/>
-              </a:rPr>
-              <a:t>0:00</a:t>
-            </a:r>
-          </a:p>
-        </p:txBody>
-      </p:sp>
-      <p:sp>
-        <p:nvSpPr>
-          <p:cNvPr id="10" name="TextBox 9"/>
-          <p:cNvSpPr txBox="1"/>
-          <p:nvPr/>
-        </p:nvSpPr>
-        <p:spPr>
-          <a:xfrm>
-            <a:off x="8549640" y="1965960"/>
-            <a:ext cx="3063240" cy="411480"/>
-          </a:xfrm>
-          <a:prstGeom prst="rect">
-            <a:avLst/>
-          </a:prstGeom>
-          <a:noFill/>
-        </p:spPr>
-        <p:txBody>
-          <a:bodyPr wrap="square" lIns="36576" rIns="36576" tIns="18288" bIns="18288" anchor="t">
-            <a:spAutoFit/>
-          </a:bodyPr>
-          <a:lstStyle/>
-          <a:p>
-            <a:pPr algn="l"/>
-            <a:r>
-              <a:rPr sz="1300" b="1" i="0">
-                <a:solidFill>
-                  <a:srgbClr val="002B55"/>
-                </a:solidFill>
-                <a:latin typeface="Arial"/>
-              </a:rPr>
-              <a:t>[Show the assignment we gave]</a:t>
-            </a:r>
-          </a:p>
-        </p:txBody>
-      </p:sp>
-      <p:sp>
-        <p:nvSpPr>
-          <p:cNvPr id="11" name="Oval 10"/>
-          <p:cNvSpPr/>
-          <p:nvPr/>
-        </p:nvSpPr>
-        <p:spPr>
-          <a:xfrm>
-            <a:off x="7863840" y="2487168"/>
-            <a:ext cx="566928" cy="566928"/>
-          </a:xfrm>
-          <a:prstGeom prst="ellipse">
-            <a:avLst/>
-          </a:prstGeom>
-          <a:solidFill>
-            <a:srgbClr val="007879"/>
-          </a:solidFill>
-          <a:ln>
-            <a:noFill/>
-          </a:ln>
-          <a:effectLst/>
-        </p:spPr>
-        <p:style>
-          <a:lnRef idx="1">
-            <a:schemeClr val="accent1"/>
-          </a:lnRef>
-          <a:fillRef idx="3">
-            <a:schemeClr val="accent1"/>
-          </a:fillRef>
-          <a:effectRef idx="2">
-            <a:schemeClr val="accent1"/>
-          </a:effectRef>
-          <a:fontRef idx="minor">
-            <a:schemeClr val="lt1"/>
-          </a:fontRef>
-        </p:style>
-        <p:txBody>
-          <a:bodyPr rtlCol="0" anchor="ctr" wrap="square" lIns="0" rIns="0" tIns="36576" bIns="36576"/>
-          <a:lstStyle/>
-          <a:p>
-            <a:pPr algn="ctr"/>
-            <a:r>
-              <a:rPr sz="1600" b="1" i="0">
-                <a:solidFill>
-                  <a:srgbClr val="FFFFFF"/>
-                </a:solidFill>
-                <a:latin typeface="Bahnschrift"/>
-              </a:rPr>
-              <a:t>2</a:t>
-            </a:r>
-          </a:p>
-        </p:txBody>
-      </p:sp>
-      <p:sp>
-        <p:nvSpPr>
-          <p:cNvPr id="12" name="TextBox 11"/>
-          <p:cNvSpPr txBox="1"/>
-          <p:nvPr/>
-        </p:nvSpPr>
-        <p:spPr>
-          <a:xfrm>
-            <a:off x="8549640" y="2468879"/>
-            <a:ext cx="3063240" cy="237744"/>
-          </a:xfrm>
-          <a:prstGeom prst="rect">
-            <a:avLst/>
-          </a:prstGeom>
-          <a:noFill/>
-        </p:spPr>
-        <p:txBody>
-          <a:bodyPr wrap="square" lIns="36576" rIns="36576" tIns="18288" bIns="18288" anchor="t">
-            <a:spAutoFit/>
-          </a:bodyPr>
-          <a:lstStyle/>
-          <a:p>
-            <a:pPr algn="l"/>
-            <a:r>
-              <a:rPr sz="1100" b="1" i="0">
-                <a:solidFill>
-                  <a:srgbClr val="8A9BAA"/>
-                </a:solidFill>
-                <a:latin typeface="Arial"/>
-              </a:rPr>
-              <a:t>0:45</a:t>
-            </a:r>
-          </a:p>
-        </p:txBody>
-      </p:sp>
-      <p:sp>
-        <p:nvSpPr>
-          <p:cNvPr id="13" name="TextBox 12"/>
-          <p:cNvSpPr txBox="1"/>
-          <p:nvPr/>
-        </p:nvSpPr>
-        <p:spPr>
-          <a:xfrm>
-            <a:off x="8549640" y="2715768"/>
-            <a:ext cx="3063240" cy="411480"/>
-          </a:xfrm>
-          <a:prstGeom prst="rect">
-            <a:avLst/>
-          </a:prstGeom>
-          <a:noFill/>
-        </p:spPr>
-        <p:txBody>
-          <a:bodyPr wrap="square" lIns="36576" rIns="36576" tIns="18288" bIns="18288" anchor="t">
-            <a:spAutoFit/>
-          </a:bodyPr>
-          <a:lstStyle/>
-          <a:p>
-            <a:pPr algn="l"/>
-            <a:r>
-              <a:rPr sz="1300" b="1" i="0">
-                <a:solidFill>
-                  <a:srgbClr val="002B55"/>
-                </a:solidFill>
-                <a:latin typeface="Arial"/>
-              </a:rPr>
-              <a:t>[Lead agent plans and splits]</a:t>
-            </a:r>
-          </a:p>
-        </p:txBody>
-      </p:sp>
-      <p:sp>
-        <p:nvSpPr>
-          <p:cNvPr id="14" name="Oval 13"/>
-          <p:cNvSpPr/>
-          <p:nvPr/>
-        </p:nvSpPr>
-        <p:spPr>
-          <a:xfrm>
-            <a:off x="7863840" y="3236976"/>
-            <a:ext cx="566928" cy="566928"/>
-          </a:xfrm>
-          <a:prstGeom prst="ellipse">
-            <a:avLst/>
-          </a:prstGeom>
-          <a:solidFill>
-            <a:srgbClr val="007879"/>
-          </a:solidFill>
-          <a:ln>
-            <a:noFill/>
-          </a:ln>
-          <a:effectLst/>
-        </p:spPr>
-        <p:style>
-          <a:lnRef idx="1">
-            <a:schemeClr val="accent1"/>
-          </a:lnRef>
-          <a:fillRef idx="3">
-            <a:schemeClr val="accent1"/>
-          </a:fillRef>
-          <a:effectRef idx="2">
-            <a:schemeClr val="accent1"/>
-          </a:effectRef>
-          <a:fontRef idx="minor">
-            <a:schemeClr val="lt1"/>
-          </a:fontRef>
-        </p:style>
-        <p:txBody>
-          <a:bodyPr rtlCol="0" anchor="ctr" wrap="square" lIns="0" rIns="0" tIns="36576" bIns="36576"/>
-          <a:lstStyle/>
-          <a:p>
-            <a:pPr algn="ctr"/>
-            <a:r>
-              <a:rPr sz="1600" b="1" i="0">
-                <a:solidFill>
-                  <a:srgbClr val="FFFFFF"/>
-                </a:solidFill>
-                <a:latin typeface="Bahnschrift"/>
-              </a:rPr>
-              <a:t>3</a:t>
-            </a:r>
-          </a:p>
-        </p:txBody>
-      </p:sp>
-      <p:sp>
-        <p:nvSpPr>
-          <p:cNvPr id="15" name="TextBox 14"/>
-          <p:cNvSpPr txBox="1"/>
-          <p:nvPr/>
-        </p:nvSpPr>
-        <p:spPr>
-          <a:xfrm>
-            <a:off x="8549640" y="3218688"/>
-            <a:ext cx="3063240" cy="237744"/>
-          </a:xfrm>
-          <a:prstGeom prst="rect">
-            <a:avLst/>
-          </a:prstGeom>
-          <a:noFill/>
-        </p:spPr>
-        <p:txBody>
-          <a:bodyPr wrap="square" lIns="36576" rIns="36576" tIns="18288" bIns="18288" anchor="t">
-            <a:spAutoFit/>
-          </a:bodyPr>
-          <a:lstStyle/>
-          <a:p>
-            <a:pPr algn="l"/>
-            <a:r>
-              <a:rPr sz="1100" b="1" i="0">
-                <a:solidFill>
-                  <a:srgbClr val="8A9BAA"/>
-                </a:solidFill>
-                <a:latin typeface="Arial"/>
-              </a:rPr>
-              <a:t>1:30</a:t>
-            </a:r>
-          </a:p>
-        </p:txBody>
-      </p:sp>
-      <p:sp>
-        <p:nvSpPr>
-          <p:cNvPr id="16" name="TextBox 15"/>
-          <p:cNvSpPr txBox="1"/>
-          <p:nvPr/>
-        </p:nvSpPr>
-        <p:spPr>
-          <a:xfrm>
-            <a:off x="8549640" y="3465576"/>
-            <a:ext cx="3063240" cy="411480"/>
-          </a:xfrm>
-          <a:prstGeom prst="rect">
-            <a:avLst/>
-          </a:prstGeom>
-          <a:noFill/>
-        </p:spPr>
-        <p:txBody>
-          <a:bodyPr wrap="square" lIns="36576" rIns="36576" tIns="18288" bIns="18288" anchor="t">
-            <a:spAutoFit/>
-          </a:bodyPr>
-          <a:lstStyle/>
-          <a:p>
-            <a:pPr algn="l"/>
-            <a:r>
-              <a:rPr sz="1300" b="1" i="0">
-                <a:solidFill>
-                  <a:srgbClr val="002B55"/>
-                </a:solidFill>
-                <a:latin typeface="Arial"/>
-              </a:rPr>
-              <a:t>[Sub-agents work and hand off]</a:t>
-            </a:r>
-          </a:p>
-        </p:txBody>
-      </p:sp>
-      <p:sp>
-        <p:nvSpPr>
-          <p:cNvPr id="17" name="Oval 16"/>
-          <p:cNvSpPr/>
-          <p:nvPr/>
-        </p:nvSpPr>
-        <p:spPr>
-          <a:xfrm>
-            <a:off x="7863840" y="3986783"/>
-            <a:ext cx="566928" cy="566928"/>
+            <a:off x="960120" y="896112"/>
+            <a:ext cx="146304" cy="146304"/>
           </a:xfrm>
           <a:prstGeom prst="ellipse">
             <a:avLst/>
@@ -14649,28 +15756,19 @@
           <a:lstStyle/>
           <a:p>
             <a:pPr algn="ctr"/>
-            <a:r>
-              <a:rPr sz="1600" b="1" i="0">
-                <a:solidFill>
-                  <a:srgbClr val="FFFFFF"/>
-                </a:solidFill>
-                <a:latin typeface="Bahnschrift"/>
-              </a:rPr>
-              <a:t>4</a:t>
-            </a:r>
-          </a:p>
-        </p:txBody>
-      </p:sp>
-      <p:sp>
-        <p:nvSpPr>
-          <p:cNvPr id="18" name="TextBox 17"/>
+          </a:p>
+        </p:txBody>
+      </p:sp>
+      <p:sp>
+        <p:nvSpPr>
+          <p:cNvPr id="6" name="LIVE DEMO label" descr="LIVE DEMO — leave empty"/>
           <p:cNvSpPr txBox="1"/>
           <p:nvPr/>
         </p:nvSpPr>
         <p:spPr>
           <a:xfrm>
-            <a:off x="8549640" y="3968496"/>
-            <a:ext cx="3063240" cy="237744"/>
+            <a:off x="1188720" y="786384"/>
+            <a:ext cx="2743200" cy="365760"/>
           </a:xfrm>
           <a:prstGeom prst="rect">
             <a:avLst/>
@@ -14678,34 +15776,34 @@
           <a:noFill/>
         </p:spPr>
         <p:txBody>
-          <a:bodyPr wrap="square" lIns="36576" rIns="36576" tIns="18288" bIns="18288" anchor="t">
+          <a:bodyPr wrap="square" lIns="36576" rIns="36576" tIns="18288" bIns="18288" anchor="ctr">
             <a:spAutoFit/>
           </a:bodyPr>
           <a:lstStyle/>
           <a:p>
             <a:pPr algn="l"/>
             <a:r>
-              <a:rPr sz="1100" b="1" i="0">
-                <a:solidFill>
-                  <a:srgbClr val="8A9BAA"/>
-                </a:solidFill>
-                <a:latin typeface="Arial"/>
-              </a:rPr>
-              <a:t>2:30</a:t>
-            </a:r>
-          </a:p>
-        </p:txBody>
-      </p:sp>
-      <p:sp>
-        <p:nvSpPr>
-          <p:cNvPr id="19" name="TextBox 18"/>
+              <a:rPr sz="1300" b="1" i="0">
+                <a:solidFill>
+                  <a:srgbClr val="007879"/>
+                </a:solidFill>
+                <a:latin typeface="Bahnschrift"/>
+              </a:rPr>
+              <a:t>LIVE DEMO</a:t>
+            </a:r>
+          </a:p>
+        </p:txBody>
+      </p:sp>
+      <p:sp>
+        <p:nvSpPr>
+          <p:cNvPr id="7" name="Team and vertical (only field on this slide)"/>
           <p:cNvSpPr txBox="1"/>
           <p:nvPr/>
         </p:nvSpPr>
         <p:spPr>
           <a:xfrm>
-            <a:off x="8549640" y="4215383"/>
-            <a:ext cx="3063240" cy="411480"/>
+            <a:off x="6949440" y="5760720"/>
+            <a:ext cx="4434840" cy="320040"/>
           </a:xfrm>
           <a:prstGeom prst="rect">
             <a:avLst/>
@@ -14713,207 +15811,20 @@
           <a:noFill/>
         </p:spPr>
         <p:txBody>
-          <a:bodyPr wrap="square" lIns="36576" rIns="36576" tIns="18288" bIns="18288" anchor="t">
+          <a:bodyPr wrap="square" lIns="36576" rIns="36576" tIns="18288" bIns="18288" anchor="ctr">
             <a:spAutoFit/>
           </a:bodyPr>
           <a:lstStyle/>
           <a:p>
-            <a:pPr algn="l"/>
-            <a:r>
-              <a:rPr sz="1300" b="1" i="0">
-                <a:solidFill>
-                  <a:srgbClr val="002B55"/>
+            <a:pPr algn="r"/>
+            <a:r>
+              <a:rPr sz="1100" b="0" i="0">
+                <a:solidFill>
+                  <a:srgbClr val="8A9BAA"/>
                 </a:solidFill>
                 <a:latin typeface="Arial"/>
               </a:rPr>
-              <a:t>[Gate: the agent stops; we decide]</a:t>
-            </a:r>
-          </a:p>
-        </p:txBody>
-      </p:sp>
-      <p:sp>
-        <p:nvSpPr>
-          <p:cNvPr id="20" name="Oval 19"/>
-          <p:cNvSpPr/>
-          <p:nvPr/>
-        </p:nvSpPr>
-        <p:spPr>
-          <a:xfrm>
-            <a:off x="7863840" y="4736592"/>
-            <a:ext cx="566928" cy="566928"/>
-          </a:xfrm>
-          <a:prstGeom prst="ellipse">
-            <a:avLst/>
-          </a:prstGeom>
-          <a:solidFill>
-            <a:srgbClr val="007879"/>
-          </a:solidFill>
-          <a:ln>
-            <a:noFill/>
-          </a:ln>
-          <a:effectLst/>
-        </p:spPr>
-        <p:style>
-          <a:lnRef idx="1">
-            <a:schemeClr val="accent1"/>
-          </a:lnRef>
-          <a:fillRef idx="3">
-            <a:schemeClr val="accent1"/>
-          </a:fillRef>
-          <a:effectRef idx="2">
-            <a:schemeClr val="accent1"/>
-          </a:effectRef>
-          <a:fontRef idx="minor">
-            <a:schemeClr val="lt1"/>
-          </a:fontRef>
-        </p:style>
-        <p:txBody>
-          <a:bodyPr rtlCol="0" anchor="ctr" wrap="square" lIns="0" rIns="0" tIns="36576" bIns="36576"/>
-          <a:lstStyle/>
-          <a:p>
-            <a:pPr algn="ctr"/>
-            <a:r>
-              <a:rPr sz="1600" b="1" i="0">
-                <a:solidFill>
-                  <a:srgbClr val="FFFFFF"/>
-                </a:solidFill>
-                <a:latin typeface="Bahnschrift"/>
-              </a:rPr>
-              <a:t>5</a:t>
-            </a:r>
-          </a:p>
-        </p:txBody>
-      </p:sp>
-      <p:sp>
-        <p:nvSpPr>
-          <p:cNvPr id="21" name="TextBox 20"/>
-          <p:cNvSpPr txBox="1"/>
-          <p:nvPr/>
-        </p:nvSpPr>
-        <p:spPr>
-          <a:xfrm>
-            <a:off x="8549640" y="4718304"/>
-            <a:ext cx="3063240" cy="237744"/>
-          </a:xfrm>
-          <a:prstGeom prst="rect">
-            <a:avLst/>
-          </a:prstGeom>
-          <a:noFill/>
-        </p:spPr>
-        <p:txBody>
-          <a:bodyPr wrap="square" lIns="36576" rIns="36576" tIns="18288" bIns="18288" anchor="t">
-            <a:spAutoFit/>
-          </a:bodyPr>
-          <a:lstStyle/>
-          <a:p>
-            <a:pPr algn="l"/>
-            <a:r>
-              <a:rPr sz="1100" b="1" i="0">
-                <a:solidFill>
-                  <a:srgbClr val="8A9BAA"/>
-                </a:solidFill>
-                <a:latin typeface="Arial"/>
-              </a:rPr>
-              <a:t>3:15</a:t>
-            </a:r>
-          </a:p>
-        </p:txBody>
-      </p:sp>
-      <p:sp>
-        <p:nvSpPr>
-          <p:cNvPr id="22" name="TextBox 21"/>
-          <p:cNvSpPr txBox="1"/>
-          <p:nvPr/>
-        </p:nvSpPr>
-        <p:spPr>
-          <a:xfrm>
-            <a:off x="8549640" y="4965192"/>
-            <a:ext cx="3063240" cy="411480"/>
-          </a:xfrm>
-          <a:prstGeom prst="rect">
-            <a:avLst/>
-          </a:prstGeom>
-          <a:noFill/>
-        </p:spPr>
-        <p:txBody>
-          <a:bodyPr wrap="square" lIns="36576" rIns="36576" tIns="18288" bIns="18288" anchor="t">
-            <a:spAutoFit/>
-          </a:bodyPr>
-          <a:lstStyle/>
-          <a:p>
-            <a:pPr algn="l"/>
-            <a:r>
-              <a:rPr sz="1300" b="1" i="0">
-                <a:solidFill>
-                  <a:srgbClr val="002B55"/>
-                </a:solidFill>
-                <a:latin typeface="Arial"/>
-              </a:rPr>
-              <a:t>[The output, and what it replaced]</a:t>
-            </a:r>
-          </a:p>
-        </p:txBody>
-      </p:sp>
-      <p:sp>
-        <p:nvSpPr>
-          <p:cNvPr id="23" name="Rounded Rectangle 22"/>
-          <p:cNvSpPr/>
-          <p:nvPr/>
-        </p:nvSpPr>
-        <p:spPr>
-          <a:xfrm>
-            <a:off x="612648" y="5577840"/>
-            <a:ext cx="10972800" cy="566928"/>
-          </a:xfrm>
-          <a:prstGeom prst="roundRect">
-            <a:avLst>
-              <a:gd name="adj" fmla="val 10000"/>
-            </a:avLst>
-          </a:prstGeom>
-          <a:solidFill>
-            <a:srgbClr val="E3F1F0"/>
-          </a:solidFill>
-          <a:ln>
-            <a:noFill/>
-          </a:ln>
-          <a:effectLst/>
-        </p:spPr>
-        <p:style>
-          <a:lnRef idx="1">
-            <a:schemeClr val="accent1"/>
-          </a:lnRef>
-          <a:fillRef idx="3">
-            <a:schemeClr val="accent1"/>
-          </a:fillRef>
-          <a:effectRef idx="2">
-            <a:schemeClr val="accent1"/>
-          </a:effectRef>
-          <a:fontRef idx="minor">
-            <a:schemeClr val="lt1"/>
-          </a:fontRef>
-        </p:style>
-        <p:txBody>
-          <a:bodyPr rtlCol="0" anchor="ctr" wrap="square" lIns="73152" rIns="73152" tIns="36576" bIns="36576"/>
-          <a:lstStyle/>
-          <a:p>
-            <a:pPr algn="ctr"/>
-            <a:r>
-              <a:rPr sz="1400" b="1" i="0">
-                <a:solidFill>
-                  <a:srgbClr val="007879"/>
-                </a:solidFill>
-                <a:latin typeface="Arial"/>
-              </a:rPr>
-              <a:t>Backup: </a:t>
-            </a:r>
-            <a:r>
-              <a:rPr sz="1400" b="0" i="0">
-                <a:solidFill>
-                  <a:srgbClr val="002B55"/>
-                </a:solidFill>
-                <a:latin typeface="Arial"/>
-              </a:rPr>
-              <a:t>[screenshots or a 60-second recording, in case the live run is slow]</a:t>
+              <a:t>[Team name] · [Vertical]</a:t>
             </a:r>
           </a:p>
         </p:txBody>
@@ -14974,7 +15885,7 @@
                 </a:solidFill>
                 <a:latin typeface="Bahnschrift"/>
               </a:rPr>
-              <a:t>Impact: [X] hours back per year (team estimate)</a:t>
+              <a:t>Backup: if the demo fails</a:t>
             </a:r>
           </a:p>
         </p:txBody>
@@ -15051,53 +15962,18 @@
       </p:sp>
       <p:sp>
         <p:nvSpPr>
-          <p:cNvPr id="5" name="TextBox 4"/>
-          <p:cNvSpPr txBox="1"/>
+          <p:cNvPr id="5" name="Rounded Rectangle 4"/>
+          <p:cNvSpPr/>
           <p:nvPr/>
         </p:nvSpPr>
         <p:spPr>
           <a:xfrm>
             <a:off x="612648" y="1325880"/>
-            <a:ext cx="228600" cy="868680"/>
-          </a:xfrm>
-          <a:prstGeom prst="rect">
-            <a:avLst/>
-          </a:prstGeom>
-          <a:noFill/>
-        </p:spPr>
-        <p:txBody>
-          <a:bodyPr wrap="square" lIns="36576" rIns="36576" tIns="18288" bIns="18288" anchor="ctr">
-            <a:spAutoFit/>
-          </a:bodyPr>
-          <a:lstStyle/>
-          <a:p>
-            <a:pPr algn="ctr"/>
-            <a:r>
-              <a:rPr sz="3400" b="0" i="0">
-                <a:solidFill>
-                  <a:srgbClr val="28455F"/>
-                </a:solidFill>
-                <a:latin typeface="Arial"/>
-              </a:rPr>
-              <a:t>(</a:t>
-            </a:r>
-          </a:p>
-        </p:txBody>
-      </p:sp>
-      <p:sp>
-        <p:nvSpPr>
-          <p:cNvPr id="6" name="Rounded Rectangle 5"/>
-          <p:cNvSpPr/>
-          <p:nvPr/>
-        </p:nvSpPr>
-        <p:spPr>
-          <a:xfrm>
-            <a:off x="841248" y="1371600"/>
-            <a:ext cx="1737360" cy="868680"/>
+            <a:ext cx="3383280" cy="4069080"/>
           </a:xfrm>
           <a:prstGeom prst="roundRect">
             <a:avLst>
-              <a:gd name="adj" fmla="val 8000"/>
+              <a:gd name="adj" fmla="val 4000"/>
             </a:avLst>
           </a:prstGeom>
           <a:solidFill>
@@ -15105,8 +15981,9 @@
           </a:solidFill>
           <a:ln w="15875">
             <a:solidFill>
-              <a:srgbClr val="D5DEE6"/>
+              <a:srgbClr val="8A9BAA"/>
             </a:solidFill>
+            <a:prstDash val="dash"/>
           </a:ln>
           <a:effectLst/>
         </p:spPr>
@@ -15129,128 +16006,32 @@
           <a:lstStyle/>
           <a:p>
             <a:pPr algn="ctr"/>
-          </a:p>
-        </p:txBody>
-      </p:sp>
-      <p:sp>
-        <p:nvSpPr>
-          <p:cNvPr id="7" name="TextBox 6"/>
-          <p:cNvSpPr txBox="1"/>
-          <p:nvPr/>
-        </p:nvSpPr>
-        <p:spPr>
-          <a:xfrm>
-            <a:off x="841248" y="1389888"/>
-            <a:ext cx="1737360" cy="475488"/>
-          </a:xfrm>
-          <a:prstGeom prst="rect">
-            <a:avLst/>
-          </a:prstGeom>
-          <a:noFill/>
-        </p:spPr>
-        <p:txBody>
-          <a:bodyPr wrap="square" lIns="36576" rIns="36576" tIns="18288" bIns="18288" anchor="ctr">
-            <a:spAutoFit/>
-          </a:bodyPr>
-          <a:lstStyle/>
-          <a:p>
-            <a:pPr algn="ctr"/>
-            <a:r>
-              <a:rPr sz="2400" b="1" i="0">
-                <a:solidFill>
-                  <a:srgbClr val="002B55"/>
-                </a:solidFill>
-                <a:latin typeface="Bahnschrift"/>
-              </a:rPr>
-              <a:t>[B] h</a:t>
-            </a:r>
-          </a:p>
-        </p:txBody>
-      </p:sp>
-      <p:sp>
-        <p:nvSpPr>
-          <p:cNvPr id="8" name="TextBox 7"/>
-          <p:cNvSpPr txBox="1"/>
-          <p:nvPr/>
-        </p:nvSpPr>
-        <p:spPr>
-          <a:xfrm>
-            <a:off x="841248" y="1883664"/>
-            <a:ext cx="1737360" cy="329184"/>
-          </a:xfrm>
-          <a:prstGeom prst="rect">
-            <a:avLst/>
-          </a:prstGeom>
-          <a:noFill/>
-        </p:spPr>
-        <p:txBody>
-          <a:bodyPr wrap="square" lIns="36576" rIns="36576" tIns="18288" bIns="18288" anchor="t">
-            <a:spAutoFit/>
-          </a:bodyPr>
-          <a:lstStyle/>
-          <a:p>
-            <a:pPr algn="ctr"/>
-            <a:r>
-              <a:rPr sz="1100" b="0" i="0">
-                <a:solidFill>
-                  <a:srgbClr val="28455F"/>
+            <a:r>
+              <a:rPr sz="1400" b="0" i="0">
+                <a:solidFill>
+                  <a:srgbClr val="8A9BAA"/>
                 </a:solidFill>
                 <a:latin typeface="Arial"/>
               </a:rPr>
-              <a:t>baseline per cycle</a:t>
-            </a:r>
-          </a:p>
-        </p:txBody>
-      </p:sp>
-      <p:sp>
-        <p:nvSpPr>
-          <p:cNvPr id="9" name="TextBox 8"/>
-          <p:cNvSpPr txBox="1"/>
-          <p:nvPr/>
-        </p:nvSpPr>
-        <p:spPr>
-          <a:xfrm>
-            <a:off x="2578608" y="1371600"/>
-            <a:ext cx="365760" cy="868680"/>
-          </a:xfrm>
-          <a:prstGeom prst="rect">
-            <a:avLst/>
-          </a:prstGeom>
-          <a:noFill/>
-        </p:spPr>
-        <p:txBody>
-          <a:bodyPr wrap="square" lIns="36576" rIns="36576" tIns="18288" bIns="18288" anchor="ctr">
-            <a:spAutoFit/>
-          </a:bodyPr>
-          <a:lstStyle/>
-          <a:p>
-            <a:pPr algn="ctr"/>
-            <a:r>
-              <a:rPr sz="3000" b="1" i="0">
-                <a:solidFill>
-                  <a:srgbClr val="28455F"/>
-                </a:solidFill>
-                <a:latin typeface="Bahnschrift"/>
-              </a:rPr>
-              <a:t>−</a:t>
-            </a:r>
-          </a:p>
-        </p:txBody>
-      </p:sp>
-      <p:sp>
-        <p:nvSpPr>
-          <p:cNvPr id="10" name="Rounded Rectangle 9"/>
+              <a:t>[Screenshot 1: the assignment + the agent's plan]</a:t>
+            </a:r>
+          </a:p>
+        </p:txBody>
+      </p:sp>
+      <p:sp>
+        <p:nvSpPr>
+          <p:cNvPr id="6" name="Rounded Rectangle 5"/>
           <p:cNvSpPr/>
           <p:nvPr/>
         </p:nvSpPr>
         <p:spPr>
           <a:xfrm>
-            <a:off x="2944368" y="1371600"/>
-            <a:ext cx="1737360" cy="868680"/>
+            <a:off x="4178808" y="1325880"/>
+            <a:ext cx="3383280" cy="4069080"/>
           </a:xfrm>
           <a:prstGeom prst="roundRect">
             <a:avLst>
-              <a:gd name="adj" fmla="val 8000"/>
+              <a:gd name="adj" fmla="val 4000"/>
             </a:avLst>
           </a:prstGeom>
           <a:solidFill>
@@ -15258,8 +16039,9 @@
           </a:solidFill>
           <a:ln w="15875">
             <a:solidFill>
-              <a:srgbClr val="D5DEE6"/>
+              <a:srgbClr val="8A9BAA"/>
             </a:solidFill>
+            <a:prstDash val="dash"/>
           </a:ln>
           <a:effectLst/>
         </p:spPr>
@@ -15282,54 +16064,28 @@
           <a:lstStyle/>
           <a:p>
             <a:pPr algn="ctr"/>
-          </a:p>
-        </p:txBody>
-      </p:sp>
-      <p:sp>
-        <p:nvSpPr>
-          <p:cNvPr id="11" name="TextBox 10"/>
+            <a:r>
+              <a:rPr sz="1400" b="0" i="0">
+                <a:solidFill>
+                  <a:srgbClr val="8A9BAA"/>
+                </a:solidFill>
+                <a:latin typeface="Arial"/>
+              </a:rPr>
+              <a:t>[Screenshot 2: sub-agent outputs / final deliverable]</a:t>
+            </a:r>
+          </a:p>
+        </p:txBody>
+      </p:sp>
+      <p:sp>
+        <p:nvSpPr>
+          <p:cNvPr id="7" name="TextBox 6"/>
           <p:cNvSpPr txBox="1"/>
           <p:nvPr/>
         </p:nvSpPr>
         <p:spPr>
           <a:xfrm>
-            <a:off x="2944368" y="1389888"/>
-            <a:ext cx="1737360" cy="475488"/>
-          </a:xfrm>
-          <a:prstGeom prst="rect">
-            <a:avLst/>
-          </a:prstGeom>
-          <a:noFill/>
-        </p:spPr>
-        <p:txBody>
-          <a:bodyPr wrap="square" lIns="36576" rIns="36576" tIns="18288" bIns="18288" anchor="ctr">
-            <a:spAutoFit/>
-          </a:bodyPr>
-          <a:lstStyle/>
-          <a:p>
-            <a:pPr algn="ctr"/>
-            <a:r>
-              <a:rPr sz="2400" b="1" i="0">
-                <a:solidFill>
-                  <a:srgbClr val="002B55"/>
-                </a:solidFill>
-                <a:latin typeface="Bahnschrift"/>
-              </a:rPr>
-              <a:t>[A] h</a:t>
-            </a:r>
-          </a:p>
-        </p:txBody>
-      </p:sp>
-      <p:sp>
-        <p:nvSpPr>
-          <p:cNvPr id="12" name="TextBox 11"/>
-          <p:cNvSpPr txBox="1"/>
-          <p:nvPr/>
-        </p:nvSpPr>
-        <p:spPr>
-          <a:xfrm>
-            <a:off x="2944368" y="1883664"/>
-            <a:ext cx="1737360" cy="329184"/>
+            <a:off x="7863840" y="1280160"/>
+            <a:ext cx="3657600" cy="365760"/>
           </a:xfrm>
           <a:prstGeom prst="rect">
             <a:avLst/>
@@ -15342,112 +16098,38 @@
           </a:bodyPr>
           <a:lstStyle/>
           <a:p>
-            <a:pPr algn="ctr"/>
-            <a:r>
-              <a:rPr sz="1100" b="0" i="0">
-                <a:solidFill>
-                  <a:srgbClr val="28455F"/>
-                </a:solidFill>
-                <a:latin typeface="Arial"/>
-              </a:rPr>
-              <a:t>AI-assisted incl. review</a:t>
-            </a:r>
-          </a:p>
-        </p:txBody>
-      </p:sp>
-      <p:sp>
-        <p:nvSpPr>
-          <p:cNvPr id="13" name="TextBox 12"/>
-          <p:cNvSpPr txBox="1"/>
-          <p:nvPr/>
-        </p:nvSpPr>
-        <p:spPr>
-          <a:xfrm>
-            <a:off x="4681727" y="1325880"/>
-            <a:ext cx="228600" cy="868680"/>
-          </a:xfrm>
-          <a:prstGeom prst="rect">
-            <a:avLst/>
-          </a:prstGeom>
-          <a:noFill/>
-        </p:spPr>
-        <p:txBody>
-          <a:bodyPr wrap="square" lIns="36576" rIns="36576" tIns="18288" bIns="18288" anchor="ctr">
-            <a:spAutoFit/>
-          </a:bodyPr>
-          <a:lstStyle/>
-          <a:p>
-            <a:pPr algn="ctr"/>
-            <a:r>
-              <a:rPr sz="3400" b="0" i="0">
-                <a:solidFill>
-                  <a:srgbClr val="28455F"/>
-                </a:solidFill>
-                <a:latin typeface="Arial"/>
-              </a:rPr>
-              <a:t>)</a:t>
-            </a:r>
-          </a:p>
-        </p:txBody>
-      </p:sp>
-      <p:sp>
-        <p:nvSpPr>
-          <p:cNvPr id="14" name="TextBox 13"/>
-          <p:cNvSpPr txBox="1"/>
-          <p:nvPr/>
-        </p:nvSpPr>
-        <p:spPr>
-          <a:xfrm>
-            <a:off x="4910327" y="1371600"/>
-            <a:ext cx="365760" cy="868680"/>
-          </a:xfrm>
-          <a:prstGeom prst="rect">
-            <a:avLst/>
-          </a:prstGeom>
-          <a:noFill/>
-        </p:spPr>
-        <p:txBody>
-          <a:bodyPr wrap="square" lIns="36576" rIns="36576" tIns="18288" bIns="18288" anchor="ctr">
-            <a:spAutoFit/>
-          </a:bodyPr>
-          <a:lstStyle/>
-          <a:p>
-            <a:pPr algn="ctr"/>
-            <a:r>
-              <a:rPr sz="3000" b="1" i="0">
-                <a:solidFill>
-                  <a:srgbClr val="28455F"/>
+            <a:pPr algn="l"/>
+            <a:r>
+              <a:rPr sz="1300" b="1" i="0">
+                <a:solidFill>
+                  <a:srgbClr val="007879"/>
                 </a:solidFill>
                 <a:latin typeface="Bahnschrift"/>
               </a:rPr>
-              <a:t>×</a:t>
-            </a:r>
-          </a:p>
-        </p:txBody>
-      </p:sp>
-      <p:sp>
-        <p:nvSpPr>
-          <p:cNvPr id="15" name="Rounded Rectangle 14"/>
+              <a:t>WHAT THE RUN SHOWS</a:t>
+            </a:r>
+          </a:p>
+        </p:txBody>
+      </p:sp>
+      <p:sp>
+        <p:nvSpPr>
+          <p:cNvPr id="8" name="Oval 7"/>
           <p:cNvSpPr/>
           <p:nvPr/>
         </p:nvSpPr>
         <p:spPr>
           <a:xfrm>
-            <a:off x="5276088" y="1371600"/>
-            <a:ext cx="1737360" cy="868680"/>
-          </a:xfrm>
-          <a:prstGeom prst="roundRect">
-            <a:avLst>
-              <a:gd name="adj" fmla="val 8000"/>
-            </a:avLst>
+            <a:off x="7863840" y="1737360"/>
+            <a:ext cx="566928" cy="566928"/>
+          </a:xfrm>
+          <a:prstGeom prst="ellipse">
+            <a:avLst/>
           </a:prstGeom>
           <a:solidFill>
-            <a:srgbClr val="FFFFFF"/>
+            <a:srgbClr val="007879"/>
           </a:solidFill>
-          <a:ln w="15875">
-            <a:solidFill>
-              <a:srgbClr val="D5DEE6"/>
-            </a:solidFill>
+          <a:ln>
+            <a:noFill/>
           </a:ln>
           <a:effectLst/>
         </p:spPr>
@@ -15466,23 +16148,32 @@
           </a:fontRef>
         </p:style>
         <p:txBody>
-          <a:bodyPr rtlCol="0" anchor="ctr" wrap="square" lIns="73152" rIns="73152" tIns="36576" bIns="36576"/>
+          <a:bodyPr rtlCol="0" anchor="ctr" wrap="square" lIns="0" rIns="0" tIns="36576" bIns="36576"/>
           <a:lstStyle/>
           <a:p>
             <a:pPr algn="ctr"/>
-          </a:p>
-        </p:txBody>
-      </p:sp>
-      <p:sp>
-        <p:nvSpPr>
-          <p:cNvPr id="16" name="TextBox 15"/>
+            <a:r>
+              <a:rPr sz="1600" b="1" i="0">
+                <a:solidFill>
+                  <a:srgbClr val="FFFFFF"/>
+                </a:solidFill>
+                <a:latin typeface="Bahnschrift"/>
+              </a:rPr>
+              <a:t>1</a:t>
+            </a:r>
+          </a:p>
+        </p:txBody>
+      </p:sp>
+      <p:sp>
+        <p:nvSpPr>
+          <p:cNvPr id="9" name="TextBox 8"/>
           <p:cNvSpPr txBox="1"/>
           <p:nvPr/>
         </p:nvSpPr>
         <p:spPr>
           <a:xfrm>
-            <a:off x="5276088" y="1389888"/>
-            <a:ext cx="1737360" cy="475488"/>
+            <a:off x="8549640" y="1792224"/>
+            <a:ext cx="3063240" cy="457200"/>
           </a:xfrm>
           <a:prstGeom prst="rect">
             <a:avLst/>
@@ -15495,112 +16186,38 @@
           </a:bodyPr>
           <a:lstStyle/>
           <a:p>
-            <a:pPr algn="ctr"/>
-            <a:r>
-              <a:rPr sz="2400" b="1" i="0">
+            <a:pPr algn="l"/>
+            <a:r>
+              <a:rPr sz="1300" b="1" i="0">
                 <a:solidFill>
                   <a:srgbClr val="002B55"/>
                 </a:solidFill>
-                <a:latin typeface="Bahnschrift"/>
-              </a:rPr>
-              <a:t>[N]</a:t>
-            </a:r>
-          </a:p>
-        </p:txBody>
-      </p:sp>
-      <p:sp>
-        <p:nvSpPr>
-          <p:cNvPr id="17" name="TextBox 16"/>
-          <p:cNvSpPr txBox="1"/>
-          <p:nvPr/>
-        </p:nvSpPr>
-        <p:spPr>
-          <a:xfrm>
-            <a:off x="5276088" y="1883664"/>
-            <a:ext cx="1737360" cy="329184"/>
-          </a:xfrm>
-          <a:prstGeom prst="rect">
-            <a:avLst/>
-          </a:prstGeom>
-          <a:noFill/>
-        </p:spPr>
-        <p:txBody>
-          <a:bodyPr wrap="square" lIns="36576" rIns="36576" tIns="18288" bIns="18288" anchor="t">
-            <a:spAutoFit/>
-          </a:bodyPr>
-          <a:lstStyle/>
-          <a:p>
-            <a:pPr algn="ctr"/>
-            <a:r>
-              <a:rPr sz="1100" b="0" i="0">
-                <a:solidFill>
-                  <a:srgbClr val="28455F"/>
-                </a:solidFill>
                 <a:latin typeface="Arial"/>
               </a:rPr>
-              <a:t>cycles / year</a:t>
-            </a:r>
-          </a:p>
-        </p:txBody>
-      </p:sp>
-      <p:sp>
-        <p:nvSpPr>
-          <p:cNvPr id="18" name="TextBox 17"/>
-          <p:cNvSpPr txBox="1"/>
-          <p:nvPr/>
-        </p:nvSpPr>
-        <p:spPr>
-          <a:xfrm>
-            <a:off x="7013448" y="1371600"/>
-            <a:ext cx="365760" cy="868680"/>
-          </a:xfrm>
-          <a:prstGeom prst="rect">
-            <a:avLst/>
-          </a:prstGeom>
-          <a:noFill/>
-        </p:spPr>
-        <p:txBody>
-          <a:bodyPr wrap="square" lIns="36576" rIns="36576" tIns="18288" bIns="18288" anchor="ctr">
-            <a:spAutoFit/>
-          </a:bodyPr>
-          <a:lstStyle/>
-          <a:p>
-            <a:pPr algn="ctr"/>
-            <a:r>
-              <a:rPr sz="3000" b="1" i="0">
-                <a:solidFill>
-                  <a:srgbClr val="28455F"/>
-                </a:solidFill>
-                <a:latin typeface="Bahnschrift"/>
-              </a:rPr>
-              <a:t>×</a:t>
-            </a:r>
-          </a:p>
-        </p:txBody>
-      </p:sp>
-      <p:sp>
-        <p:nvSpPr>
-          <p:cNvPr id="19" name="Rounded Rectangle 18"/>
+              <a:t>[The assignment we gave]</a:t>
+            </a:r>
+          </a:p>
+        </p:txBody>
+      </p:sp>
+      <p:sp>
+        <p:nvSpPr>
+          <p:cNvPr id="10" name="Oval 9"/>
           <p:cNvSpPr/>
           <p:nvPr/>
         </p:nvSpPr>
         <p:spPr>
           <a:xfrm>
-            <a:off x="7379208" y="1371600"/>
-            <a:ext cx="1737360" cy="868680"/>
-          </a:xfrm>
-          <a:prstGeom prst="roundRect">
-            <a:avLst>
-              <a:gd name="adj" fmla="val 8000"/>
-            </a:avLst>
+            <a:off x="7863840" y="2487168"/>
+            <a:ext cx="566928" cy="566928"/>
+          </a:xfrm>
+          <a:prstGeom prst="ellipse">
+            <a:avLst/>
           </a:prstGeom>
           <a:solidFill>
-            <a:srgbClr val="FFFFFF"/>
+            <a:srgbClr val="007879"/>
           </a:solidFill>
-          <a:ln w="15875">
-            <a:solidFill>
-              <a:srgbClr val="D5DEE6"/>
-            </a:solidFill>
+          <a:ln>
+            <a:noFill/>
           </a:ln>
           <a:effectLst/>
         </p:spPr>
@@ -15619,23 +16236,32 @@
           </a:fontRef>
         </p:style>
         <p:txBody>
-          <a:bodyPr rtlCol="0" anchor="ctr" wrap="square" lIns="73152" rIns="73152" tIns="36576" bIns="36576"/>
+          <a:bodyPr rtlCol="0" anchor="ctr" wrap="square" lIns="0" rIns="0" tIns="36576" bIns="36576"/>
           <a:lstStyle/>
           <a:p>
             <a:pPr algn="ctr"/>
-          </a:p>
-        </p:txBody>
-      </p:sp>
-      <p:sp>
-        <p:nvSpPr>
-          <p:cNvPr id="20" name="TextBox 19"/>
+            <a:r>
+              <a:rPr sz="1600" b="1" i="0">
+                <a:solidFill>
+                  <a:srgbClr val="FFFFFF"/>
+                </a:solidFill>
+                <a:latin typeface="Bahnschrift"/>
+              </a:rPr>
+              <a:t>2</a:t>
+            </a:r>
+          </a:p>
+        </p:txBody>
+      </p:sp>
+      <p:sp>
+        <p:nvSpPr>
+          <p:cNvPr id="11" name="TextBox 10"/>
           <p:cNvSpPr txBox="1"/>
           <p:nvPr/>
         </p:nvSpPr>
         <p:spPr>
           <a:xfrm>
-            <a:off x="7379208" y="1389888"/>
-            <a:ext cx="1737360" cy="475488"/>
+            <a:off x="8549640" y="2542032"/>
+            <a:ext cx="3063240" cy="457200"/>
           </a:xfrm>
           <a:prstGeom prst="rect">
             <a:avLst/>
@@ -15648,112 +16274,38 @@
           </a:bodyPr>
           <a:lstStyle/>
           <a:p>
-            <a:pPr algn="ctr"/>
-            <a:r>
-              <a:rPr sz="2400" b="1" i="0">
+            <a:pPr algn="l"/>
+            <a:r>
+              <a:rPr sz="1300" b="1" i="0">
                 <a:solidFill>
                   <a:srgbClr val="002B55"/>
                 </a:solidFill>
-                <a:latin typeface="Bahnschrift"/>
-              </a:rPr>
-              <a:t>$[R]</a:t>
-            </a:r>
-          </a:p>
-        </p:txBody>
-      </p:sp>
-      <p:sp>
-        <p:nvSpPr>
-          <p:cNvPr id="21" name="TextBox 20"/>
-          <p:cNvSpPr txBox="1"/>
-          <p:nvPr/>
-        </p:nvSpPr>
-        <p:spPr>
-          <a:xfrm>
-            <a:off x="7379208" y="1883664"/>
-            <a:ext cx="1737360" cy="329184"/>
-          </a:xfrm>
-          <a:prstGeom prst="rect">
-            <a:avLst/>
-          </a:prstGeom>
-          <a:noFill/>
-        </p:spPr>
-        <p:txBody>
-          <a:bodyPr wrap="square" lIns="36576" rIns="36576" tIns="18288" bIns="18288" anchor="t">
-            <a:spAutoFit/>
-          </a:bodyPr>
-          <a:lstStyle/>
-          <a:p>
-            <a:pPr algn="ctr"/>
-            <a:r>
-              <a:rPr sz="1100" b="0" i="0">
-                <a:solidFill>
-                  <a:srgbClr val="28455F"/>
-                </a:solidFill>
                 <a:latin typeface="Arial"/>
               </a:rPr>
-              <a:t>loaded rate / hour</a:t>
-            </a:r>
-          </a:p>
-        </p:txBody>
-      </p:sp>
-      <p:sp>
-        <p:nvSpPr>
-          <p:cNvPr id="22" name="TextBox 21"/>
-          <p:cNvSpPr txBox="1"/>
-          <p:nvPr/>
-        </p:nvSpPr>
-        <p:spPr>
-          <a:xfrm>
-            <a:off x="9116568" y="1371600"/>
-            <a:ext cx="365760" cy="868680"/>
-          </a:xfrm>
-          <a:prstGeom prst="rect">
-            <a:avLst/>
-          </a:prstGeom>
-          <a:noFill/>
-        </p:spPr>
-        <p:txBody>
-          <a:bodyPr wrap="square" lIns="36576" rIns="36576" tIns="18288" bIns="18288" anchor="ctr">
-            <a:spAutoFit/>
-          </a:bodyPr>
-          <a:lstStyle/>
-          <a:p>
-            <a:pPr algn="ctr"/>
-            <a:r>
-              <a:rPr sz="3000" b="1" i="0">
-                <a:solidFill>
-                  <a:srgbClr val="28455F"/>
-                </a:solidFill>
-                <a:latin typeface="Bahnschrift"/>
-              </a:rPr>
-              <a:t>=</a:t>
-            </a:r>
-          </a:p>
-        </p:txBody>
-      </p:sp>
-      <p:sp>
-        <p:nvSpPr>
-          <p:cNvPr id="23" name="Rounded Rectangle 22"/>
+              <a:t>[Lead agent plans and splits]</a:t>
+            </a:r>
+          </a:p>
+        </p:txBody>
+      </p:sp>
+      <p:sp>
+        <p:nvSpPr>
+          <p:cNvPr id="12" name="Oval 11"/>
           <p:cNvSpPr/>
           <p:nvPr/>
         </p:nvSpPr>
         <p:spPr>
           <a:xfrm>
-            <a:off x="9482328" y="1371600"/>
-            <a:ext cx="2011680" cy="868680"/>
-          </a:xfrm>
-          <a:prstGeom prst="roundRect">
-            <a:avLst>
-              <a:gd name="adj" fmla="val 8000"/>
-            </a:avLst>
+            <a:off x="7863840" y="3236976"/>
+            <a:ext cx="566928" cy="566928"/>
+          </a:xfrm>
+          <a:prstGeom prst="ellipse">
+            <a:avLst/>
           </a:prstGeom>
           <a:solidFill>
-            <a:srgbClr val="FDEBE1"/>
+            <a:srgbClr val="007879"/>
           </a:solidFill>
-          <a:ln w="15875">
-            <a:solidFill>
-              <a:srgbClr val="D5DEE6"/>
-            </a:solidFill>
+          <a:ln>
+            <a:noFill/>
           </a:ln>
           <a:effectLst/>
         </p:spPr>
@@ -15772,23 +16324,32 @@
           </a:fontRef>
         </p:style>
         <p:txBody>
-          <a:bodyPr rtlCol="0" anchor="ctr" wrap="square" lIns="73152" rIns="73152" tIns="36576" bIns="36576"/>
+          <a:bodyPr rtlCol="0" anchor="ctr" wrap="square" lIns="0" rIns="0" tIns="36576" bIns="36576"/>
           <a:lstStyle/>
           <a:p>
             <a:pPr algn="ctr"/>
-          </a:p>
-        </p:txBody>
-      </p:sp>
-      <p:sp>
-        <p:nvSpPr>
-          <p:cNvPr id="24" name="TextBox 23"/>
+            <a:r>
+              <a:rPr sz="1600" b="1" i="0">
+                <a:solidFill>
+                  <a:srgbClr val="FFFFFF"/>
+                </a:solidFill>
+                <a:latin typeface="Bahnschrift"/>
+              </a:rPr>
+              <a:t>3</a:t>
+            </a:r>
+          </a:p>
+        </p:txBody>
+      </p:sp>
+      <p:sp>
+        <p:nvSpPr>
+          <p:cNvPr id="13" name="TextBox 12"/>
           <p:cNvSpPr txBox="1"/>
           <p:nvPr/>
         </p:nvSpPr>
         <p:spPr>
           <a:xfrm>
-            <a:off x="9482328" y="1389888"/>
-            <a:ext cx="2011680" cy="475488"/>
+            <a:off x="8549640" y="3291840"/>
+            <a:ext cx="3063240" cy="457200"/>
           </a:xfrm>
           <a:prstGeom prst="rect">
             <a:avLst/>
@@ -15801,82 +16362,82 @@
           </a:bodyPr>
           <a:lstStyle/>
           <a:p>
+            <a:pPr algn="l"/>
+            <a:r>
+              <a:rPr sz="1300" b="1" i="0">
+                <a:solidFill>
+                  <a:srgbClr val="002B55"/>
+                </a:solidFill>
+                <a:latin typeface="Arial"/>
+              </a:rPr>
+              <a:t>[Sub-agents work and hand off]</a:t>
+            </a:r>
+          </a:p>
+        </p:txBody>
+      </p:sp>
+      <p:sp>
+        <p:nvSpPr>
+          <p:cNvPr id="14" name="Oval 13"/>
+          <p:cNvSpPr/>
+          <p:nvPr/>
+        </p:nvSpPr>
+        <p:spPr>
+          <a:xfrm>
+            <a:off x="7863840" y="3986783"/>
+            <a:ext cx="566928" cy="566928"/>
+          </a:xfrm>
+          <a:prstGeom prst="ellipse">
+            <a:avLst/>
+          </a:prstGeom>
+          <a:solidFill>
+            <a:srgbClr val="F47735"/>
+          </a:solidFill>
+          <a:ln>
+            <a:noFill/>
+          </a:ln>
+          <a:effectLst/>
+        </p:spPr>
+        <p:style>
+          <a:lnRef idx="1">
+            <a:schemeClr val="accent1"/>
+          </a:lnRef>
+          <a:fillRef idx="3">
+            <a:schemeClr val="accent1"/>
+          </a:fillRef>
+          <a:effectRef idx="2">
+            <a:schemeClr val="accent1"/>
+          </a:effectRef>
+          <a:fontRef idx="minor">
+            <a:schemeClr val="lt1"/>
+          </a:fontRef>
+        </p:style>
+        <p:txBody>
+          <a:bodyPr rtlCol="0" anchor="ctr" wrap="square" lIns="0" rIns="0" tIns="36576" bIns="36576"/>
+          <a:lstStyle/>
+          <a:p>
             <a:pPr algn="ctr"/>
             <a:r>
-              <a:rPr sz="2400" b="1" i="0">
-                <a:solidFill>
-                  <a:srgbClr val="F47735"/>
+              <a:rPr sz="1600" b="1" i="0">
+                <a:solidFill>
+                  <a:srgbClr val="FFFFFF"/>
                 </a:solidFill>
                 <a:latin typeface="Bahnschrift"/>
               </a:rPr>
-              <a:t>$[V]</a:t>
-            </a:r>
-          </a:p>
-        </p:txBody>
-      </p:sp>
-      <p:sp>
-        <p:nvSpPr>
-          <p:cNvPr id="25" name="TextBox 24"/>
+              <a:t>4</a:t>
+            </a:r>
+          </a:p>
+        </p:txBody>
+      </p:sp>
+      <p:sp>
+        <p:nvSpPr>
+          <p:cNvPr id="15" name="TextBox 14"/>
           <p:cNvSpPr txBox="1"/>
           <p:nvPr/>
         </p:nvSpPr>
         <p:spPr>
           <a:xfrm>
-            <a:off x="9482328" y="1883664"/>
-            <a:ext cx="2011680" cy="329184"/>
-          </a:xfrm>
-          <a:prstGeom prst="rect">
-            <a:avLst/>
-          </a:prstGeom>
-          <a:noFill/>
-        </p:spPr>
-        <p:txBody>
-          <a:bodyPr wrap="square" lIns="36576" rIns="36576" tIns="18288" bIns="18288" anchor="t">
-            <a:spAutoFit/>
-          </a:bodyPr>
-          <a:lstStyle/>
-          <a:p>
-            <a:pPr algn="ctr"/>
-            <a:r>
-              <a:rPr sz="1100" b="0" i="0">
-                <a:solidFill>
-                  <a:srgbClr val="28455F"/>
-                </a:solidFill>
-                <a:latin typeface="Arial"/>
-              </a:rPr>
-              <a:t>annual value</a:t>
-            </a:r>
-          </a:p>
-        </p:txBody>
-      </p:sp>
-      <p:graphicFrame>
-        <p:nvGraphicFramePr>
-          <p:cNvPr id="26" name="Chart 25"/>
-          <p:cNvGraphicFramePr>
-            <a:graphicFrameLocks noGrp="1"/>
-          </p:cNvGraphicFramePr>
-          <p:nvPr/>
-        </p:nvGraphicFramePr>
-        <p:xfrm>
-          <a:off x="612648" y="2514600"/>
-          <a:ext cx="6035040" cy="3429000"/>
-        </p:xfrm>
-        <a:graphic>
-          <a:graphicData uri="http://schemas.openxmlformats.org/drawingml/2006/chart">
-            <c:chart xmlns:c="http://schemas.openxmlformats.org/drawingml/2006/chart" r:id="rId3"/>
-          </a:graphicData>
-        </a:graphic>
-      </p:graphicFrame>
-      <p:sp>
-        <p:nvSpPr>
-          <p:cNvPr id="27" name="TextBox 26"/>
-          <p:cNvSpPr txBox="1"/>
-          <p:nvPr/>
-        </p:nvSpPr>
-        <p:spPr>
-          <a:xfrm>
-            <a:off x="7040880" y="2606040"/>
-            <a:ext cx="4544568" cy="914400"/>
+            <a:off x="8549640" y="4041647"/>
+            <a:ext cx="3063240" cy="457200"/>
           </a:xfrm>
           <a:prstGeom prst="rect">
             <a:avLst/>
@@ -15891,62 +16452,80 @@
           <a:p>
             <a:pPr algn="l"/>
             <a:r>
-              <a:rPr sz="5400" b="1" i="0">
-                <a:solidFill>
-                  <a:srgbClr val="007879"/>
+              <a:rPr sz="1300" b="1" i="0">
+                <a:solidFill>
+                  <a:srgbClr val="002B55"/>
+                </a:solidFill>
+                <a:latin typeface="Arial"/>
+              </a:rPr>
+              <a:t>[Gate: the agent stops; we decide]</a:t>
+            </a:r>
+          </a:p>
+        </p:txBody>
+      </p:sp>
+      <p:sp>
+        <p:nvSpPr>
+          <p:cNvPr id="16" name="Oval 15"/>
+          <p:cNvSpPr/>
+          <p:nvPr/>
+        </p:nvSpPr>
+        <p:spPr>
+          <a:xfrm>
+            <a:off x="7863840" y="4736592"/>
+            <a:ext cx="566928" cy="566928"/>
+          </a:xfrm>
+          <a:prstGeom prst="ellipse">
+            <a:avLst/>
+          </a:prstGeom>
+          <a:solidFill>
+            <a:srgbClr val="007879"/>
+          </a:solidFill>
+          <a:ln>
+            <a:noFill/>
+          </a:ln>
+          <a:effectLst/>
+        </p:spPr>
+        <p:style>
+          <a:lnRef idx="1">
+            <a:schemeClr val="accent1"/>
+          </a:lnRef>
+          <a:fillRef idx="3">
+            <a:schemeClr val="accent1"/>
+          </a:fillRef>
+          <a:effectRef idx="2">
+            <a:schemeClr val="accent1"/>
+          </a:effectRef>
+          <a:fontRef idx="minor">
+            <a:schemeClr val="lt1"/>
+          </a:fontRef>
+        </p:style>
+        <p:txBody>
+          <a:bodyPr rtlCol="0" anchor="ctr" wrap="square" lIns="0" rIns="0" tIns="36576" bIns="36576"/>
+          <a:lstStyle/>
+          <a:p>
+            <a:pPr algn="ctr"/>
+            <a:r>
+              <a:rPr sz="1600" b="1" i="0">
+                <a:solidFill>
+                  <a:srgbClr val="FFFFFF"/>
                 </a:solidFill>
                 <a:latin typeface="Bahnschrift"/>
               </a:rPr>
-              <a:t>[X] h</a:t>
-            </a:r>
-          </a:p>
-        </p:txBody>
-      </p:sp>
-      <p:sp>
-        <p:nvSpPr>
-          <p:cNvPr id="28" name="TextBox 27"/>
+              <a:t>5</a:t>
+            </a:r>
+          </a:p>
+        </p:txBody>
+      </p:sp>
+      <p:sp>
+        <p:nvSpPr>
+          <p:cNvPr id="17" name="TextBox 16"/>
           <p:cNvSpPr txBox="1"/>
           <p:nvPr/>
         </p:nvSpPr>
         <p:spPr>
           <a:xfrm>
-            <a:off x="7040880" y="3520440"/>
-            <a:ext cx="4544568" cy="411480"/>
-          </a:xfrm>
-          <a:prstGeom prst="rect">
-            <a:avLst/>
-          </a:prstGeom>
-          <a:noFill/>
-        </p:spPr>
-        <p:txBody>
-          <a:bodyPr wrap="square" lIns="36576" rIns="36576" tIns="18288" bIns="18288" anchor="t">
-            <a:spAutoFit/>
-          </a:bodyPr>
-          <a:lstStyle/>
-          <a:p>
-            <a:pPr algn="l"/>
-            <a:r>
-              <a:rPr sz="1600" b="0" i="0">
-                <a:solidFill>
-                  <a:srgbClr val="002B55"/>
-                </a:solidFill>
-                <a:latin typeface="Arial"/>
-              </a:rPr>
-              <a:t>saved per year</a:t>
-            </a:r>
-          </a:p>
-        </p:txBody>
-      </p:sp>
-      <p:sp>
-        <p:nvSpPr>
-          <p:cNvPr id="29" name="TextBox 28"/>
-          <p:cNvSpPr txBox="1"/>
-          <p:nvPr/>
-        </p:nvSpPr>
-        <p:spPr>
-          <a:xfrm>
-            <a:off x="7040880" y="4206240"/>
-            <a:ext cx="4544568" cy="914400"/>
+            <a:off x="8549640" y="4791455"/>
+            <a:ext cx="3063240" cy="457200"/>
           </a:xfrm>
           <a:prstGeom prst="rect">
             <a:avLst/>
@@ -15961,83 +16540,77 @@
           <a:p>
             <a:pPr algn="l"/>
             <a:r>
-              <a:rPr sz="5400" b="1" i="0">
-                <a:solidFill>
-                  <a:srgbClr val="F47735"/>
-                </a:solidFill>
-                <a:latin typeface="Bahnschrift"/>
-              </a:rPr>
-              <a:t>$[Y]</a:t>
-            </a:r>
-          </a:p>
-        </p:txBody>
-      </p:sp>
-      <p:sp>
-        <p:nvSpPr>
-          <p:cNvPr id="30" name="TextBox 29"/>
-          <p:cNvSpPr txBox="1"/>
-          <p:nvPr/>
-        </p:nvSpPr>
-        <p:spPr>
-          <a:xfrm>
-            <a:off x="7040880" y="5120640"/>
-            <a:ext cx="4544568" cy="411480"/>
-          </a:xfrm>
-          <a:prstGeom prst="rect">
-            <a:avLst/>
-          </a:prstGeom>
-          <a:noFill/>
-        </p:spPr>
-        <p:txBody>
-          <a:bodyPr wrap="square" lIns="36576" rIns="36576" tIns="18288" bIns="18288" anchor="t">
-            <a:spAutoFit/>
-          </a:bodyPr>
-          <a:lstStyle/>
-          <a:p>
-            <a:pPr algn="l"/>
-            <a:r>
-              <a:rPr sz="1600" b="0" i="0">
+              <a:rPr sz="1300" b="1" i="0">
                 <a:solidFill>
                   <a:srgbClr val="002B55"/>
                 </a:solidFill>
                 <a:latin typeface="Arial"/>
               </a:rPr>
-              <a:t>value per year</a:t>
-            </a:r>
-          </a:p>
-        </p:txBody>
-      </p:sp>
-      <p:sp>
-        <p:nvSpPr>
-          <p:cNvPr id="31" name="TextBox 30"/>
-          <p:cNvSpPr txBox="1"/>
-          <p:nvPr/>
-        </p:nvSpPr>
-        <p:spPr>
-          <a:xfrm>
-            <a:off x="7040880" y="5715000"/>
-            <a:ext cx="4544568" cy="457200"/>
-          </a:xfrm>
-          <a:prstGeom prst="rect">
-            <a:avLst/>
-          </a:prstGeom>
-          <a:noFill/>
-        </p:spPr>
-        <p:txBody>
-          <a:bodyPr wrap="square" lIns="36576" rIns="36576" tIns="18288" bIns="18288" anchor="t">
-            <a:spAutoFit/>
-          </a:bodyPr>
-          <a:lstStyle/>
-          <a:p>
-            <a:pPr algn="l"/>
-            <a:r>
-              <a:rPr sz="1100" b="0" i="1">
-                <a:solidFill>
-                  <a:srgbClr val="8A9BAA"/>
+              <a:t>[The output, and what it replaced]</a:t>
+            </a:r>
+          </a:p>
+        </p:txBody>
+      </p:sp>
+      <p:sp>
+        <p:nvSpPr>
+          <p:cNvPr id="18" name="Rounded Rectangle 17"/>
+          <p:cNvSpPr/>
+          <p:nvPr/>
+        </p:nvSpPr>
+        <p:spPr>
+          <a:xfrm>
+            <a:off x="612648" y="5577840"/>
+            <a:ext cx="10972800" cy="566928"/>
+          </a:xfrm>
+          <a:prstGeom prst="roundRect">
+            <a:avLst>
+              <a:gd name="adj" fmla="val 10000"/>
+            </a:avLst>
+          </a:prstGeom>
+          <a:solidFill>
+            <a:srgbClr val="E3F1F0"/>
+          </a:solidFill>
+          <a:ln>
+            <a:noFill/>
+          </a:ln>
+          <a:effectLst/>
+        </p:spPr>
+        <p:style>
+          <a:lnRef idx="1">
+            <a:schemeClr val="accent1"/>
+          </a:lnRef>
+          <a:fillRef idx="3">
+            <a:schemeClr val="accent1"/>
+          </a:fillRef>
+          <a:effectRef idx="2">
+            <a:schemeClr val="accent1"/>
+          </a:effectRef>
+          <a:fontRef idx="minor">
+            <a:schemeClr val="lt1"/>
+          </a:fontRef>
+        </p:style>
+        <p:txBody>
+          <a:bodyPr rtlCol="0" anchor="ctr" wrap="square" lIns="73152" rIns="73152" tIns="36576" bIns="36576"/>
+          <a:lstStyle/>
+          <a:p>
+            <a:pPr algn="ctr"/>
+            <a:r>
+              <a:rPr sz="1400" b="1" i="0">
+                <a:solidFill>
+                  <a:srgbClr val="007879"/>
                 </a:solidFill>
                 <a:latin typeface="Arial"/>
               </a:rPr>
-              <a:t>Team estimates, not measured results. Practice data are fictional.</a:t>
+              <a:t>Use only if the live run fails. </a:t>
+            </a:r>
+            <a:r>
+              <a:rPr sz="1400" b="0" i="0">
+                <a:solidFill>
+                  <a:srgbClr val="002B55"/>
+                </a:solidFill>
+                <a:latin typeface="Arial"/>
+              </a:rPr>
+              <a:t>Otherwise skip this slide.</a:t>
             </a:r>
           </a:p>
         </p:txBody>
@@ -16098,7 +16671,7 @@
                 </a:solidFill>
                 <a:latin typeface="Bahnschrift"/>
               </a:rPr>
-              <a:t>Risks we designed out</a:t>
+              <a:t>Impact: [X] hours back per year (team estimate)</a:t>
             </a:r>
           </a:p>
         </p:txBody>
@@ -16175,18 +16748,53 @@
       </p:sp>
       <p:sp>
         <p:nvSpPr>
-          <p:cNvPr id="5" name="Rounded Rectangle 4"/>
+          <p:cNvPr id="5" name="TextBox 4"/>
+          <p:cNvSpPr txBox="1"/>
+          <p:nvPr/>
+        </p:nvSpPr>
+        <p:spPr>
+          <a:xfrm>
+            <a:off x="612648" y="1325880"/>
+            <a:ext cx="228600" cy="868680"/>
+          </a:xfrm>
+          <a:prstGeom prst="rect">
+            <a:avLst/>
+          </a:prstGeom>
+          <a:noFill/>
+        </p:spPr>
+        <p:txBody>
+          <a:bodyPr wrap="square" lIns="36576" rIns="36576" tIns="18288" bIns="18288" anchor="ctr">
+            <a:spAutoFit/>
+          </a:bodyPr>
+          <a:lstStyle/>
+          <a:p>
+            <a:pPr algn="ctr"/>
+            <a:r>
+              <a:rPr sz="3400" b="0" i="0">
+                <a:solidFill>
+                  <a:srgbClr val="28455F"/>
+                </a:solidFill>
+                <a:latin typeface="Arial"/>
+              </a:rPr>
+              <a:t>(</a:t>
+            </a:r>
+          </a:p>
+        </p:txBody>
+      </p:sp>
+      <p:sp>
+        <p:nvSpPr>
+          <p:cNvPr id="6" name="Rounded Rectangle 5"/>
           <p:cNvSpPr/>
           <p:nvPr/>
         </p:nvSpPr>
         <p:spPr>
           <a:xfrm>
-            <a:off x="612648" y="1325880"/>
-            <a:ext cx="10972800" cy="822960"/>
+            <a:off x="841248" y="1371600"/>
+            <a:ext cx="1737360" cy="868680"/>
           </a:xfrm>
           <a:prstGeom prst="roundRect">
             <a:avLst>
-              <a:gd name="adj" fmla="val 12000"/>
+              <a:gd name="adj" fmla="val 8000"/>
             </a:avLst>
           </a:prstGeom>
           <a:solidFill>
@@ -16194,7 +16802,7 @@
           </a:solidFill>
           <a:ln w="15875">
             <a:solidFill>
-              <a:srgbClr val="E2E8F0"/>
+              <a:srgbClr val="D5DEE6"/>
             </a:solidFill>
           </a:ln>
           <a:effectLst/>
@@ -16223,25 +16831,132 @@
       </p:sp>
       <p:sp>
         <p:nvSpPr>
-          <p:cNvPr id="6" name="Rounded Rectangle 5"/>
+          <p:cNvPr id="7" name="TextBox 6"/>
+          <p:cNvSpPr txBox="1"/>
+          <p:nvPr/>
+        </p:nvSpPr>
+        <p:spPr>
+          <a:xfrm>
+            <a:off x="841248" y="1389888"/>
+            <a:ext cx="1737360" cy="475488"/>
+          </a:xfrm>
+          <a:prstGeom prst="rect">
+            <a:avLst/>
+          </a:prstGeom>
+          <a:noFill/>
+        </p:spPr>
+        <p:txBody>
+          <a:bodyPr wrap="square" lIns="36576" rIns="36576" tIns="18288" bIns="18288" anchor="ctr">
+            <a:spAutoFit/>
+          </a:bodyPr>
+          <a:lstStyle/>
+          <a:p>
+            <a:pPr algn="ctr"/>
+            <a:r>
+              <a:rPr sz="2400" b="1" i="0">
+                <a:solidFill>
+                  <a:srgbClr val="002B55"/>
+                </a:solidFill>
+                <a:latin typeface="Bahnschrift"/>
+              </a:rPr>
+              <a:t>[B] h</a:t>
+            </a:r>
+          </a:p>
+        </p:txBody>
+      </p:sp>
+      <p:sp>
+        <p:nvSpPr>
+          <p:cNvPr id="8" name="TextBox 7"/>
+          <p:cNvSpPr txBox="1"/>
+          <p:nvPr/>
+        </p:nvSpPr>
+        <p:spPr>
+          <a:xfrm>
+            <a:off x="841248" y="1883664"/>
+            <a:ext cx="1737360" cy="329184"/>
+          </a:xfrm>
+          <a:prstGeom prst="rect">
+            <a:avLst/>
+          </a:prstGeom>
+          <a:noFill/>
+        </p:spPr>
+        <p:txBody>
+          <a:bodyPr wrap="square" lIns="36576" rIns="36576" tIns="18288" bIns="18288" anchor="t">
+            <a:spAutoFit/>
+          </a:bodyPr>
+          <a:lstStyle/>
+          <a:p>
+            <a:pPr algn="ctr"/>
+            <a:r>
+              <a:rPr sz="1100" b="0" i="0">
+                <a:solidFill>
+                  <a:srgbClr val="28455F"/>
+                </a:solidFill>
+                <a:latin typeface="Arial"/>
+              </a:rPr>
+              <a:t>baseline per cycle</a:t>
+            </a:r>
+          </a:p>
+        </p:txBody>
+      </p:sp>
+      <p:sp>
+        <p:nvSpPr>
+          <p:cNvPr id="9" name="TextBox 8"/>
+          <p:cNvSpPr txBox="1"/>
+          <p:nvPr/>
+        </p:nvSpPr>
+        <p:spPr>
+          <a:xfrm>
+            <a:off x="2578608" y="1371600"/>
+            <a:ext cx="365760" cy="868680"/>
+          </a:xfrm>
+          <a:prstGeom prst="rect">
+            <a:avLst/>
+          </a:prstGeom>
+          <a:noFill/>
+        </p:spPr>
+        <p:txBody>
+          <a:bodyPr wrap="square" lIns="36576" rIns="36576" tIns="18288" bIns="18288" anchor="ctr">
+            <a:spAutoFit/>
+          </a:bodyPr>
+          <a:lstStyle/>
+          <a:p>
+            <a:pPr algn="ctr"/>
+            <a:r>
+              <a:rPr sz="3000" b="1" i="0">
+                <a:solidFill>
+                  <a:srgbClr val="28455F"/>
+                </a:solidFill>
+                <a:latin typeface="Bahnschrift"/>
+              </a:rPr>
+              <a:t>−</a:t>
+            </a:r>
+          </a:p>
+        </p:txBody>
+      </p:sp>
+      <p:sp>
+        <p:nvSpPr>
+          <p:cNvPr id="10" name="Rounded Rectangle 9"/>
           <p:cNvSpPr/>
           <p:nvPr/>
         </p:nvSpPr>
         <p:spPr>
           <a:xfrm>
-            <a:off x="612648" y="1325880"/>
-            <a:ext cx="2377440" cy="822960"/>
+            <a:off x="2944368" y="1371600"/>
+            <a:ext cx="1737360" cy="868680"/>
           </a:xfrm>
           <a:prstGeom prst="roundRect">
             <a:avLst>
-              <a:gd name="adj" fmla="val 12000"/>
+              <a:gd name="adj" fmla="val 8000"/>
             </a:avLst>
           </a:prstGeom>
           <a:solidFill>
-            <a:srgbClr val="2E9D6B"/>
+            <a:srgbClr val="FFFFFF"/>
           </a:solidFill>
-          <a:ln>
-            <a:noFill/>
+          <a:ln w="15875">
+            <a:solidFill>
+              <a:srgbClr val="D5DEE6"/>
+            </a:solidFill>
           </a:ln>
           <a:effectLst/>
         </p:spPr>
@@ -16264,40 +16979,19 @@
           <a:lstStyle/>
           <a:p>
             <a:pPr algn="ctr"/>
-            <a:r>
-              <a:rPr sz="1700" b="1" i="0">
-                <a:solidFill>
-                  <a:srgbClr val="FFFFFF"/>
-                </a:solidFill>
-                <a:latin typeface="Bahnschrift"/>
-              </a:rPr>
-              <a:t>GREEN</a:t>
-            </a:r>
-          </a:p>
-          <a:p>
-            <a:pPr algn="ctr"/>
-            <a:r>
-              <a:rPr sz="1200" b="0" i="0">
-                <a:solidFill>
-                  <a:srgbClr val="FFFFFF"/>
-                </a:solidFill>
-                <a:latin typeface="Arial"/>
-              </a:rPr>
-              <a:t>Agent proceeds</a:t>
-            </a:r>
-          </a:p>
-        </p:txBody>
-      </p:sp>
-      <p:sp>
-        <p:nvSpPr>
-          <p:cNvPr id="7" name="TextBox 6"/>
+          </a:p>
+        </p:txBody>
+      </p:sp>
+      <p:sp>
+        <p:nvSpPr>
+          <p:cNvPr id="11" name="TextBox 10"/>
           <p:cNvSpPr txBox="1"/>
           <p:nvPr/>
         </p:nvSpPr>
         <p:spPr>
           <a:xfrm>
-            <a:off x="3200400" y="1325880"/>
-            <a:ext cx="6400800" cy="822960"/>
+            <a:off x="2944368" y="1389888"/>
+            <a:ext cx="1737360" cy="475488"/>
           </a:xfrm>
           <a:prstGeom prst="rect">
             <a:avLst/>
@@ -16310,29 +17004,64 @@
           </a:bodyPr>
           <a:lstStyle/>
           <a:p>
-            <a:pPr algn="l"/>
-            <a:r>
-              <a:rPr sz="1500" b="0" i="0">
+            <a:pPr algn="ctr"/>
+            <a:r>
+              <a:rPr sz="2400" b="1" i="0">
                 <a:solidFill>
                   <a:srgbClr val="002B55"/>
                 </a:solidFill>
+                <a:latin typeface="Bahnschrift"/>
+              </a:rPr>
+              <a:t>[A] h</a:t>
+            </a:r>
+          </a:p>
+        </p:txBody>
+      </p:sp>
+      <p:sp>
+        <p:nvSpPr>
+          <p:cNvPr id="12" name="TextBox 11"/>
+          <p:cNvSpPr txBox="1"/>
+          <p:nvPr/>
+        </p:nvSpPr>
+        <p:spPr>
+          <a:xfrm>
+            <a:off x="2944368" y="1883664"/>
+            <a:ext cx="1737360" cy="329184"/>
+          </a:xfrm>
+          <a:prstGeom prst="rect">
+            <a:avLst/>
+          </a:prstGeom>
+          <a:noFill/>
+        </p:spPr>
+        <p:txBody>
+          <a:bodyPr wrap="square" lIns="36576" rIns="36576" tIns="18288" bIns="18288" anchor="t">
+            <a:spAutoFit/>
+          </a:bodyPr>
+          <a:lstStyle/>
+          <a:p>
+            <a:pPr algn="ctr"/>
+            <a:r>
+              <a:rPr sz="1100" b="0" i="0">
+                <a:solidFill>
+                  <a:srgbClr val="28455F"/>
+                </a:solidFill>
                 <a:latin typeface="Arial"/>
               </a:rPr>
-              <a:t>[e.g. read files, build tables, draft]</a:t>
-            </a:r>
-          </a:p>
-        </p:txBody>
-      </p:sp>
-      <p:sp>
-        <p:nvSpPr>
-          <p:cNvPr id="8" name="TextBox 7"/>
+              <a:t>AI-assisted incl. review</a:t>
+            </a:r>
+          </a:p>
+        </p:txBody>
+      </p:sp>
+      <p:sp>
+        <p:nvSpPr>
+          <p:cNvPr id="13" name="TextBox 12"/>
           <p:cNvSpPr txBox="1"/>
           <p:nvPr/>
         </p:nvSpPr>
         <p:spPr>
           <a:xfrm>
-            <a:off x="9601200" y="1325880"/>
-            <a:ext cx="1874519" cy="822960"/>
+            <a:off x="4681727" y="1325880"/>
+            <a:ext cx="228600" cy="868680"/>
           </a:xfrm>
           <a:prstGeom prst="rect">
             <a:avLst/>
@@ -16345,33 +17074,68 @@
           </a:bodyPr>
           <a:lstStyle/>
           <a:p>
-            <a:pPr algn="r"/>
-            <a:r>
-              <a:rPr sz="1400" b="1" i="0">
-                <a:solidFill>
-                  <a:srgbClr val="2E9D6B"/>
+            <a:pPr algn="ctr"/>
+            <a:r>
+              <a:rPr sz="3400" b="0" i="0">
+                <a:solidFill>
+                  <a:srgbClr val="28455F"/>
+                </a:solidFill>
+                <a:latin typeface="Arial"/>
+              </a:rPr>
+              <a:t>)</a:t>
+            </a:r>
+          </a:p>
+        </p:txBody>
+      </p:sp>
+      <p:sp>
+        <p:nvSpPr>
+          <p:cNvPr id="14" name="TextBox 13"/>
+          <p:cNvSpPr txBox="1"/>
+          <p:nvPr/>
+        </p:nvSpPr>
+        <p:spPr>
+          <a:xfrm>
+            <a:off x="4910327" y="1371600"/>
+            <a:ext cx="365760" cy="868680"/>
+          </a:xfrm>
+          <a:prstGeom prst="rect">
+            <a:avLst/>
+          </a:prstGeom>
+          <a:noFill/>
+        </p:spPr>
+        <p:txBody>
+          <a:bodyPr wrap="square" lIns="36576" rIns="36576" tIns="18288" bIns="18288" anchor="ctr">
+            <a:spAutoFit/>
+          </a:bodyPr>
+          <a:lstStyle/>
+          <a:p>
+            <a:pPr algn="ctr"/>
+            <a:r>
+              <a:rPr sz="3000" b="1" i="0">
+                <a:solidFill>
+                  <a:srgbClr val="28455F"/>
                 </a:solidFill>
                 <a:latin typeface="Bahnschrift"/>
               </a:rPr>
-              <a:t>Agent</a:t>
-            </a:r>
-          </a:p>
-        </p:txBody>
-      </p:sp>
-      <p:sp>
-        <p:nvSpPr>
-          <p:cNvPr id="9" name="Rounded Rectangle 8"/>
+              <a:t>×</a:t>
+            </a:r>
+          </a:p>
+        </p:txBody>
+      </p:sp>
+      <p:sp>
+        <p:nvSpPr>
+          <p:cNvPr id="15" name="Rounded Rectangle 14"/>
           <p:cNvSpPr/>
           <p:nvPr/>
         </p:nvSpPr>
         <p:spPr>
           <a:xfrm>
-            <a:off x="612648" y="2286000"/>
-            <a:ext cx="10972800" cy="822960"/>
+            <a:off x="5276088" y="1371600"/>
+            <a:ext cx="1737360" cy="868680"/>
           </a:xfrm>
           <a:prstGeom prst="roundRect">
             <a:avLst>
-              <a:gd name="adj" fmla="val 12000"/>
+              <a:gd name="adj" fmla="val 8000"/>
             </a:avLst>
           </a:prstGeom>
           <a:solidFill>
@@ -16379,7 +17143,7 @@
           </a:solidFill>
           <a:ln w="15875">
             <a:solidFill>
-              <a:srgbClr val="E2E8F0"/>
+              <a:srgbClr val="D5DEE6"/>
             </a:solidFill>
           </a:ln>
           <a:effectLst/>
@@ -16408,25 +17172,132 @@
       </p:sp>
       <p:sp>
         <p:nvSpPr>
-          <p:cNvPr id="10" name="Rounded Rectangle 9"/>
+          <p:cNvPr id="16" name="TextBox 15"/>
+          <p:cNvSpPr txBox="1"/>
+          <p:nvPr/>
+        </p:nvSpPr>
+        <p:spPr>
+          <a:xfrm>
+            <a:off x="5276088" y="1389888"/>
+            <a:ext cx="1737360" cy="475488"/>
+          </a:xfrm>
+          <a:prstGeom prst="rect">
+            <a:avLst/>
+          </a:prstGeom>
+          <a:noFill/>
+        </p:spPr>
+        <p:txBody>
+          <a:bodyPr wrap="square" lIns="36576" rIns="36576" tIns="18288" bIns="18288" anchor="ctr">
+            <a:spAutoFit/>
+          </a:bodyPr>
+          <a:lstStyle/>
+          <a:p>
+            <a:pPr algn="ctr"/>
+            <a:r>
+              <a:rPr sz="2400" b="1" i="0">
+                <a:solidFill>
+                  <a:srgbClr val="002B55"/>
+                </a:solidFill>
+                <a:latin typeface="Bahnschrift"/>
+              </a:rPr>
+              <a:t>[N]</a:t>
+            </a:r>
+          </a:p>
+        </p:txBody>
+      </p:sp>
+      <p:sp>
+        <p:nvSpPr>
+          <p:cNvPr id="17" name="TextBox 16"/>
+          <p:cNvSpPr txBox="1"/>
+          <p:nvPr/>
+        </p:nvSpPr>
+        <p:spPr>
+          <a:xfrm>
+            <a:off x="5276088" y="1883664"/>
+            <a:ext cx="1737360" cy="329184"/>
+          </a:xfrm>
+          <a:prstGeom prst="rect">
+            <a:avLst/>
+          </a:prstGeom>
+          <a:noFill/>
+        </p:spPr>
+        <p:txBody>
+          <a:bodyPr wrap="square" lIns="36576" rIns="36576" tIns="18288" bIns="18288" anchor="t">
+            <a:spAutoFit/>
+          </a:bodyPr>
+          <a:lstStyle/>
+          <a:p>
+            <a:pPr algn="ctr"/>
+            <a:r>
+              <a:rPr sz="1100" b="0" i="0">
+                <a:solidFill>
+                  <a:srgbClr val="28455F"/>
+                </a:solidFill>
+                <a:latin typeface="Arial"/>
+              </a:rPr>
+              <a:t>cycles / year</a:t>
+            </a:r>
+          </a:p>
+        </p:txBody>
+      </p:sp>
+      <p:sp>
+        <p:nvSpPr>
+          <p:cNvPr id="18" name="TextBox 17"/>
+          <p:cNvSpPr txBox="1"/>
+          <p:nvPr/>
+        </p:nvSpPr>
+        <p:spPr>
+          <a:xfrm>
+            <a:off x="7013448" y="1371600"/>
+            <a:ext cx="365760" cy="868680"/>
+          </a:xfrm>
+          <a:prstGeom prst="rect">
+            <a:avLst/>
+          </a:prstGeom>
+          <a:noFill/>
+        </p:spPr>
+        <p:txBody>
+          <a:bodyPr wrap="square" lIns="36576" rIns="36576" tIns="18288" bIns="18288" anchor="ctr">
+            <a:spAutoFit/>
+          </a:bodyPr>
+          <a:lstStyle/>
+          <a:p>
+            <a:pPr algn="ctr"/>
+            <a:r>
+              <a:rPr sz="3000" b="1" i="0">
+                <a:solidFill>
+                  <a:srgbClr val="28455F"/>
+                </a:solidFill>
+                <a:latin typeface="Bahnschrift"/>
+              </a:rPr>
+              <a:t>×</a:t>
+            </a:r>
+          </a:p>
+        </p:txBody>
+      </p:sp>
+      <p:sp>
+        <p:nvSpPr>
+          <p:cNvPr id="19" name="Rounded Rectangle 18"/>
           <p:cNvSpPr/>
           <p:nvPr/>
         </p:nvSpPr>
         <p:spPr>
           <a:xfrm>
-            <a:off x="612648" y="2286000"/>
-            <a:ext cx="2377440" cy="822960"/>
+            <a:off x="7379208" y="1371600"/>
+            <a:ext cx="1737360" cy="868680"/>
           </a:xfrm>
           <a:prstGeom prst="roundRect">
             <a:avLst>
-              <a:gd name="adj" fmla="val 12000"/>
+              <a:gd name="adj" fmla="val 8000"/>
             </a:avLst>
           </a:prstGeom>
           <a:solidFill>
-            <a:srgbClr val="B7791F"/>
+            <a:srgbClr val="FFFFFF"/>
           </a:solidFill>
-          <a:ln>
-            <a:noFill/>
+          <a:ln w="15875">
+            <a:solidFill>
+              <a:srgbClr val="D5DEE6"/>
+            </a:solidFill>
           </a:ln>
           <a:effectLst/>
         </p:spPr>
@@ -16449,40 +17320,19 @@
           <a:lstStyle/>
           <a:p>
             <a:pPr algn="ctr"/>
-            <a:r>
-              <a:rPr sz="1700" b="1" i="0">
-                <a:solidFill>
-                  <a:srgbClr val="FFFFFF"/>
-                </a:solidFill>
-                <a:latin typeface="Bahnschrift"/>
-              </a:rPr>
-              <a:t>YELLOW</a:t>
-            </a:r>
-          </a:p>
-          <a:p>
-            <a:pPr algn="ctr"/>
-            <a:r>
-              <a:rPr sz="1200" b="0" i="0">
-                <a:solidFill>
-                  <a:srgbClr val="FFFFFF"/>
-                </a:solidFill>
-                <a:latin typeface="Arial"/>
-              </a:rPr>
-              <a:t>Proceed and flag</a:t>
-            </a:r>
-          </a:p>
-        </p:txBody>
-      </p:sp>
-      <p:sp>
-        <p:nvSpPr>
-          <p:cNvPr id="11" name="TextBox 10"/>
+          </a:p>
+        </p:txBody>
+      </p:sp>
+      <p:sp>
+        <p:nvSpPr>
+          <p:cNvPr id="20" name="TextBox 19"/>
           <p:cNvSpPr txBox="1"/>
           <p:nvPr/>
         </p:nvSpPr>
         <p:spPr>
           <a:xfrm>
-            <a:off x="3200400" y="2286000"/>
-            <a:ext cx="6400800" cy="822960"/>
+            <a:off x="7379208" y="1389888"/>
+            <a:ext cx="1737360" cy="475488"/>
           </a:xfrm>
           <a:prstGeom prst="rect">
             <a:avLst/>
@@ -16495,29 +17345,64 @@
           </a:bodyPr>
           <a:lstStyle/>
           <a:p>
-            <a:pPr algn="l"/>
-            <a:r>
-              <a:rPr sz="1500" b="0" i="0">
+            <a:pPr algn="ctr"/>
+            <a:r>
+              <a:rPr sz="2400" b="1" i="0">
                 <a:solidFill>
                   <a:srgbClr val="002B55"/>
                 </a:solidFill>
+                <a:latin typeface="Bahnschrift"/>
+              </a:rPr>
+              <a:t>$[R]</a:t>
+            </a:r>
+          </a:p>
+        </p:txBody>
+      </p:sp>
+      <p:sp>
+        <p:nvSpPr>
+          <p:cNvPr id="21" name="TextBox 20"/>
+          <p:cNvSpPr txBox="1"/>
+          <p:nvPr/>
+        </p:nvSpPr>
+        <p:spPr>
+          <a:xfrm>
+            <a:off x="7379208" y="1883664"/>
+            <a:ext cx="1737360" cy="329184"/>
+          </a:xfrm>
+          <a:prstGeom prst="rect">
+            <a:avLst/>
+          </a:prstGeom>
+          <a:noFill/>
+        </p:spPr>
+        <p:txBody>
+          <a:bodyPr wrap="square" lIns="36576" rIns="36576" tIns="18288" bIns="18288" anchor="t">
+            <a:spAutoFit/>
+          </a:bodyPr>
+          <a:lstStyle/>
+          <a:p>
+            <a:pPr algn="ctr"/>
+            <a:r>
+              <a:rPr sz="1100" b="0" i="0">
+                <a:solidFill>
+                  <a:srgbClr val="28455F"/>
+                </a:solidFill>
                 <a:latin typeface="Arial"/>
               </a:rPr>
-              <a:t>[e.g. conflicting or missing sources]</a:t>
-            </a:r>
-          </a:p>
-        </p:txBody>
-      </p:sp>
-      <p:sp>
-        <p:nvSpPr>
-          <p:cNvPr id="12" name="TextBox 11"/>
+              <a:t>loaded rate / hour</a:t>
+            </a:r>
+          </a:p>
+        </p:txBody>
+      </p:sp>
+      <p:sp>
+        <p:nvSpPr>
+          <p:cNvPr id="22" name="TextBox 21"/>
           <p:cNvSpPr txBox="1"/>
           <p:nvPr/>
         </p:nvSpPr>
         <p:spPr>
           <a:xfrm>
-            <a:off x="9601200" y="2286000"/>
-            <a:ext cx="1874519" cy="822960"/>
+            <a:off x="9116568" y="1371600"/>
+            <a:ext cx="365760" cy="868680"/>
           </a:xfrm>
           <a:prstGeom prst="rect">
             <a:avLst/>
@@ -16530,41 +17415,41 @@
           </a:bodyPr>
           <a:lstStyle/>
           <a:p>
-            <a:pPr algn="r"/>
-            <a:r>
-              <a:rPr sz="1400" b="1" i="0">
-                <a:solidFill>
-                  <a:srgbClr val="B7791F"/>
+            <a:pPr algn="ctr"/>
+            <a:r>
+              <a:rPr sz="3000" b="1" i="0">
+                <a:solidFill>
+                  <a:srgbClr val="28455F"/>
                 </a:solidFill>
                 <a:latin typeface="Bahnschrift"/>
               </a:rPr>
-              <a:t>Agent + flag</a:t>
-            </a:r>
-          </a:p>
-        </p:txBody>
-      </p:sp>
-      <p:sp>
-        <p:nvSpPr>
-          <p:cNvPr id="13" name="Rounded Rectangle 12"/>
+              <a:t>=</a:t>
+            </a:r>
+          </a:p>
+        </p:txBody>
+      </p:sp>
+      <p:sp>
+        <p:nvSpPr>
+          <p:cNvPr id="23" name="Rounded Rectangle 22"/>
           <p:cNvSpPr/>
           <p:nvPr/>
         </p:nvSpPr>
         <p:spPr>
           <a:xfrm>
-            <a:off x="612648" y="3246120"/>
-            <a:ext cx="10972800" cy="822960"/>
+            <a:off x="9482328" y="1371600"/>
+            <a:ext cx="2011680" cy="868680"/>
           </a:xfrm>
           <a:prstGeom prst="roundRect">
             <a:avLst>
-              <a:gd name="adj" fmla="val 12000"/>
+              <a:gd name="adj" fmla="val 8000"/>
             </a:avLst>
           </a:prstGeom>
           <a:solidFill>
-            <a:srgbClr val="FFFFFF"/>
+            <a:srgbClr val="FDEBE1"/>
           </a:solidFill>
           <a:ln w="15875">
             <a:solidFill>
-              <a:srgbClr val="E2E8F0"/>
+              <a:srgbClr val="D5DEE6"/>
             </a:solidFill>
           </a:ln>
           <a:effectLst/>
@@ -16593,81 +17478,14 @@
       </p:sp>
       <p:sp>
         <p:nvSpPr>
-          <p:cNvPr id="14" name="Rounded Rectangle 13"/>
-          <p:cNvSpPr/>
-          <p:nvPr/>
-        </p:nvSpPr>
-        <p:spPr>
-          <a:xfrm>
-            <a:off x="612648" y="3246120"/>
-            <a:ext cx="2377440" cy="822960"/>
-          </a:xfrm>
-          <a:prstGeom prst="roundRect">
-            <a:avLst>
-              <a:gd name="adj" fmla="val 12000"/>
-            </a:avLst>
-          </a:prstGeom>
-          <a:solidFill>
-            <a:srgbClr val="D64545"/>
-          </a:solidFill>
-          <a:ln>
-            <a:noFill/>
-          </a:ln>
-          <a:effectLst/>
-        </p:spPr>
-        <p:style>
-          <a:lnRef idx="1">
-            <a:schemeClr val="accent1"/>
-          </a:lnRef>
-          <a:fillRef idx="3">
-            <a:schemeClr val="accent1"/>
-          </a:fillRef>
-          <a:effectRef idx="2">
-            <a:schemeClr val="accent1"/>
-          </a:effectRef>
-          <a:fontRef idx="minor">
-            <a:schemeClr val="lt1"/>
-          </a:fontRef>
-        </p:style>
-        <p:txBody>
-          <a:bodyPr rtlCol="0" anchor="ctr" wrap="square" lIns="73152" rIns="73152" tIns="36576" bIns="36576"/>
-          <a:lstStyle/>
-          <a:p>
-            <a:pPr algn="ctr"/>
-            <a:r>
-              <a:rPr sz="1700" b="1" i="0">
-                <a:solidFill>
-                  <a:srgbClr val="FFFFFF"/>
-                </a:solidFill>
-                <a:latin typeface="Bahnschrift"/>
-              </a:rPr>
-              <a:t>RED</a:t>
-            </a:r>
-          </a:p>
-          <a:p>
-            <a:pPr algn="ctr"/>
-            <a:r>
-              <a:rPr sz="1200" b="0" i="0">
-                <a:solidFill>
-                  <a:srgbClr val="FFFFFF"/>
-                </a:solidFill>
-                <a:latin typeface="Arial"/>
-              </a:rPr>
-              <a:t>Human decides</a:t>
-            </a:r>
-          </a:p>
-        </p:txBody>
-      </p:sp>
-      <p:sp>
-        <p:nvSpPr>
-          <p:cNvPr id="15" name="TextBox 14"/>
+          <p:cNvPr id="24" name="TextBox 23"/>
           <p:cNvSpPr txBox="1"/>
           <p:nvPr/>
         </p:nvSpPr>
         <p:spPr>
           <a:xfrm>
-            <a:off x="3200400" y="3246120"/>
-            <a:ext cx="6400800" cy="822960"/>
+            <a:off x="9482328" y="1389888"/>
+            <a:ext cx="2011680" cy="475488"/>
           </a:xfrm>
           <a:prstGeom prst="rect">
             <a:avLst/>
@@ -16680,29 +17498,82 @@
           </a:bodyPr>
           <a:lstStyle/>
           <a:p>
-            <a:pPr algn="l"/>
-            <a:r>
-              <a:rPr sz="1500" b="0" i="0">
-                <a:solidFill>
-                  <a:srgbClr val="002B55"/>
+            <a:pPr algn="ctr"/>
+            <a:r>
+              <a:rPr sz="2400" b="1" i="0">
+                <a:solidFill>
+                  <a:srgbClr val="F47735"/>
+                </a:solidFill>
+                <a:latin typeface="Bahnschrift"/>
+              </a:rPr>
+              <a:t>$[V]</a:t>
+            </a:r>
+          </a:p>
+        </p:txBody>
+      </p:sp>
+      <p:sp>
+        <p:nvSpPr>
+          <p:cNvPr id="25" name="TextBox 24"/>
+          <p:cNvSpPr txBox="1"/>
+          <p:nvPr/>
+        </p:nvSpPr>
+        <p:spPr>
+          <a:xfrm>
+            <a:off x="9482328" y="1883664"/>
+            <a:ext cx="2011680" cy="329184"/>
+          </a:xfrm>
+          <a:prstGeom prst="rect">
+            <a:avLst/>
+          </a:prstGeom>
+          <a:noFill/>
+        </p:spPr>
+        <p:txBody>
+          <a:bodyPr wrap="square" lIns="36576" rIns="36576" tIns="18288" bIns="18288" anchor="t">
+            <a:spAutoFit/>
+          </a:bodyPr>
+          <a:lstStyle/>
+          <a:p>
+            <a:pPr algn="ctr"/>
+            <a:r>
+              <a:rPr sz="1100" b="0" i="0">
+                <a:solidFill>
+                  <a:srgbClr val="28455F"/>
                 </a:solidFill>
                 <a:latin typeface="Arial"/>
               </a:rPr>
-              <a:t>[e.g. anything external, safety, approvals]</a:t>
-            </a:r>
-          </a:p>
-        </p:txBody>
-      </p:sp>
-      <p:sp>
-        <p:nvSpPr>
-          <p:cNvPr id="16" name="TextBox 15"/>
+              <a:t>annual value</a:t>
+            </a:r>
+          </a:p>
+        </p:txBody>
+      </p:sp>
+      <p:graphicFrame>
+        <p:nvGraphicFramePr>
+          <p:cNvPr id="26" name="Chart 25"/>
+          <p:cNvGraphicFramePr>
+            <a:graphicFrameLocks noGrp="1"/>
+          </p:cNvGraphicFramePr>
+          <p:nvPr/>
+        </p:nvGraphicFramePr>
+        <p:xfrm>
+          <a:off x="612648" y="2514600"/>
+          <a:ext cx="6035040" cy="3429000"/>
+        </p:xfrm>
+        <a:graphic>
+          <a:graphicData uri="http://schemas.openxmlformats.org/drawingml/2006/chart">
+            <c:chart xmlns:c="http://schemas.openxmlformats.org/drawingml/2006/chart" r:id="rId3"/>
+          </a:graphicData>
+        </a:graphic>
+      </p:graphicFrame>
+      <p:sp>
+        <p:nvSpPr>
+          <p:cNvPr id="27" name="TextBox 26"/>
           <p:cNvSpPr txBox="1"/>
           <p:nvPr/>
         </p:nvSpPr>
         <p:spPr>
           <a:xfrm>
-            <a:off x="9601200" y="3246120"/>
-            <a:ext cx="1874519" cy="822960"/>
+            <a:off x="7040880" y="2606040"/>
+            <a:ext cx="4544568" cy="914400"/>
           </a:xfrm>
           <a:prstGeom prst="rect">
             <a:avLst/>
@@ -16715,453 +17586,155 @@
           </a:bodyPr>
           <a:lstStyle/>
           <a:p>
-            <a:pPr algn="r"/>
-            <a:r>
-              <a:rPr sz="1400" b="1" i="0">
-                <a:solidFill>
-                  <a:srgbClr val="D64545"/>
+            <a:pPr algn="l"/>
+            <a:r>
+              <a:rPr sz="5400" b="1" i="0">
+                <a:solidFill>
+                  <a:srgbClr val="007879"/>
                 </a:solidFill>
                 <a:latin typeface="Bahnschrift"/>
               </a:rPr>
-              <a:t>You decide</a:t>
-            </a:r>
-          </a:p>
-        </p:txBody>
-      </p:sp>
-      <p:sp>
-        <p:nvSpPr>
-          <p:cNvPr id="17" name="Rounded Rectangle 16"/>
-          <p:cNvSpPr/>
-          <p:nvPr/>
-        </p:nvSpPr>
-        <p:spPr>
-          <a:xfrm>
-            <a:off x="612648" y="4343400"/>
-            <a:ext cx="3520440" cy="685800"/>
-          </a:xfrm>
-          <a:prstGeom prst="roundRect">
-            <a:avLst>
-              <a:gd name="adj" fmla="val 10000"/>
-            </a:avLst>
-          </a:prstGeom>
-          <a:solidFill>
-            <a:srgbClr val="FDEBE1"/>
-          </a:solidFill>
-          <a:ln>
-            <a:noFill/>
-          </a:ln>
-          <a:effectLst/>
-        </p:spPr>
-        <p:style>
-          <a:lnRef idx="1">
-            <a:schemeClr val="accent1"/>
-          </a:lnRef>
-          <a:fillRef idx="3">
-            <a:schemeClr val="accent1"/>
-          </a:fillRef>
-          <a:effectRef idx="2">
-            <a:schemeClr val="accent1"/>
-          </a:effectRef>
-          <a:fontRef idx="minor">
-            <a:schemeClr val="lt1"/>
-          </a:fontRef>
-        </p:style>
-        <p:txBody>
-          <a:bodyPr rtlCol="0" anchor="ctr" wrap="square" lIns="73152" rIns="73152" tIns="36576" bIns="36576"/>
-          <a:lstStyle/>
-          <a:p>
-            <a:pPr algn="ctr"/>
-            <a:r>
-              <a:rPr sz="1400" b="1" i="0">
-                <a:solidFill>
-                  <a:srgbClr val="B4501F"/>
+              <a:t>[X] h</a:t>
+            </a:r>
+          </a:p>
+        </p:txBody>
+      </p:sp>
+      <p:sp>
+        <p:nvSpPr>
+          <p:cNvPr id="28" name="TextBox 27"/>
+          <p:cNvSpPr txBox="1"/>
+          <p:nvPr/>
+        </p:nvSpPr>
+        <p:spPr>
+          <a:xfrm>
+            <a:off x="7040880" y="3520440"/>
+            <a:ext cx="4544568" cy="411480"/>
+          </a:xfrm>
+          <a:prstGeom prst="rect">
+            <a:avLst/>
+          </a:prstGeom>
+          <a:noFill/>
+        </p:spPr>
+        <p:txBody>
+          <a:bodyPr wrap="square" lIns="36576" rIns="36576" tIns="18288" bIns="18288" anchor="t">
+            <a:spAutoFit/>
+          </a:bodyPr>
+          <a:lstStyle/>
+          <a:p>
+            <a:pPr algn="l"/>
+            <a:r>
+              <a:rPr sz="1600" b="0" i="0">
+                <a:solidFill>
+                  <a:srgbClr val="002B55"/>
                 </a:solidFill>
                 <a:latin typeface="Arial"/>
               </a:rPr>
-              <a:t>[Risk 1]</a:t>
-            </a:r>
-          </a:p>
-        </p:txBody>
-      </p:sp>
-      <p:cxnSp>
-        <p:nvCxnSpPr>
-          <p:cNvPr id="18" name="Connector 17"/>
-          <p:cNvCxnSpPr/>
-          <p:nvPr/>
-        </p:nvCxnSpPr>
-        <p:spPr>
-          <a:xfrm>
-            <a:off x="2368296" y="5029200"/>
-            <a:ext cx="0" cy="228600"/>
-          </a:xfrm>
-          <a:prstGeom prst="line">
-            <a:avLst/>
-          </a:prstGeom>
-          <a:ln w="15875">
-            <a:solidFill>
-              <a:srgbClr val="8A9BAA"/>
-            </a:solidFill>
-            <a:tailEnd type="triangle" w="med" len="med"/>
-          </a:ln>
-        </p:spPr>
-        <p:style>
-          <a:lnRef idx="2">
-            <a:schemeClr val="accent1"/>
-          </a:lnRef>
-          <a:fillRef idx="0">
-            <a:schemeClr val="accent1"/>
-          </a:fillRef>
-          <a:effectRef idx="1">
-            <a:schemeClr val="accent1"/>
-          </a:effectRef>
-          <a:fontRef idx="minor">
-            <a:schemeClr val="tx1"/>
-          </a:fontRef>
-        </p:style>
-      </p:cxnSp>
-      <p:sp>
-        <p:nvSpPr>
-          <p:cNvPr id="19" name="Rounded Rectangle 18"/>
-          <p:cNvSpPr/>
-          <p:nvPr/>
-        </p:nvSpPr>
-        <p:spPr>
-          <a:xfrm>
-            <a:off x="612648" y="5257800"/>
-            <a:ext cx="3520440" cy="868680"/>
-          </a:xfrm>
-          <a:prstGeom prst="roundRect">
-            <a:avLst>
-              <a:gd name="adj" fmla="val 10000"/>
-            </a:avLst>
-          </a:prstGeom>
-          <a:solidFill>
-            <a:srgbClr val="E3F1F0"/>
-          </a:solidFill>
-          <a:ln>
-            <a:noFill/>
-          </a:ln>
-          <a:effectLst/>
-        </p:spPr>
-        <p:style>
-          <a:lnRef idx="1">
-            <a:schemeClr val="accent1"/>
-          </a:lnRef>
-          <a:fillRef idx="3">
-            <a:schemeClr val="accent1"/>
-          </a:fillRef>
-          <a:effectRef idx="2">
-            <a:schemeClr val="accent1"/>
-          </a:effectRef>
-          <a:fontRef idx="minor">
-            <a:schemeClr val="lt1"/>
-          </a:fontRef>
-        </p:style>
-        <p:txBody>
-          <a:bodyPr rtlCol="0" anchor="ctr" wrap="square" lIns="73152" rIns="73152" tIns="36576" bIns="36576"/>
-          <a:lstStyle/>
-          <a:p>
-            <a:pPr algn="ctr"/>
-            <a:r>
-              <a:rPr sz="1400" b="1" i="0">
-                <a:solidFill>
-                  <a:srgbClr val="007879"/>
+              <a:t>saved per year</a:t>
+            </a:r>
+          </a:p>
+        </p:txBody>
+      </p:sp>
+      <p:sp>
+        <p:nvSpPr>
+          <p:cNvPr id="29" name="TextBox 28"/>
+          <p:cNvSpPr txBox="1"/>
+          <p:nvPr/>
+        </p:nvSpPr>
+        <p:spPr>
+          <a:xfrm>
+            <a:off x="7040880" y="4206240"/>
+            <a:ext cx="4544568" cy="914400"/>
+          </a:xfrm>
+          <a:prstGeom prst="rect">
+            <a:avLst/>
+          </a:prstGeom>
+          <a:noFill/>
+        </p:spPr>
+        <p:txBody>
+          <a:bodyPr wrap="square" lIns="36576" rIns="36576" tIns="18288" bIns="18288" anchor="ctr">
+            <a:spAutoFit/>
+          </a:bodyPr>
+          <a:lstStyle/>
+          <a:p>
+            <a:pPr algn="l"/>
+            <a:r>
+              <a:rPr sz="5400" b="1" i="0">
+                <a:solidFill>
+                  <a:srgbClr val="F47735"/>
+                </a:solidFill>
+                <a:latin typeface="Bahnschrift"/>
+              </a:rPr>
+              <a:t>$[Y]</a:t>
+            </a:r>
+          </a:p>
+        </p:txBody>
+      </p:sp>
+      <p:sp>
+        <p:nvSpPr>
+          <p:cNvPr id="30" name="TextBox 29"/>
+          <p:cNvSpPr txBox="1"/>
+          <p:nvPr/>
+        </p:nvSpPr>
+        <p:spPr>
+          <a:xfrm>
+            <a:off x="7040880" y="5120640"/>
+            <a:ext cx="4544568" cy="411480"/>
+          </a:xfrm>
+          <a:prstGeom prst="rect">
+            <a:avLst/>
+          </a:prstGeom>
+          <a:noFill/>
+        </p:spPr>
+        <p:txBody>
+          <a:bodyPr wrap="square" lIns="36576" rIns="36576" tIns="18288" bIns="18288" anchor="t">
+            <a:spAutoFit/>
+          </a:bodyPr>
+          <a:lstStyle/>
+          <a:p>
+            <a:pPr algn="l"/>
+            <a:r>
+              <a:rPr sz="1600" b="0" i="0">
+                <a:solidFill>
+                  <a:srgbClr val="002B55"/>
                 </a:solidFill>
                 <a:latin typeface="Arial"/>
               </a:rPr>
-              <a:t>[Guardrail we built]</a:t>
-            </a:r>
-          </a:p>
-        </p:txBody>
-      </p:sp>
-      <p:sp>
-        <p:nvSpPr>
-          <p:cNvPr id="20" name="Rounded Rectangle 19"/>
-          <p:cNvSpPr/>
-          <p:nvPr/>
-        </p:nvSpPr>
-        <p:spPr>
-          <a:xfrm>
-            <a:off x="4334256" y="4343400"/>
-            <a:ext cx="3520440" cy="685800"/>
-          </a:xfrm>
-          <a:prstGeom prst="roundRect">
-            <a:avLst>
-              <a:gd name="adj" fmla="val 10000"/>
-            </a:avLst>
-          </a:prstGeom>
-          <a:solidFill>
-            <a:srgbClr val="FDEBE1"/>
-          </a:solidFill>
-          <a:ln>
-            <a:noFill/>
-          </a:ln>
-          <a:effectLst/>
-        </p:spPr>
-        <p:style>
-          <a:lnRef idx="1">
-            <a:schemeClr val="accent1"/>
-          </a:lnRef>
-          <a:fillRef idx="3">
-            <a:schemeClr val="accent1"/>
-          </a:fillRef>
-          <a:effectRef idx="2">
-            <a:schemeClr val="accent1"/>
-          </a:effectRef>
-          <a:fontRef idx="minor">
-            <a:schemeClr val="lt1"/>
-          </a:fontRef>
-        </p:style>
-        <p:txBody>
-          <a:bodyPr rtlCol="0" anchor="ctr" wrap="square" lIns="73152" rIns="73152" tIns="36576" bIns="36576"/>
-          <a:lstStyle/>
-          <a:p>
-            <a:pPr algn="ctr"/>
-            <a:r>
-              <a:rPr sz="1400" b="1" i="0">
-                <a:solidFill>
-                  <a:srgbClr val="B4501F"/>
+              <a:t>value per year</a:t>
+            </a:r>
+          </a:p>
+        </p:txBody>
+      </p:sp>
+      <p:sp>
+        <p:nvSpPr>
+          <p:cNvPr id="31" name="TextBox 30"/>
+          <p:cNvSpPr txBox="1"/>
+          <p:nvPr/>
+        </p:nvSpPr>
+        <p:spPr>
+          <a:xfrm>
+            <a:off x="7040880" y="5715000"/>
+            <a:ext cx="4544568" cy="457200"/>
+          </a:xfrm>
+          <a:prstGeom prst="rect">
+            <a:avLst/>
+          </a:prstGeom>
+          <a:noFill/>
+        </p:spPr>
+        <p:txBody>
+          <a:bodyPr wrap="square" lIns="36576" rIns="36576" tIns="18288" bIns="18288" anchor="t">
+            <a:spAutoFit/>
+          </a:bodyPr>
+          <a:lstStyle/>
+          <a:p>
+            <a:pPr algn="l"/>
+            <a:r>
+              <a:rPr sz="1100" b="0" i="1">
+                <a:solidFill>
+                  <a:srgbClr val="8A9BAA"/>
                 </a:solidFill>
                 <a:latin typeface="Arial"/>
               </a:rPr>
-              <a:t>[Risk 2]</a:t>
-            </a:r>
-          </a:p>
-        </p:txBody>
-      </p:sp>
-      <p:cxnSp>
-        <p:nvCxnSpPr>
-          <p:cNvPr id="21" name="Connector 20"/>
-          <p:cNvCxnSpPr/>
-          <p:nvPr/>
-        </p:nvCxnSpPr>
-        <p:spPr>
-          <a:xfrm>
-            <a:off x="6089904" y="5029200"/>
-            <a:ext cx="0" cy="228600"/>
-          </a:xfrm>
-          <a:prstGeom prst="line">
-            <a:avLst/>
-          </a:prstGeom>
-          <a:ln w="15875">
-            <a:solidFill>
-              <a:srgbClr val="8A9BAA"/>
-            </a:solidFill>
-            <a:tailEnd type="triangle" w="med" len="med"/>
-          </a:ln>
-        </p:spPr>
-        <p:style>
-          <a:lnRef idx="2">
-            <a:schemeClr val="accent1"/>
-          </a:lnRef>
-          <a:fillRef idx="0">
-            <a:schemeClr val="accent1"/>
-          </a:fillRef>
-          <a:effectRef idx="1">
-            <a:schemeClr val="accent1"/>
-          </a:effectRef>
-          <a:fontRef idx="minor">
-            <a:schemeClr val="tx1"/>
-          </a:fontRef>
-        </p:style>
-      </p:cxnSp>
-      <p:sp>
-        <p:nvSpPr>
-          <p:cNvPr id="22" name="Rounded Rectangle 21"/>
-          <p:cNvSpPr/>
-          <p:nvPr/>
-        </p:nvSpPr>
-        <p:spPr>
-          <a:xfrm>
-            <a:off x="4334256" y="5257800"/>
-            <a:ext cx="3520440" cy="868680"/>
-          </a:xfrm>
-          <a:prstGeom prst="roundRect">
-            <a:avLst>
-              <a:gd name="adj" fmla="val 10000"/>
-            </a:avLst>
-          </a:prstGeom>
-          <a:solidFill>
-            <a:srgbClr val="E3F1F0"/>
-          </a:solidFill>
-          <a:ln>
-            <a:noFill/>
-          </a:ln>
-          <a:effectLst/>
-        </p:spPr>
-        <p:style>
-          <a:lnRef idx="1">
-            <a:schemeClr val="accent1"/>
-          </a:lnRef>
-          <a:fillRef idx="3">
-            <a:schemeClr val="accent1"/>
-          </a:fillRef>
-          <a:effectRef idx="2">
-            <a:schemeClr val="accent1"/>
-          </a:effectRef>
-          <a:fontRef idx="minor">
-            <a:schemeClr val="lt1"/>
-          </a:fontRef>
-        </p:style>
-        <p:txBody>
-          <a:bodyPr rtlCol="0" anchor="ctr" wrap="square" lIns="73152" rIns="73152" tIns="36576" bIns="36576"/>
-          <a:lstStyle/>
-          <a:p>
-            <a:pPr algn="ctr"/>
-            <a:r>
-              <a:rPr sz="1400" b="1" i="0">
-                <a:solidFill>
-                  <a:srgbClr val="007879"/>
-                </a:solidFill>
-                <a:latin typeface="Arial"/>
-              </a:rPr>
-              <a:t>[Guardrail we built]</a:t>
-            </a:r>
-          </a:p>
-        </p:txBody>
-      </p:sp>
-      <p:sp>
-        <p:nvSpPr>
-          <p:cNvPr id="23" name="Rounded Rectangle 22"/>
-          <p:cNvSpPr/>
-          <p:nvPr/>
-        </p:nvSpPr>
-        <p:spPr>
-          <a:xfrm>
-            <a:off x="8055864" y="4343400"/>
-            <a:ext cx="3520440" cy="685800"/>
-          </a:xfrm>
-          <a:prstGeom prst="roundRect">
-            <a:avLst>
-              <a:gd name="adj" fmla="val 10000"/>
-            </a:avLst>
-          </a:prstGeom>
-          <a:solidFill>
-            <a:srgbClr val="FDEBE1"/>
-          </a:solidFill>
-          <a:ln>
-            <a:noFill/>
-          </a:ln>
-          <a:effectLst/>
-        </p:spPr>
-        <p:style>
-          <a:lnRef idx="1">
-            <a:schemeClr val="accent1"/>
-          </a:lnRef>
-          <a:fillRef idx="3">
-            <a:schemeClr val="accent1"/>
-          </a:fillRef>
-          <a:effectRef idx="2">
-            <a:schemeClr val="accent1"/>
-          </a:effectRef>
-          <a:fontRef idx="minor">
-            <a:schemeClr val="lt1"/>
-          </a:fontRef>
-        </p:style>
-        <p:txBody>
-          <a:bodyPr rtlCol="0" anchor="ctr" wrap="square" lIns="73152" rIns="73152" tIns="36576" bIns="36576"/>
-          <a:lstStyle/>
-          <a:p>
-            <a:pPr algn="ctr"/>
-            <a:r>
-              <a:rPr sz="1400" b="1" i="0">
-                <a:solidFill>
-                  <a:srgbClr val="B4501F"/>
-                </a:solidFill>
-                <a:latin typeface="Arial"/>
-              </a:rPr>
-              <a:t>[Risk 3]</a:t>
-            </a:r>
-          </a:p>
-        </p:txBody>
-      </p:sp>
-      <p:cxnSp>
-        <p:nvCxnSpPr>
-          <p:cNvPr id="24" name="Connector 23"/>
-          <p:cNvCxnSpPr/>
-          <p:nvPr/>
-        </p:nvCxnSpPr>
-        <p:spPr>
-          <a:xfrm>
-            <a:off x="9811512" y="5029200"/>
-            <a:ext cx="0" cy="228600"/>
-          </a:xfrm>
-          <a:prstGeom prst="line">
-            <a:avLst/>
-          </a:prstGeom>
-          <a:ln w="15875">
-            <a:solidFill>
-              <a:srgbClr val="8A9BAA"/>
-            </a:solidFill>
-            <a:tailEnd type="triangle" w="med" len="med"/>
-          </a:ln>
-        </p:spPr>
-        <p:style>
-          <a:lnRef idx="2">
-            <a:schemeClr val="accent1"/>
-          </a:lnRef>
-          <a:fillRef idx="0">
-            <a:schemeClr val="accent1"/>
-          </a:fillRef>
-          <a:effectRef idx="1">
-            <a:schemeClr val="accent1"/>
-          </a:effectRef>
-          <a:fontRef idx="minor">
-            <a:schemeClr val="tx1"/>
-          </a:fontRef>
-        </p:style>
-      </p:cxnSp>
-      <p:sp>
-        <p:nvSpPr>
-          <p:cNvPr id="25" name="Rounded Rectangle 24"/>
-          <p:cNvSpPr/>
-          <p:nvPr/>
-        </p:nvSpPr>
-        <p:spPr>
-          <a:xfrm>
-            <a:off x="8055864" y="5257800"/>
-            <a:ext cx="3520440" cy="868680"/>
-          </a:xfrm>
-          <a:prstGeom prst="roundRect">
-            <a:avLst>
-              <a:gd name="adj" fmla="val 10000"/>
-            </a:avLst>
-          </a:prstGeom>
-          <a:solidFill>
-            <a:srgbClr val="E3F1F0"/>
-          </a:solidFill>
-          <a:ln>
-            <a:noFill/>
-          </a:ln>
-          <a:effectLst/>
-        </p:spPr>
-        <p:style>
-          <a:lnRef idx="1">
-            <a:schemeClr val="accent1"/>
-          </a:lnRef>
-          <a:fillRef idx="3">
-            <a:schemeClr val="accent1"/>
-          </a:fillRef>
-          <a:effectRef idx="2">
-            <a:schemeClr val="accent1"/>
-          </a:effectRef>
-          <a:fontRef idx="minor">
-            <a:schemeClr val="lt1"/>
-          </a:fontRef>
-        </p:style>
-        <p:txBody>
-          <a:bodyPr rtlCol="0" anchor="ctr" wrap="square" lIns="73152" rIns="73152" tIns="36576" bIns="36576"/>
-          <a:lstStyle/>
-          <a:p>
-            <a:pPr algn="ctr"/>
-            <a:r>
-              <a:rPr sz="1400" b="1" i="0">
-                <a:solidFill>
-                  <a:srgbClr val="007879"/>
-                </a:solidFill>
-                <a:latin typeface="Arial"/>
-              </a:rPr>
-              <a:t>[Guardrail we built]</a:t>
+              <a:t>Team estimates, not measured results. Practice data are fictional.</a:t>
             </a:r>
           </a:p>
         </p:txBody>
